--- a/docs/Test reale su dual boot.pptx
+++ b/docs/Test reale su dual boot.pptx
@@ -4557,7 +4557,7 @@
                 <a:ea typeface="Carlito"/>
                 <a:cs typeface="Carlito"/>
               </a:rPr>
-              <a:t>≈ 7 M/s</a:t>
+              <a:t>12–15</a:t>
             </a:r>
             <a:endParaRPr lang="en-US" sz="3600"/>
           </a:p>
@@ -4602,7 +4602,7 @@
                 <a:ea typeface="Carlito"/>
                 <a:cs typeface="Carlito"/>
               </a:rPr>
-              <a:t>pacchetti al secondo offerti da tre thread</a:t>
+              <a:t>milioni di pacchetti al secondo offerti da un solo thread</a:t>
             </a:r>
             <a:endParaRPr lang="en-US" sz="1400"/>
           </a:p>
@@ -4679,7 +4679,7 @@
                 <a:ea typeface="Carlito"/>
                 <a:cs typeface="Carlito"/>
               </a:rPr>
-              <a:t>141 ns</a:t>
+              <a:t>293 ns</a:t>
             </a:r>
             <a:endParaRPr lang="en-US" sz="3600"/>
           </a:p>
@@ -4724,7 +4724,7 @@
                 <a:ea typeface="Carlito"/>
                 <a:cs typeface="Carlito"/>
               </a:rPr>
-              <a:t>la baseline con xdp_gen, contro 302 ns con pktgen</a:t>
+              <a:t>P2 con xdp_gen, contro 529 ns con pktgen</a:t>
             </a:r>
             <a:endParaRPr lang="en-US" sz="1400"/>
           </a:p>
@@ -4893,7 +4893,7 @@
                 <a:ea typeface="Carlito"/>
                 <a:cs typeface="Carlito"/>
               </a:rPr>
-              <a:t>Il costo del generatore non passa più dal nodo. Ma anche xdp_gen ha un tetto, a circa 7 milioni di pacchetti al secondo: </a:t>
+              <a:t>Il costo del generatore non passa più dal nodo. Si usa </a:t>
             </a:r>
             <a:r>
               <a:rPr lang="en-US" sz="1500" b="1">
@@ -4904,7 +4904,7 @@
                 <a:ea typeface="Carlito"/>
                 <a:cs typeface="Carlito"/>
               </a:rPr>
-              <a:t>sopra, si misura il generatore</a:t>
+              <a:t>un thread per coda</a:t>
             </a:r>
             <a:r>
               <a:rPr lang="en-US" sz="1500">
@@ -4915,7 +4915,7 @@
                 <a:ea typeface="Carlito"/>
                 <a:cs typeface="Carlito"/>
               </a:rPr>
-              <a:t>.</a:t>
+              <a:t>: più thread nella stessa coda si intralciano e rallentano anche il nodo (slide 13).</a:t>
             </a:r>
             <a:endParaRPr lang="en-US" sz="1500"/>
           </a:p>
@@ -5891,7 +5891,7 @@
                           <a:ea typeface="Carlito"/>
                           <a:cs typeface="Carlito"/>
                         </a:rPr>
-                        <a:t>≈ 7 M/s</a:t>
+                        <a:t>≈ 12–15 M/s (un thread)</a:t>
                       </a:r>
                       <a:endParaRPr lang="en-US" sz="1400">
                         <a:latin typeface="Carlito"/>
@@ -6058,7 +6058,7 @@
                           <a:ea typeface="Carlito"/>
                           <a:cs typeface="Carlito"/>
                         </a:rPr>
-                        <a:t>baseline, P1 e P1.5; solo P2 e P3 saturano</a:t>
+                        <a:t>baseline e rxonly; P1, P1.5, P2 e P3 saturano</a:t>
                       </a:r>
                       <a:endParaRPr lang="en-US" sz="1400">
                         <a:latin typeface="Carlito"/>
@@ -6225,7 +6225,7 @@
                           <a:ea typeface="Carlito"/>
                           <a:cs typeface="Carlito"/>
                         </a:rPr>
-                        <a:t>misurare il costo di P2 e P3 senza la copia</a:t>
+                        <a:t>misurare il costo di P1–P3 senza la copia</a:t>
                       </a:r>
                       <a:endParaRPr lang="en-US" sz="1400">
                         <a:latin typeface="Carlito"/>
@@ -9122,7 +9122,7 @@
                 <a:ea typeface="Carlito"/>
                 <a:cs typeface="Carlito"/>
               </a:rPr>
-              <a:t>Con xdp_gen tre pipeline toccano il tetto del generatore</a:t>
+              <a:t>Con xdp_gen, un thread per coda: il costo del nodo</a:t>
             </a:r>
             <a:endParaRPr lang="en-US" sz="3000"/>
           </a:p>
@@ -9167,7 +9167,7 @@
                 <a:ea typeface="Carlito"/>
                 <a:cs typeface="Carlito"/>
               </a:rPr>
-              <a:t>5 giri, 64 byte · costo = 1 / pacchetti elaborati · a 512 e 1 514 byte il costo di P2 e P3 resta lo stesso entro il 3%</a:t>
+              <a:t>1 thread, 1 core, uscita separata · 3 giri, 64 byte · costo = tempo di CPU del nodo per pacchetto · a 512 e 1 514 byte P2 e P3 restano entro il 3%</a:t>
             </a:r>
             <a:endParaRPr lang="en-US" sz="1200"/>
           </a:p>
@@ -9349,7 +9349,7 @@
         <p:spPr bwMode="auto">
           <a:xfrm>
             <a:off x="1943100" y="2006600"/>
-            <a:ext cx="3282950" cy="279400"/>
+            <a:ext cx="3300000" cy="279400"/>
           </a:xfrm>
           <a:prstGeom prst="roundRect">
             <a:avLst>
@@ -9382,8 +9382,8 @@
         </p:nvSpPr>
         <p:spPr bwMode="auto">
           <a:xfrm>
-            <a:off x="5302250" y="2025650"/>
-            <a:ext cx="457200" cy="292100"/>
+            <a:off x="5319300" y="2025650"/>
+            <a:ext cx="640000" cy="292100"/>
           </a:xfrm>
           <a:prstGeom prst="rect">
             <a:avLst/>
@@ -9413,7 +9413,7 @@
                 <a:ea typeface="Carlito"/>
                 <a:cs typeface="Carlito"/>
               </a:rPr>
-              <a:t>6,89</a:t>
+              <a:t>15,03</a:t>
             </a:r>
             <a:endParaRPr lang="en-US" sz="1500"/>
           </a:p>
@@ -9458,7 +9458,7 @@
                 <a:ea typeface="Carlito"/>
                 <a:cs typeface="Carlito"/>
               </a:rPr>
-              <a:t>≤ 145 ns</a:t>
+              <a:t>≈ 40 ns</a:t>
             </a:r>
             <a:endParaRPr lang="en-US" sz="1400"/>
           </a:p>
@@ -9503,7 +9503,7 @@
                 <a:ea typeface="Carlito"/>
                 <a:cs typeface="Carlito"/>
               </a:rPr>
-              <a:t>limite superiore</a:t>
+              <a:t>non satura</a:t>
             </a:r>
             <a:endParaRPr lang="en-US" sz="1300"/>
           </a:p>
@@ -9595,7 +9595,7 @@
         <p:spPr bwMode="auto">
           <a:xfrm>
             <a:off x="1943100" y="2463800"/>
-            <a:ext cx="3384550" cy="279400"/>
+            <a:ext cx="2665469" cy="279400"/>
           </a:xfrm>
           <a:prstGeom prst="roundRect">
             <a:avLst>
@@ -9628,8 +9628,8 @@
         </p:nvSpPr>
         <p:spPr bwMode="auto">
           <a:xfrm>
-            <a:off x="5403850" y="2482850"/>
-            <a:ext cx="457200" cy="292100"/>
+            <a:off x="4684769" y="2482850"/>
+            <a:ext cx="640000" cy="292100"/>
           </a:xfrm>
           <a:prstGeom prst="rect">
             <a:avLst/>
@@ -9659,7 +9659,7 @@
                 <a:ea typeface="Carlito"/>
                 <a:cs typeface="Carlito"/>
               </a:rPr>
-              <a:t>7,11</a:t>
+              <a:t>12,14</a:t>
             </a:r>
             <a:endParaRPr lang="en-US" sz="1500"/>
           </a:p>
@@ -9704,7 +9704,7 @@
                 <a:ea typeface="Carlito"/>
                 <a:cs typeface="Carlito"/>
               </a:rPr>
-              <a:t>≤ 141 ns</a:t>
+              <a:t>≈ 67 ns</a:t>
             </a:r>
             <a:endParaRPr lang="en-US" sz="1400"/>
           </a:p>
@@ -9749,7 +9749,7 @@
                 <a:ea typeface="Carlito"/>
                 <a:cs typeface="Carlito"/>
               </a:rPr>
-              <a:t>limite superiore</a:t>
+              <a:t>non satura</a:t>
             </a:r>
             <a:endParaRPr lang="en-US" sz="1300"/>
           </a:p>
@@ -9841,7 +9841,7 @@
         <p:spPr bwMode="auto">
           <a:xfrm>
             <a:off x="1943100" y="2921000"/>
-            <a:ext cx="3022600" cy="279400"/>
+            <a:ext cx="1664271" cy="279400"/>
           </a:xfrm>
           <a:prstGeom prst="roundRect">
             <a:avLst>
@@ -9849,9 +9849,7 @@
             </a:avLst>
           </a:prstGeom>
           <a:solidFill>
-            <a:srgbClr val="C8551E">
-              <a:alpha val="50000"/>
-            </a:srgbClr>
+            <a:srgbClr val="C8551E"/>
           </a:solidFill>
           <a:ln/>
         </p:spPr>
@@ -9874,8 +9872,8 @@
         </p:nvSpPr>
         <p:spPr bwMode="auto">
           <a:xfrm>
-            <a:off x="5041900" y="2940050"/>
-            <a:ext cx="457200" cy="292100"/>
+            <a:off x="3683571" y="2940050"/>
+            <a:ext cx="640000" cy="292100"/>
           </a:xfrm>
           <a:prstGeom prst="rect">
             <a:avLst/>
@@ -9905,7 +9903,7 @@
                 <a:ea typeface="Carlito"/>
                 <a:cs typeface="Carlito"/>
               </a:rPr>
-              <a:t>6,34</a:t>
+              <a:t>7,58</a:t>
             </a:r>
             <a:endParaRPr lang="en-US" sz="1500"/>
           </a:p>
@@ -9950,7 +9948,7 @@
                 <a:ea typeface="Carlito"/>
                 <a:cs typeface="Carlito"/>
               </a:rPr>
-              <a:t>≤ 158 ns</a:t>
+              <a:t>116 ns</a:t>
             </a:r>
             <a:endParaRPr lang="en-US" sz="1400"/>
           </a:p>
@@ -9989,13 +9987,13 @@
             <a:r>
               <a:rPr lang="en-US" sz="1300" i="1">
                 <a:solidFill>
-                  <a:srgbClr val="6B7C93"/>
-                </a:solidFill>
-                <a:latin typeface="Carlito"/>
-                <a:ea typeface="Carlito"/>
-                <a:cs typeface="Carlito"/>
-              </a:rPr>
-              <a:t>limite superiore</a:t>
+                  <a:srgbClr val="2E9C6E"/>
+                </a:solidFill>
+                <a:latin typeface="Carlito"/>
+                <a:ea typeface="Carlito"/>
+                <a:cs typeface="Carlito"/>
+              </a:rPr>
+              <a:t>costo del nodo</a:t>
             </a:r>
             <a:endParaRPr lang="en-US" sz="1300"/>
           </a:p>
@@ -10087,7 +10085,7 @@
         <p:spPr bwMode="auto">
           <a:xfrm>
             <a:off x="1943100" y="3378200"/>
-            <a:ext cx="2965450" cy="279400"/>
+            <a:ext cx="1486427" cy="279400"/>
           </a:xfrm>
           <a:prstGeom prst="roundRect">
             <a:avLst>
@@ -10095,9 +10093,7 @@
             </a:avLst>
           </a:prstGeom>
           <a:solidFill>
-            <a:srgbClr val="F09A3E">
-              <a:alpha val="50000"/>
-            </a:srgbClr>
+            <a:srgbClr val="F09A3E"/>
           </a:solidFill>
           <a:ln/>
         </p:spPr>
@@ -10120,8 +10116,8 @@
         </p:nvSpPr>
         <p:spPr bwMode="auto">
           <a:xfrm>
-            <a:off x="4984750" y="3397250"/>
-            <a:ext cx="457200" cy="292100"/>
+            <a:off x="3505727" y="3397250"/>
+            <a:ext cx="640000" cy="292100"/>
           </a:xfrm>
           <a:prstGeom prst="rect">
             <a:avLst/>
@@ -10151,7 +10147,7 @@
                 <a:ea typeface="Carlito"/>
                 <a:cs typeface="Carlito"/>
               </a:rPr>
-              <a:t>6,23</a:t>
+              <a:t>6,77</a:t>
             </a:r>
             <a:endParaRPr lang="en-US" sz="1500"/>
           </a:p>
@@ -10196,7 +10192,7 @@
                 <a:ea typeface="Carlito"/>
                 <a:cs typeface="Carlito"/>
               </a:rPr>
-              <a:t>≤ 161 ns</a:t>
+              <a:t>125 ns</a:t>
             </a:r>
             <a:endParaRPr lang="en-US" sz="1400"/>
           </a:p>
@@ -10235,13 +10231,13 @@
             <a:r>
               <a:rPr lang="en-US" sz="1300" i="1">
                 <a:solidFill>
-                  <a:srgbClr val="6B7C93"/>
-                </a:solidFill>
-                <a:latin typeface="Carlito"/>
-                <a:ea typeface="Carlito"/>
-                <a:cs typeface="Carlito"/>
-              </a:rPr>
-              <a:t>limite superiore</a:t>
+                  <a:srgbClr val="2E9C6E"/>
+                </a:solidFill>
+                <a:latin typeface="Carlito"/>
+                <a:ea typeface="Carlito"/>
+                <a:cs typeface="Carlito"/>
+              </a:rPr>
+              <a:t>costo del nodo</a:t>
             </a:r>
             <a:endParaRPr lang="en-US" sz="1300"/>
           </a:p>
@@ -10333,7 +10329,7 @@
         <p:spPr bwMode="auto">
           <a:xfrm>
             <a:off x="1943100" y="3835400"/>
-            <a:ext cx="1612900" cy="279400"/>
+            <a:ext cx="658682" cy="279400"/>
           </a:xfrm>
           <a:prstGeom prst="roundRect">
             <a:avLst>
@@ -10364,8 +10360,8 @@
         </p:nvSpPr>
         <p:spPr bwMode="auto">
           <a:xfrm>
-            <a:off x="3632200" y="3854450"/>
-            <a:ext cx="457200" cy="292100"/>
+            <a:off x="2677982" y="3854450"/>
+            <a:ext cx="640000" cy="292100"/>
           </a:xfrm>
           <a:prstGeom prst="rect">
             <a:avLst/>
@@ -10395,7 +10391,7 @@
                 <a:ea typeface="Carlito"/>
                 <a:cs typeface="Carlito"/>
               </a:rPr>
-              <a:t>3,38</a:t>
+              <a:t>3,00</a:t>
             </a:r>
             <a:endParaRPr lang="en-US" sz="1500"/>
           </a:p>
@@ -10440,7 +10436,7 @@
                 <a:ea typeface="Carlito"/>
                 <a:cs typeface="Carlito"/>
               </a:rPr>
-              <a:t>296 ns</a:t>
+              <a:t>293 ns</a:t>
             </a:r>
             <a:endParaRPr lang="en-US" sz="1400"/>
           </a:p>
@@ -10577,7 +10573,7 @@
         <p:spPr bwMode="auto">
           <a:xfrm>
             <a:off x="1943100" y="4292600"/>
-            <a:ext cx="1098550" cy="279400"/>
+            <a:ext cx="432534" cy="279400"/>
           </a:xfrm>
           <a:prstGeom prst="roundRect">
             <a:avLst>
@@ -10608,8 +10604,8 @@
         </p:nvSpPr>
         <p:spPr bwMode="auto">
           <a:xfrm>
-            <a:off x="3117850" y="4311650"/>
-            <a:ext cx="457200" cy="292100"/>
+            <a:off x="2451834" y="4311650"/>
+            <a:ext cx="640000" cy="292100"/>
           </a:xfrm>
           <a:prstGeom prst="rect">
             <a:avLst/>
@@ -10639,7 +10635,7 @@
                 <a:ea typeface="Carlito"/>
                 <a:cs typeface="Carlito"/>
               </a:rPr>
-              <a:t>2,30</a:t>
+              <a:t>1,97</a:t>
             </a:r>
             <a:endParaRPr lang="en-US" sz="1500"/>
           </a:p>
@@ -10684,7 +10680,7 @@
                 <a:ea typeface="Carlito"/>
                 <a:cs typeface="Carlito"/>
               </a:rPr>
-              <a:t>434 ns</a:t>
+              <a:t>428 ns</a:t>
             </a:r>
             <a:endParaRPr lang="en-US" sz="1400"/>
           </a:p>
@@ -10732,39 +10728,6 @@
               <a:t>costo del nodo</a:t>
             </a:r>
             <a:endParaRPr lang="en-US" sz="1300"/>
-          </a:p>
-        </p:txBody>
-      </p:sp>
-      <p:sp>
-        <p:nvSpPr>
-          <p:cNvPr id="906815503" name="Shape 42"/>
-          <p:cNvSpPr/>
-          <p:nvPr/>
-        </p:nvSpPr>
-        <p:spPr bwMode="auto">
-          <a:xfrm>
-            <a:off x="5286375" y="2006600"/>
-            <a:ext cx="0" cy="2641600"/>
-          </a:xfrm>
-          <a:prstGeom prst="line">
-            <a:avLst/>
-          </a:prstGeom>
-          <a:noFill/>
-          <a:ln w="19050">
-            <a:solidFill>
-              <a:srgbClr val="C0443C"/>
-            </a:solidFill>
-            <a:prstDash val="dash"/>
-          </a:ln>
-        </p:spPr>
-        <p:txBody>
-          <a:bodyPr/>
-          <a:lstStyle/>
-          <a:p>
-            <a:pPr>
-              <a:defRPr/>
-            </a:pPr>
-            <a:endParaRPr lang="it-IT"/>
           </a:p>
         </p:txBody>
       </p:sp>
@@ -10832,7 +10795,7 @@
             </a:pathLst>
           </a:custGeom>
           <a:solidFill>
-            <a:srgbClr val="C0443C"/>
+            <a:srgbClr val="2E9C6E"/>
           </a:solidFill>
           <a:ln/>
         </p:spPr>
@@ -10880,13 +10843,13 @@
             <a:r>
               <a:rPr lang="en-US" sz="1500" b="1">
                 <a:solidFill>
-                  <a:srgbClr val="C0443C"/>
-                </a:solidFill>
-                <a:latin typeface="Carlito"/>
-                <a:ea typeface="Carlito"/>
-                <a:cs typeface="Carlito"/>
-              </a:rPr>
-              <a:t>Il tetto è del generatore</a:t>
+                  <a:srgbClr val="2E9C6E"/>
+                </a:solidFill>
+                <a:latin typeface="Carlito"/>
+                <a:ea typeface="Carlito"/>
+                <a:cs typeface="Carlito"/>
+              </a:rPr>
+              <a:t>Il tetto era la coda</a:t>
             </a:r>
             <a:endParaRPr lang="en-US" sz="1500"/>
           </a:p>
@@ -10931,7 +10894,7 @@
                 <a:ea typeface="Carlito"/>
                 <a:cs typeface="Carlito"/>
               </a:rPr>
-              <a:t>La baseline supera la sola ricezione (7,11 contro 6,89 M/s): nessuna delle due è il vero limite. Servirebbero più thread generatori.</a:t>
+              <a:t>Con tre thread nella stessa coda il nodo si fermava a ~7 M/s. Con un thread per coda la baseline elabora 12 M/s.</a:t>
             </a:r>
             <a:endParaRPr lang="en-US" sz="1300"/>
           </a:p>
@@ -11100,7 +11063,7 @@
                 <a:ea typeface="Carlito"/>
                 <a:cs typeface="Carlito"/>
               </a:rPr>
-              <a:t>Solo P2 e P3 sono </a:t>
+              <a:t>P1, P1.5, P2 e P3 sono </a:t>
             </a:r>
             <a:r>
               <a:rPr lang="en-US" sz="1500" b="1">
@@ -11122,7 +11085,7 @@
                 <a:ea typeface="Carlito"/>
                 <a:cs typeface="Carlito"/>
               </a:rPr>
-              <a:t>: 296 e 434 ns. Per baseline, P1 e P1.5 il nodo elabora quanto il generatore produce: le loro cifre sono limiti superiori.</a:t>
+              <a:t>: 116, 125, 293 e 428 ns di CPU. Baseline e rxonly, con un thread, non saturano: i loro valori sono indicativi.</a:t>
             </a:r>
             <a:endParaRPr lang="en-US" sz="1500"/>
           </a:p>
@@ -11130,80 +11093,14 @@
       </p:sp>
       <p:sp>
         <p:nvSpPr>
-          <p:cNvPr id="1406113794" name="Text 51"/>
-          <p:cNvSpPr/>
-          <p:nvPr/>
-        </p:nvSpPr>
-        <p:spPr bwMode="auto">
-          <a:xfrm>
-            <a:off x="4478801" y="1641345"/>
-            <a:ext cx="1638300" cy="391054"/>
-          </a:xfrm>
-          <a:prstGeom prst="rect">
-            <a:avLst/>
-          </a:prstGeom>
-          <a:noFill/>
-          <a:ln/>
-        </p:spPr>
-        <p:txBody>
-          <a:bodyPr wrap="square" lIns="0" tIns="0" rIns="0" bIns="0" rtlCol="0" anchor="t">
-            <a:normAutofit/>
-          </a:bodyPr>
-          <a:lstStyle/>
-          <a:p>
-            <a:pPr marL="0" indent="0" algn="ctr">
-              <a:lnSpc>
-                <a:spcPts val="1440"/>
-              </a:lnSpc>
-              <a:buNone/>
-              <a:defRPr/>
-            </a:pPr>
-            <a:r>
-              <a:rPr lang="en-US" sz="1200" b="1">
-                <a:solidFill>
-                  <a:srgbClr val="C0443C"/>
-                </a:solidFill>
-                <a:latin typeface="Carlito"/>
-                <a:ea typeface="Carlito"/>
-                <a:cs typeface="Carlito"/>
-              </a:rPr>
-              <a:t>tetto del generatore</a:t>
-            </a:r>
-            <a:endParaRPr lang="en-US" sz="1200"/>
-          </a:p>
-          <a:p>
-            <a:pPr marL="0" indent="0" algn="ctr">
-              <a:lnSpc>
-                <a:spcPts val="1440"/>
-              </a:lnSpc>
-              <a:buNone/>
-              <a:defRPr/>
-            </a:pPr>
-            <a:r>
-              <a:rPr lang="en-US" sz="1200" b="1">
-                <a:solidFill>
-                  <a:srgbClr val="C0443C"/>
-                </a:solidFill>
-                <a:latin typeface="Carlito"/>
-                <a:ea typeface="Carlito"/>
-                <a:cs typeface="Carlito"/>
-              </a:rPr>
-              <a:t>≈ 7 M/s</a:t>
-            </a:r>
-            <a:endParaRPr lang="en-US" sz="1200"/>
-          </a:p>
-        </p:txBody>
-      </p:sp>
-      <p:sp>
-        <p:nvSpPr>
           <p:cNvPr id="1242584780" name="Text 52"/>
           <p:cNvSpPr/>
           <p:nvPr/>
         </p:nvSpPr>
         <p:spPr bwMode="auto">
           <a:xfrm>
-            <a:off x="6696405" y="1793615"/>
-            <a:ext cx="1003300" cy="238720"/>
+            <a:off x="6250000" y="1793615"/>
+            <a:ext cx="1900000" cy="238720"/>
           </a:xfrm>
           <a:prstGeom prst="rect">
             <a:avLst/>
@@ -11233,7 +11130,7 @@
                 <a:ea typeface="Carlito"/>
                 <a:cs typeface="Carlito"/>
               </a:rPr>
-              <a:t>ns/pacchetto</a:t>
+              <a:t>ns di CPU/pacchetto</a:t>
             </a:r>
             <a:endParaRPr lang="en-US" sz="1200"/>
           </a:p>
@@ -11638,8 +11535,8 @@
         </p:nvSpPr>
         <p:spPr bwMode="auto">
           <a:xfrm>
-            <a:off x="836016" y="2349500"/>
-            <a:ext cx="321866" cy="238720"/>
+            <a:off x="836016" y="2317200"/>
+            <a:ext cx="420000" cy="238720"/>
           </a:xfrm>
           <a:prstGeom prst="rect">
             <a:avLst/>
@@ -11669,7 +11566,7 @@
                 <a:ea typeface="Carlito"/>
                 <a:cs typeface="Carlito"/>
               </a:rPr>
-              <a:t>7,11</a:t>
+              <a:t>13,05</a:t>
             </a:r>
             <a:endParaRPr lang="en-US" sz="1200"/>
           </a:p>
@@ -11683,8 +11580,8 @@
         </p:nvSpPr>
         <p:spPr bwMode="auto">
           <a:xfrm>
-            <a:off x="736600" y="2562820"/>
-            <a:ext cx="469900" cy="1917700"/>
+            <a:off x="736600" y="2530520"/>
+            <a:ext cx="469900" cy="1950000"/>
           </a:xfrm>
           <a:custGeom>
             <a:avLst/>
@@ -11739,8 +11636,8 @@
         </p:nvSpPr>
         <p:spPr bwMode="auto">
           <a:xfrm>
-            <a:off x="1356717" y="3086100"/>
-            <a:ext cx="321866" cy="238720"/>
+            <a:off x="1356717" y="3630648"/>
+            <a:ext cx="420000" cy="238720"/>
           </a:xfrm>
           <a:prstGeom prst="rect">
             <a:avLst/>
@@ -11770,7 +11667,7 @@
                 <a:ea typeface="Carlito"/>
                 <a:cs typeface="Carlito"/>
               </a:rPr>
-              <a:t>4,38</a:t>
+              <a:t>4,26</a:t>
             </a:r>
             <a:endParaRPr lang="en-US" sz="1200"/>
           </a:p>
@@ -11784,8 +11681,8 @@
         </p:nvSpPr>
         <p:spPr bwMode="auto">
           <a:xfrm>
-            <a:off x="1257300" y="3299420"/>
-            <a:ext cx="469900" cy="1181099"/>
+            <a:off x="1257300" y="3843968"/>
+            <a:ext cx="469900" cy="636551"/>
           </a:xfrm>
           <a:custGeom>
             <a:avLst/>
@@ -11840,8 +11737,8 @@
         </p:nvSpPr>
         <p:spPr bwMode="auto">
           <a:xfrm>
-            <a:off x="2112367" y="2559050"/>
-            <a:ext cx="321866" cy="238720"/>
+            <a:off x="2112367" y="2717659"/>
+            <a:ext cx="420000" cy="238720"/>
           </a:xfrm>
           <a:prstGeom prst="rect">
             <a:avLst/>
@@ -11871,7 +11768,7 @@
                 <a:ea typeface="Carlito"/>
                 <a:cs typeface="Carlito"/>
               </a:rPr>
-              <a:t>6,34</a:t>
+              <a:t>10,37</a:t>
             </a:r>
             <a:endParaRPr lang="en-US" sz="1200"/>
           </a:p>
@@ -11885,8 +11782,8 @@
         </p:nvSpPr>
         <p:spPr bwMode="auto">
           <a:xfrm>
-            <a:off x="2012949" y="2772370"/>
-            <a:ext cx="469900" cy="1708150"/>
+            <a:off x="2012949" y="2930979"/>
+            <a:ext cx="469900" cy="1549540"/>
           </a:xfrm>
           <a:custGeom>
             <a:avLst/>
@@ -11941,8 +11838,8 @@
         </p:nvSpPr>
         <p:spPr bwMode="auto">
           <a:xfrm>
-            <a:off x="2633067" y="2978150"/>
-            <a:ext cx="321866" cy="238720"/>
+            <a:off x="2633067" y="3693406"/>
+            <a:ext cx="420000" cy="238720"/>
           </a:xfrm>
           <a:prstGeom prst="rect">
             <a:avLst/>
@@ -11972,7 +11869,7 @@
                 <a:ea typeface="Carlito"/>
                 <a:cs typeface="Carlito"/>
               </a:rPr>
-              <a:t>4,78</a:t>
+              <a:t>3,84</a:t>
             </a:r>
             <a:endParaRPr lang="en-US" sz="1200"/>
           </a:p>
@@ -11986,8 +11883,8 @@
         </p:nvSpPr>
         <p:spPr bwMode="auto">
           <a:xfrm>
-            <a:off x="2533650" y="3191470"/>
-            <a:ext cx="469900" cy="1289050"/>
+            <a:off x="2533650" y="3906726"/>
+            <a:ext cx="469900" cy="573793"/>
           </a:xfrm>
           <a:custGeom>
             <a:avLst/>
@@ -12042,8 +11939,8 @@
         </p:nvSpPr>
         <p:spPr bwMode="auto">
           <a:xfrm>
-            <a:off x="3388717" y="2584450"/>
-            <a:ext cx="321866" cy="238720"/>
+            <a:off x="3388717" y="2749039"/>
+            <a:ext cx="420000" cy="238720"/>
           </a:xfrm>
           <a:prstGeom prst="rect">
             <a:avLst/>
@@ -12073,7 +11970,7 @@
                 <a:ea typeface="Carlito"/>
                 <a:cs typeface="Carlito"/>
               </a:rPr>
-              <a:t>6,23</a:t>
+              <a:t>10,16</a:t>
             </a:r>
             <a:endParaRPr lang="en-US" sz="1200"/>
           </a:p>
@@ -12087,8 +11984,8 @@
         </p:nvSpPr>
         <p:spPr bwMode="auto">
           <a:xfrm>
-            <a:off x="3289300" y="2797770"/>
-            <a:ext cx="469900" cy="1682750"/>
+            <a:off x="3289300" y="2962359"/>
+            <a:ext cx="469900" cy="1518160"/>
           </a:xfrm>
           <a:custGeom>
             <a:avLst/>
@@ -12143,8 +12040,8 @@
         </p:nvSpPr>
         <p:spPr bwMode="auto">
           <a:xfrm>
-            <a:off x="3909417" y="2952750"/>
-            <a:ext cx="321866" cy="238720"/>
+            <a:off x="3909417" y="3681452"/>
+            <a:ext cx="420000" cy="238720"/>
           </a:xfrm>
           <a:prstGeom prst="rect">
             <a:avLst/>
@@ -12174,7 +12071,7 @@
                 <a:ea typeface="Carlito"/>
                 <a:cs typeface="Carlito"/>
               </a:rPr>
-              <a:t>4,87</a:t>
+              <a:t>3,92</a:t>
             </a:r>
             <a:endParaRPr lang="en-US" sz="1200"/>
           </a:p>
@@ -12188,8 +12085,8 @@
         </p:nvSpPr>
         <p:spPr bwMode="auto">
           <a:xfrm>
-            <a:off x="3810000" y="3166070"/>
-            <a:ext cx="469900" cy="1314450"/>
+            <a:off x="3810000" y="3894772"/>
+            <a:ext cx="469900" cy="585747"/>
           </a:xfrm>
           <a:custGeom>
             <a:avLst/>
@@ -12244,8 +12141,8 @@
         </p:nvSpPr>
         <p:spPr bwMode="auto">
           <a:xfrm>
-            <a:off x="4665067" y="3352800"/>
-            <a:ext cx="321866" cy="238720"/>
+            <a:off x="4665067" y="3289958"/>
+            <a:ext cx="420000" cy="238720"/>
           </a:xfrm>
           <a:prstGeom prst="rect">
             <a:avLst/>
@@ -12275,7 +12172,7 @@
                 <a:ea typeface="Carlito"/>
                 <a:cs typeface="Carlito"/>
               </a:rPr>
-              <a:t>3,38</a:t>
+              <a:t>6,54</a:t>
             </a:r>
             <a:endParaRPr lang="en-US" sz="1200"/>
           </a:p>
@@ -12289,8 +12186,8 @@
         </p:nvSpPr>
         <p:spPr bwMode="auto">
           <a:xfrm>
-            <a:off x="4565650" y="3566120"/>
-            <a:ext cx="469900" cy="914400"/>
+            <a:off x="4565650" y="3503278"/>
+            <a:ext cx="469900" cy="977241"/>
           </a:xfrm>
           <a:custGeom>
             <a:avLst/>
@@ -12345,8 +12242,8 @@
         </p:nvSpPr>
         <p:spPr bwMode="auto">
           <a:xfrm>
-            <a:off x="5185767" y="3352800"/>
-            <a:ext cx="321866" cy="238720"/>
+            <a:off x="5185767" y="3373636"/>
+            <a:ext cx="420000" cy="238720"/>
           </a:xfrm>
           <a:prstGeom prst="rect">
             <a:avLst/>
@@ -12376,7 +12273,7 @@
                 <a:ea typeface="Carlito"/>
                 <a:cs typeface="Carlito"/>
               </a:rPr>
-              <a:t>3,38</a:t>
+              <a:t>5,98</a:t>
             </a:r>
             <a:endParaRPr lang="en-US" sz="1200"/>
           </a:p>
@@ -12390,8 +12287,8 @@
         </p:nvSpPr>
         <p:spPr bwMode="auto">
           <a:xfrm>
-            <a:off x="5086350" y="3566120"/>
-            <a:ext cx="469900" cy="914400"/>
+            <a:off x="5086350" y="3586956"/>
+            <a:ext cx="469900" cy="893563"/>
           </a:xfrm>
           <a:custGeom>
             <a:avLst/>
@@ -12446,8 +12343,8 @@
         </p:nvSpPr>
         <p:spPr bwMode="auto">
           <a:xfrm>
-            <a:off x="5941417" y="3644900"/>
-            <a:ext cx="321866" cy="238720"/>
+            <a:off x="5941417" y="3569383"/>
+            <a:ext cx="420000" cy="238720"/>
           </a:xfrm>
           <a:prstGeom prst="rect">
             <a:avLst/>
@@ -12477,7 +12374,7 @@
                 <a:ea typeface="Carlito"/>
                 <a:cs typeface="Carlito"/>
               </a:rPr>
-              <a:t>2,30</a:t>
+              <a:t>4,67</a:t>
             </a:r>
             <a:endParaRPr lang="en-US" sz="1200"/>
           </a:p>
@@ -12491,8 +12388,8 @@
         </p:nvSpPr>
         <p:spPr bwMode="auto">
           <a:xfrm>
-            <a:off x="5842000" y="3858220"/>
-            <a:ext cx="469900" cy="622300"/>
+            <a:off x="5842000" y="3782703"/>
+            <a:ext cx="469900" cy="697816"/>
           </a:xfrm>
           <a:custGeom>
             <a:avLst/>
@@ -12547,8 +12444,8 @@
         </p:nvSpPr>
         <p:spPr bwMode="auto">
           <a:xfrm>
-            <a:off x="6462117" y="3644900"/>
-            <a:ext cx="321866" cy="238720"/>
+            <a:off x="6462117" y="3569383"/>
+            <a:ext cx="420000" cy="238720"/>
           </a:xfrm>
           <a:prstGeom prst="rect">
             <a:avLst/>
@@ -12578,7 +12475,7 @@
                 <a:ea typeface="Carlito"/>
                 <a:cs typeface="Carlito"/>
               </a:rPr>
-              <a:t>2,30</a:t>
+              <a:t>4,67</a:t>
             </a:r>
             <a:endParaRPr lang="en-US" sz="1200"/>
           </a:p>
@@ -12592,8 +12489,8 @@
         </p:nvSpPr>
         <p:spPr bwMode="auto">
           <a:xfrm>
-            <a:off x="6362700" y="3858220"/>
-            <a:ext cx="469900" cy="622300"/>
+            <a:off x="6362700" y="3782703"/>
+            <a:ext cx="469900" cy="697816"/>
           </a:xfrm>
           <a:custGeom>
             <a:avLst/>
@@ -12867,104 +12764,6 @@
       </p:sp>
       <p:sp>
         <p:nvSpPr>
-          <p:cNvPr id="1005993764" name="Shape 34"/>
-          <p:cNvSpPr/>
-          <p:nvPr/>
-        </p:nvSpPr>
-        <p:spPr bwMode="auto">
-          <a:xfrm>
-            <a:off x="736600" y="3159720"/>
-            <a:ext cx="6096000" cy="133350"/>
-          </a:xfrm>
-          <a:prstGeom prst="rect">
-            <a:avLst/>
-          </a:prstGeom>
-          <a:solidFill>
-            <a:srgbClr val="C0443C">
-              <a:alpha val="20000"/>
-            </a:srgbClr>
-          </a:solidFill>
-          <a:ln/>
-        </p:spPr>
-        <p:txBody>
-          <a:bodyPr/>
-          <a:lstStyle/>
-          <a:p>
-            <a:pPr>
-              <a:defRPr/>
-            </a:pPr>
-            <a:endParaRPr lang="it-IT"/>
-          </a:p>
-        </p:txBody>
-      </p:sp>
-      <p:sp>
-        <p:nvSpPr>
-          <p:cNvPr id="196406336" name="Text 35"/>
-          <p:cNvSpPr/>
-          <p:nvPr/>
-        </p:nvSpPr>
-        <p:spPr bwMode="auto">
-          <a:xfrm>
-            <a:off x="4610100" y="2715220"/>
-            <a:ext cx="2289175" cy="391054"/>
-          </a:xfrm>
-          <a:prstGeom prst="rect">
-            <a:avLst/>
-          </a:prstGeom>
-          <a:noFill/>
-          <a:ln/>
-        </p:spPr>
-        <p:txBody>
-          <a:bodyPr wrap="square" lIns="0" tIns="0" rIns="0" bIns="0" rtlCol="0" anchor="t">
-            <a:normAutofit/>
-          </a:bodyPr>
-          <a:lstStyle/>
-          <a:p>
-            <a:pPr marL="0" indent="0" algn="l">
-              <a:lnSpc>
-                <a:spcPts val="1440"/>
-              </a:lnSpc>
-              <a:buNone/>
-              <a:defRPr/>
-            </a:pPr>
-            <a:r>
-              <a:rPr lang="en-US" sz="1200" b="1">
-                <a:solidFill>
-                  <a:srgbClr val="C0443C"/>
-                </a:solidFill>
-                <a:latin typeface="Carlito"/>
-                <a:ea typeface="Carlito"/>
-                <a:cs typeface="Carlito"/>
-              </a:rPr>
-              <a:t>tetto del contatore d'uscita:</a:t>
-            </a:r>
-            <a:endParaRPr lang="en-US" sz="1200"/>
-          </a:p>
-          <a:p>
-            <a:pPr marL="0" indent="0" algn="l">
-              <a:lnSpc>
-                <a:spcPts val="1440"/>
-              </a:lnSpc>
-              <a:buNone/>
-              <a:defRPr/>
-            </a:pPr>
-            <a:r>
-              <a:rPr lang="en-US" sz="1200" b="1">
-                <a:solidFill>
-                  <a:srgbClr val="C0443C"/>
-                </a:solidFill>
-                <a:latin typeface="Carlito"/>
-                <a:ea typeface="Carlito"/>
-                <a:cs typeface="Carlito"/>
-              </a:rPr>
-              <a:t>4,4–4,9 M/s</a:t>
-            </a:r>
-            <a:endParaRPr lang="en-US" sz="1200"/>
-          </a:p>
-        </p:txBody>
-      </p:sp>
-      <p:sp>
-        <p:nvSpPr>
           <p:cNvPr id="1936906822" name="Shape 36"/>
           <p:cNvSpPr/>
           <p:nvPr/>
@@ -13081,7 +12880,7 @@
                 <a:ea typeface="Carlito"/>
                 <a:cs typeface="Carlito"/>
               </a:rPr>
-              <a:t>Il nodo successivo ha un tetto</a:t>
+              <a:t>Due core, le stesse code d'uscita</a:t>
             </a:r>
             <a:endParaRPr lang="en-US" sz="1500"/>
           </a:p>
@@ -13126,7 +12925,7 @@
                 <a:ea typeface="Carlito"/>
                 <a:cs typeface="Carlito"/>
               </a:rPr>
-              <a:t>Conta gli arrivi con un solo core: ne riceve al massimo 4,4–4,9 milioni al secondo. Sopra, i pacchetti si perdono dopo il nodo. Con pktgen non succede: nessuna pipeline supera 3,4 M/s.</a:t>
+              <a:t>Con due core sul nodo, tutti e due inoltrano nelle stesse code verso il nodo successivo: due scrittori per coda. Le code si intasano e metà dei pacchetti della baseline si perde dopo il nodo, con il core d'uscita occupato solo al 77%.</a:t>
             </a:r>
             <a:endParaRPr lang="en-US" sz="1300"/>
           </a:p>
@@ -13250,7 +13049,7 @@
                 <a:ea typeface="Carlito"/>
                 <a:cs typeface="Carlito"/>
               </a:rPr>
-              <a:t>Un esempio: baseline e P1</a:t>
+              <a:t>Un esempio: baseline e P2</a:t>
             </a:r>
             <a:endParaRPr lang="en-US" sz="1500"/>
           </a:p>
@@ -13295,7 +13094,7 @@
                 <a:ea typeface="Carlito"/>
                 <a:cs typeface="Carlito"/>
               </a:rPr>
-              <a:t>La baseline elabora 7,1 M/s ma ne arrivano 4,4; P1 ne elabora 6,3 e ne arrivano 4,8. Contando gli arrivi la baseline sembrerebbe più lenta di P1, ma fa meno lavoro.</a:t>
+              <a:t>La baseline elabora 13,1 M/s ma ne arrivano 4,3; P2 ne elabora 6,5 e ne arrivano 6,0. Contando gli arrivi la baseline sembrerebbe più lenta di P2, che fa molto più lavoro.</a:t>
             </a:r>
             <a:endParaRPr lang="en-US" sz="1300"/>
           </a:p>
@@ -13531,7 +13330,7 @@
                 <a:ea typeface="Carlito"/>
                 <a:cs typeface="Carlito"/>
               </a:rPr>
-              <a:t>xdp_gen, 5 giri, 64 byte · elaborati = decisioni della pipeline · arrivati = contatore del nodo successivo</a:t>
+              <a:t>xdp_gen, 2 core sul nodo, un thread per coda, uscita separata · 64 byte, 30 settembre · arrivati = nodo successivo</a:t>
             </a:r>
             <a:endParaRPr lang="en-US" sz="1200"/>
           </a:p>
@@ -14104,7 +13903,7 @@
         <p:spPr bwMode="auto">
           <a:xfrm>
             <a:off x="1689100" y="2600920"/>
-            <a:ext cx="819150" cy="203200"/>
+            <a:ext cx="388821" cy="203200"/>
           </a:xfrm>
           <a:prstGeom prst="roundRect">
             <a:avLst>
@@ -14137,7 +13936,7 @@
         </p:nvSpPr>
         <p:spPr bwMode="auto">
           <a:xfrm>
-            <a:off x="2584450" y="2607270"/>
+            <a:off x="2154121" y="2607270"/>
             <a:ext cx="1066800" cy="256514"/>
           </a:xfrm>
           <a:prstGeom prst="rect">
@@ -14168,7 +13967,7 @@
                 <a:ea typeface="Carlito"/>
                 <a:cs typeface="Carlito"/>
               </a:rPr>
-              <a:t>≤ 141 ns</a:t>
+              <a:t>≈ 67 ns</a:t>
             </a:r>
             <a:endParaRPr lang="en-US" sz="1300"/>
           </a:p>
@@ -14305,7 +14104,7 @@
         <p:spPr bwMode="auto">
           <a:xfrm>
             <a:off x="1689100" y="3121620"/>
-            <a:ext cx="914400" cy="203200"/>
+            <a:ext cx="673183" cy="203200"/>
           </a:xfrm>
           <a:prstGeom prst="roundRect">
             <a:avLst>
@@ -14313,9 +14112,7 @@
             </a:avLst>
           </a:prstGeom>
           <a:solidFill>
-            <a:srgbClr val="2E9C6E">
-              <a:alpha val="50000"/>
-            </a:srgbClr>
+            <a:srgbClr val="2E9C6E"/>
           </a:solidFill>
           <a:ln/>
         </p:spPr>
@@ -14338,8 +14135,8 @@
         </p:nvSpPr>
         <p:spPr bwMode="auto">
           <a:xfrm>
-            <a:off x="2679700" y="3127970"/>
-            <a:ext cx="1066800" cy="256514"/>
+            <a:off x="2438483" y="3127970"/>
+            <a:ext cx="1700000" cy="256514"/>
           </a:xfrm>
           <a:prstGeom prst="rect">
             <a:avLst/>
@@ -14369,7 +14166,7 @@
                 <a:ea typeface="Carlito"/>
                 <a:cs typeface="Carlito"/>
               </a:rPr>
-              <a:t>≤ 158 ns</a:t>
+              <a:t>116 ns   −224 ns</a:t>
             </a:r>
             <a:endParaRPr lang="en-US" sz="1300"/>
           </a:p>
@@ -14506,7 +14303,7 @@
         <p:spPr bwMode="auto">
           <a:xfrm>
             <a:off x="1689100" y="3642320"/>
-            <a:ext cx="933450" cy="203200"/>
+            <a:ext cx="725413" cy="203200"/>
           </a:xfrm>
           <a:prstGeom prst="roundRect">
             <a:avLst>
@@ -14514,9 +14311,7 @@
             </a:avLst>
           </a:prstGeom>
           <a:solidFill>
-            <a:srgbClr val="2E9C6E">
-              <a:alpha val="50000"/>
-            </a:srgbClr>
+            <a:srgbClr val="2E9C6E"/>
           </a:solidFill>
           <a:ln/>
         </p:spPr>
@@ -14539,8 +14334,8 @@
         </p:nvSpPr>
         <p:spPr bwMode="auto">
           <a:xfrm>
-            <a:off x="2698750" y="3648670"/>
-            <a:ext cx="1066800" cy="256514"/>
+            <a:off x="2490713" y="3648670"/>
+            <a:ext cx="1700000" cy="256514"/>
           </a:xfrm>
           <a:prstGeom prst="rect">
             <a:avLst/>
@@ -14570,7 +14365,7 @@
                 <a:ea typeface="Carlito"/>
                 <a:cs typeface="Carlito"/>
               </a:rPr>
-              <a:t>≤ 161 ns</a:t>
+              <a:t>125 ns   −231 ns</a:t>
             </a:r>
             <a:endParaRPr lang="en-US" sz="1300"/>
           </a:p>
@@ -14707,7 +14502,7 @@
         <p:spPr bwMode="auto">
           <a:xfrm>
             <a:off x="1689100" y="4163020"/>
-            <a:ext cx="1720850" cy="203200"/>
+            <a:ext cx="1700369" cy="203200"/>
           </a:xfrm>
           <a:prstGeom prst="roundRect">
             <a:avLst>
@@ -14738,7 +14533,7 @@
         </p:nvSpPr>
         <p:spPr bwMode="auto">
           <a:xfrm>
-            <a:off x="3486150" y="4169370"/>
+            <a:off x="3465669" y="4169370"/>
             <a:ext cx="685800" cy="256514"/>
           </a:xfrm>
           <a:prstGeom prst="rect">
@@ -14769,7 +14564,7 @@
                 <a:ea typeface="Carlito"/>
                 <a:cs typeface="Carlito"/>
               </a:rPr>
-              <a:t>296 ns</a:t>
+              <a:t>293 ns</a:t>
             </a:r>
             <a:endParaRPr lang="en-US" sz="1300"/>
           </a:p>
@@ -14783,7 +14578,7 @@
         </p:nvSpPr>
         <p:spPr bwMode="auto">
           <a:xfrm>
-            <a:off x="4229100" y="4169370"/>
+            <a:off x="4208619" y="4169370"/>
             <a:ext cx="1193800" cy="256514"/>
           </a:xfrm>
           <a:prstGeom prst="rect">
@@ -14814,7 +14609,7 @@
                 <a:ea typeface="Carlito"/>
                 <a:cs typeface="Carlito"/>
               </a:rPr>
-              <a:t>−233 ns</a:t>
+              <a:t>−236 ns</a:t>
             </a:r>
             <a:endParaRPr lang="en-US" sz="1300"/>
           </a:p>
@@ -14951,7 +14746,7 @@
         <p:spPr bwMode="auto">
           <a:xfrm>
             <a:off x="1689100" y="4683720"/>
-            <a:ext cx="2520950" cy="203200"/>
+            <a:ext cx="2483815" cy="203200"/>
           </a:xfrm>
           <a:prstGeom prst="roundRect">
             <a:avLst>
@@ -14982,7 +14777,7 @@
         </p:nvSpPr>
         <p:spPr bwMode="auto">
           <a:xfrm>
-            <a:off x="4286250" y="4690070"/>
+            <a:off x="4249115" y="4690070"/>
             <a:ext cx="685800" cy="256514"/>
           </a:xfrm>
           <a:prstGeom prst="rect">
@@ -15013,7 +14808,7 @@
                 <a:ea typeface="Carlito"/>
                 <a:cs typeface="Carlito"/>
               </a:rPr>
-              <a:t>434 ns</a:t>
+              <a:t>428 ns</a:t>
             </a:r>
             <a:endParaRPr lang="en-US" sz="1300"/>
           </a:p>
@@ -15027,7 +14822,7 @@
         </p:nvSpPr>
         <p:spPr bwMode="auto">
           <a:xfrm>
-            <a:off x="5029200" y="4690070"/>
+            <a:off x="4992065" y="4690070"/>
             <a:ext cx="1193800" cy="256514"/>
           </a:xfrm>
           <a:prstGeom prst="rect">
@@ -15058,7 +14853,7 @@
                 <a:ea typeface="Carlito"/>
                 <a:cs typeface="Carlito"/>
               </a:rPr>
-              <a:t>−232 ns</a:t>
+              <a:t>−238 ns</a:t>
             </a:r>
             <a:endParaRPr lang="en-US" sz="1300"/>
           </a:p>
@@ -15351,7 +15146,7 @@
                 <a:ea typeface="Carlito"/>
                 <a:cs typeface="Carlito"/>
               </a:rPr>
-              <a:t>Con xdp_gen si citano P2 e P3</a:t>
+              <a:t>Con xdp_gen si citano P1, P1.5, P2 e P3</a:t>
             </a:r>
             <a:endParaRPr lang="en-US" sz="1400"/>
           </a:p>
@@ -15396,7 +15191,7 @@
                 <a:ea typeface="Carlito"/>
                 <a:cs typeface="Carlito"/>
               </a:rPr>
-              <a:t>296 e 434 ns. Per baseline, P1 e P1.5 il valore è un limite superiore (≤).</a:t>
+              <a:t>116, 125, 293 e 428 ns di CPU, un thread per coda. Baseline ≈ 67 ns: indicativa.</a:t>
             </a:r>
             <a:endParaRPr lang="en-US" sz="1300"/>
           </a:p>
@@ -15801,7 +15596,7 @@
                 <a:ea typeface="Carlito"/>
                 <a:cs typeface="Carlito"/>
               </a:rPr>
-              <a:t>P2: 529 − 296 = 233 ns · P3: 666 − 434 = 232 ns · per baseline, P1 e P1.5 la differenza vera è almeno quella</a:t>
+              <a:t>pktgen del 28 settembre, xdp_gen del 30 (tempo di CPU) · P1: 340 − 116 = 224 · P1.5: 356 − 125 = 231 · P2: 529 − 293 = 236 · P3: 666 − 428 = 238 ns</a:t>
             </a:r>
             <a:endParaRPr lang="en-US" sz="1200"/>
           </a:p>
@@ -35732,7 +35527,7 @@
                 <a:ea typeface="Carlito"/>
                 <a:cs typeface="Carlito"/>
               </a:rPr>
-              <a:t>A 7,5 milioni al secondo il generatore è vicino al suo limite: la sola ricezione non raddoppia.</a:t>
+              <a:t>Tre thread su due code: due scrivono nella stessa coda e si intralciano (slide 13).</a:t>
             </a:r>
             <a:endParaRPr lang="en-US" sz="1300"/>
           </a:p>
@@ -36740,7 +36535,7 @@
                 <a:ea typeface="Carlito"/>
                 <a:cs typeface="Carlito"/>
               </a:rPr>
-              <a:t>pktgen confronta tutte le pipeline, da 3,31 a 1,50 M/s. xdp_gen misura P2 e P3 senza la copia: 296 e 434 ns. Le altre tre toccano il tetto del generatore.</a:t>
+              <a:t>pktgen confronta tutte le pipeline, da 3,31 a 1,50 M/s. xdp_gen, un thread per coda, misura P1–P3 senza la copia: 116–428 ns.</a:t>
             </a:r>
             <a:endParaRPr lang="en-US" sz="1450"/>
           </a:p>

--- a/docs/Test reale su dual boot.pptx
+++ b/docs/Test reale su dual boot.pptx
@@ -11290,7 +11290,7 @@
                 <a:ea typeface="Carlito"/>
                 <a:cs typeface="Carlito"/>
               </a:rPr>
-              <a:t>Con xdp_gen si contano i pacchetti elaborati</a:t>
+              <a:t>Con xdp_gen due core reggono il doppio</a:t>
             </a:r>
             <a:endParaRPr lang="en-US" sz="3000"/>
           </a:p>
@@ -11367,7 +11367,7 @@
                 <a:ea typeface="Carlito"/>
                 <a:cs typeface="Carlito"/>
               </a:rPr>
-              <a:t>Milioni di pacchetti al secondo, con xdp_gen</a:t>
+              <a:t>Milioni di pacchetti al secondo elaborati, con xdp_gen</a:t>
             </a:r>
             <a:endParaRPr lang="en-US" sz="1500"/>
           </a:p>
@@ -11444,7 +11444,7 @@
                 <a:ea typeface="Carlito"/>
                 <a:cs typeface="Carlito"/>
               </a:rPr>
-              <a:t>elaborati dal nodo</a:t>
+              <a:t>2 core, misurati</a:t>
             </a:r>
             <a:endParaRPr lang="en-US" sz="1200"/>
           </a:p>
@@ -11521,7 +11521,7 @@
                 <a:ea typeface="Carlito"/>
                 <a:cs typeface="Carlito"/>
               </a:rPr>
-              <a:t>arrivati all'uscita</a:t>
+              <a:t>2 × un core</a:t>
             </a:r>
             <a:endParaRPr lang="en-US" sz="1200"/>
           </a:p>
@@ -11535,7 +11535,7 @@
         </p:nvSpPr>
         <p:spPr bwMode="auto">
           <a:xfrm>
-            <a:off x="836016" y="2317200"/>
+            <a:off x="836016" y="2443218"/>
             <a:ext cx="420000" cy="238720"/>
           </a:xfrm>
           <a:prstGeom prst="rect">
@@ -11566,7 +11566,7 @@
                 <a:ea typeface="Carlito"/>
                 <a:cs typeface="Carlito"/>
               </a:rPr>
-              <a:t>13,05</a:t>
+              <a:t>28,33</a:t>
             </a:r>
             <a:endParaRPr lang="en-US" sz="1200"/>
           </a:p>
@@ -11580,8 +11580,8 @@
         </p:nvSpPr>
         <p:spPr bwMode="auto">
           <a:xfrm>
-            <a:off x="736600" y="2530520"/>
-            <a:ext cx="469900" cy="1950000"/>
+            <a:off x="736600" y="2658102"/>
+            <a:ext cx="469900" cy="1822458"/>
           </a:xfrm>
           <a:custGeom>
             <a:avLst/>
@@ -11636,7 +11636,7 @@
         </p:nvSpPr>
         <p:spPr bwMode="auto">
           <a:xfrm>
-            <a:off x="1356717" y="3630648"/>
+            <a:off x="1356717" y="2345388"/>
             <a:ext cx="420000" cy="238720"/>
           </a:xfrm>
           <a:prstGeom prst="rect">
@@ -11667,7 +11667,7 @@
                 <a:ea typeface="Carlito"/>
                 <a:cs typeface="Carlito"/>
               </a:rPr>
-              <a:t>4,26</a:t>
+              <a:t>29,85</a:t>
             </a:r>
             <a:endParaRPr lang="en-US" sz="1200"/>
           </a:p>
@@ -11681,8 +11681,8 @@
         </p:nvSpPr>
         <p:spPr bwMode="auto">
           <a:xfrm>
-            <a:off x="1257300" y="3843968"/>
-            <a:ext cx="469900" cy="636551"/>
+            <a:off x="1257300" y="2560272"/>
+            <a:ext cx="469900" cy="1920288"/>
           </a:xfrm>
           <a:custGeom>
             <a:avLst/>
@@ -11737,7 +11737,7 @@
         </p:nvSpPr>
         <p:spPr bwMode="auto">
           <a:xfrm>
-            <a:off x="2112367" y="2717659"/>
+            <a:off x="2112367" y="3168856"/>
             <a:ext cx="420000" cy="238720"/>
           </a:xfrm>
           <a:prstGeom prst="rect">
@@ -11768,7 +11768,7 @@
                 <a:ea typeface="Carlito"/>
                 <a:cs typeface="Carlito"/>
               </a:rPr>
-              <a:t>10,37</a:t>
+              <a:t>17,05</a:t>
             </a:r>
             <a:endParaRPr lang="en-US" sz="1200"/>
           </a:p>
@@ -11782,8 +11782,8 @@
         </p:nvSpPr>
         <p:spPr bwMode="auto">
           <a:xfrm>
-            <a:off x="2012949" y="2930979"/>
-            <a:ext cx="469900" cy="1549540"/>
+            <a:off x="2012949" y="3383740"/>
+            <a:ext cx="469900" cy="1096820"/>
           </a:xfrm>
           <a:custGeom>
             <a:avLst/>
@@ -11838,7 +11838,7 @@
         </p:nvSpPr>
         <p:spPr bwMode="auto">
           <a:xfrm>
-            <a:off x="2633067" y="3693406"/>
+            <a:off x="2633067" y="3156545"/>
             <a:ext cx="420000" cy="238720"/>
           </a:xfrm>
           <a:prstGeom prst="rect">
@@ -11869,7 +11869,7 @@
                 <a:ea typeface="Carlito"/>
                 <a:cs typeface="Carlito"/>
               </a:rPr>
-              <a:t>3,84</a:t>
+              <a:t>17,24</a:t>
             </a:r>
             <a:endParaRPr lang="en-US" sz="1200"/>
           </a:p>
@@ -11883,8 +11883,8 @@
         </p:nvSpPr>
         <p:spPr bwMode="auto">
           <a:xfrm>
-            <a:off x="2533650" y="3906726"/>
-            <a:ext cx="469900" cy="573793"/>
+            <a:off x="2533650" y="3371429"/>
+            <a:ext cx="469900" cy="1109131"/>
           </a:xfrm>
           <a:custGeom>
             <a:avLst/>
@@ -11939,7 +11939,7 @@
         </p:nvSpPr>
         <p:spPr bwMode="auto">
           <a:xfrm>
-            <a:off x="3388717" y="2749039"/>
+            <a:off x="3388717" y="3248625"/>
             <a:ext cx="420000" cy="238720"/>
           </a:xfrm>
           <a:prstGeom prst="rect">
@@ -11970,7 +11970,7 @@
                 <a:ea typeface="Carlito"/>
                 <a:cs typeface="Carlito"/>
               </a:rPr>
-              <a:t>10,16</a:t>
+              <a:t>15,81</a:t>
             </a:r>
             <a:endParaRPr lang="en-US" sz="1200"/>
           </a:p>
@@ -11984,8 +11984,8 @@
         </p:nvSpPr>
         <p:spPr bwMode="auto">
           <a:xfrm>
-            <a:off x="3289300" y="2962359"/>
-            <a:ext cx="469900" cy="1518160"/>
+            <a:off x="3289300" y="3463509"/>
+            <a:ext cx="469900" cy="1017051"/>
           </a:xfrm>
           <a:custGeom>
             <a:avLst/>
@@ -12040,7 +12040,7 @@
         </p:nvSpPr>
         <p:spPr bwMode="auto">
           <a:xfrm>
-            <a:off x="3909417" y="3681452"/>
+            <a:off x="3909417" y="3236402"/>
             <a:ext cx="420000" cy="238720"/>
           </a:xfrm>
           <a:prstGeom prst="rect">
@@ -12071,7 +12071,7 @@
                 <a:ea typeface="Carlito"/>
                 <a:cs typeface="Carlito"/>
               </a:rPr>
-              <a:t>3,92</a:t>
+              <a:t>16,00</a:t>
             </a:r>
             <a:endParaRPr lang="en-US" sz="1200"/>
           </a:p>
@@ -12085,8 +12085,8 @@
         </p:nvSpPr>
         <p:spPr bwMode="auto">
           <a:xfrm>
-            <a:off x="3810000" y="3894772"/>
-            <a:ext cx="469900" cy="585747"/>
+            <a:off x="3810000" y="3451286"/>
+            <a:ext cx="469900" cy="1029274"/>
           </a:xfrm>
           <a:custGeom>
             <a:avLst/>
@@ -12141,7 +12141,7 @@
         </p:nvSpPr>
         <p:spPr bwMode="auto">
           <a:xfrm>
-            <a:off x="4665067" y="3289958"/>
+            <a:off x="4665067" y="3835954"/>
             <a:ext cx="420000" cy="238720"/>
           </a:xfrm>
           <a:prstGeom prst="rect">
@@ -12172,7 +12172,7 @@
                 <a:ea typeface="Carlito"/>
                 <a:cs typeface="Carlito"/>
               </a:rPr>
-              <a:t>6,54</a:t>
+              <a:t>6,68</a:t>
             </a:r>
             <a:endParaRPr lang="en-US" sz="1200"/>
           </a:p>
@@ -12186,8 +12186,8 @@
         </p:nvSpPr>
         <p:spPr bwMode="auto">
           <a:xfrm>
-            <a:off x="4565650" y="3503278"/>
-            <a:ext cx="469900" cy="977241"/>
+            <a:off x="4565650" y="4050838"/>
+            <a:ext cx="469900" cy="429722"/>
           </a:xfrm>
           <a:custGeom>
             <a:avLst/>
@@ -12242,7 +12242,7 @@
         </p:nvSpPr>
         <p:spPr bwMode="auto">
           <a:xfrm>
-            <a:off x="5185767" y="3373636"/>
+            <a:off x="5185767" y="3826566"/>
             <a:ext cx="420000" cy="238720"/>
           </a:xfrm>
           <a:prstGeom prst="rect">
@@ -12273,7 +12273,7 @@
                 <a:ea typeface="Carlito"/>
                 <a:cs typeface="Carlito"/>
               </a:rPr>
-              <a:t>5,98</a:t>
+              <a:t>6,83</a:t>
             </a:r>
             <a:endParaRPr lang="en-US" sz="1200"/>
           </a:p>
@@ -12287,8 +12287,8 @@
         </p:nvSpPr>
         <p:spPr bwMode="auto">
           <a:xfrm>
-            <a:off x="5086350" y="3586956"/>
-            <a:ext cx="469900" cy="893563"/>
+            <a:off x="5086350" y="4041450"/>
+            <a:ext cx="469900" cy="439110"/>
           </a:xfrm>
           <a:custGeom>
             <a:avLst/>
@@ -12343,7 +12343,7 @@
         </p:nvSpPr>
         <p:spPr bwMode="auto">
           <a:xfrm>
-            <a:off x="5941417" y="3569383"/>
+            <a:off x="5941417" y="3969117"/>
             <a:ext cx="420000" cy="238720"/>
           </a:xfrm>
           <a:prstGeom prst="rect">
@@ -12374,7 +12374,7 @@
                 <a:ea typeface="Carlito"/>
                 <a:cs typeface="Carlito"/>
               </a:rPr>
-              <a:t>4,67</a:t>
+              <a:t>4,61</a:t>
             </a:r>
             <a:endParaRPr lang="en-US" sz="1200"/>
           </a:p>
@@ -12388,8 +12388,8 @@
         </p:nvSpPr>
         <p:spPr bwMode="auto">
           <a:xfrm>
-            <a:off x="5842000" y="3782703"/>
-            <a:ext cx="469900" cy="697816"/>
+            <a:off x="5842000" y="4184001"/>
+            <a:ext cx="469900" cy="296559"/>
           </a:xfrm>
           <a:custGeom>
             <a:avLst/>
@@ -12444,7 +12444,7 @@
         </p:nvSpPr>
         <p:spPr bwMode="auto">
           <a:xfrm>
-            <a:off x="6462117" y="3569383"/>
+            <a:off x="6462117" y="3965071"/>
             <a:ext cx="420000" cy="238720"/>
           </a:xfrm>
           <a:prstGeom prst="rect">
@@ -12489,8 +12489,8 @@
         </p:nvSpPr>
         <p:spPr bwMode="auto">
           <a:xfrm>
-            <a:off x="6362700" y="3782703"/>
-            <a:ext cx="469900" cy="697816"/>
+            <a:off x="6362700" y="4179955"/>
+            <a:ext cx="469900" cy="300605"/>
           </a:xfrm>
           <a:custGeom>
             <a:avLst/>
@@ -12880,7 +12880,7 @@
                 <a:ea typeface="Carlito"/>
                 <a:cs typeface="Carlito"/>
               </a:rPr>
-              <a:t>Due core, le stesse code d'uscita</a:t>
+              <a:t>Una coda d'uscita per ogni core</a:t>
             </a:r>
             <a:endParaRPr lang="en-US" sz="1500"/>
           </a:p>
@@ -12925,7 +12925,7 @@
                 <a:ea typeface="Carlito"/>
                 <a:cs typeface="Carlito"/>
               </a:rPr>
-              <a:t>Con due core sul nodo, tutti e due inoltrano nelle stesse code verso il nodo successivo: due scrittori per coda. Le code si intasano e metà dei pacchetti della baseline si perde dopo il nodo, con il core d'uscita occupato solo al 77%.</a:t>
+              <a:t>Prima i due core del nodo scrivevano nella stessa coda d'uscita, svuotata da un solo core: la baseline elaborava 13,1 M/s e ne arrivavano 4,3. Ora ogni core ha la sua coda e il suo core d'uscita: arrivano tutti.</a:t>
             </a:r>
             <a:endParaRPr lang="en-US" sz="1300"/>
           </a:p>
@@ -13049,7 +13049,7 @@
                 <a:ea typeface="Carlito"/>
                 <a:cs typeface="Carlito"/>
               </a:rPr>
-              <a:t>Un esempio: baseline e P2</a:t>
+              <a:t>Il costo per core non cambia</a:t>
             </a:r>
             <a:endParaRPr lang="en-US" sz="1500"/>
           </a:p>
@@ -13094,7 +13094,7 @@
                 <a:ea typeface="Carlito"/>
                 <a:cs typeface="Carlito"/>
               </a:rPr>
-              <a:t>La baseline elabora 13,1 M/s ma ne arrivano 4,3; P2 ne elabora 6,5 e ne arrivano 6,0. Contando gli arrivi la baseline sembrerebbe più lenta di P2, che fa molto più lavoro.</a:t>
+              <a:t>Tempo di CPU per pacchetto di ogni core: 68, 117, 127, 298 e 434 ns, contro 67, 116, 125, 293 e 428 con un core solo (slide 13).</a:t>
             </a:r>
             <a:endParaRPr lang="en-US" sz="1300"/>
           </a:p>
@@ -13263,7 +13263,7 @@
                 <a:ea typeface="Carlito"/>
                 <a:cs typeface="Carlito"/>
               </a:rPr>
-              <a:t>Il controllo di validità (la baseline deve essere la più veloce) conta i pacchetti </a:t>
+              <a:t>Con uno scrittore per coda anche in uscita, due core elaborano il </a:t>
             </a:r>
             <a:r>
               <a:rPr lang="en-US" sz="1500" b="1">
@@ -13274,7 +13274,7 @@
                 <a:ea typeface="Carlito"/>
                 <a:cs typeface="Carlito"/>
               </a:rPr>
-              <a:t>elaborati</a:t>
+              <a:t>95–99% del doppio</a:t>
             </a:r>
             <a:r>
               <a:rPr lang="en-US" sz="1500">
@@ -13285,7 +13285,7 @@
                 <a:ea typeface="Carlito"/>
                 <a:cs typeface="Carlito"/>
               </a:rPr>
-              <a:t>: la stessa grandezza con cui si calcola il costo.</a:t>
+              <a:t> di un core: il costo misurato su un core vale per ogni core.</a:t>
             </a:r>
             <a:endParaRPr lang="en-US" sz="1500"/>
           </a:p>
@@ -13330,7 +13330,7 @@
                 <a:ea typeface="Carlito"/>
                 <a:cs typeface="Carlito"/>
               </a:rPr>
-              <a:t>xdp_gen, 2 core sul nodo, un thread per coda, uscita separata · 64 byte, 30 settembre · arrivati = nodo successivo</a:t>
+              <a:t>xdp_gen, 1 ottobre, 64 byte, 3 giri · nodo su CPU 6 e 8, un thread per coda, uscita su CPU 3 e 5 · 2 × un core = 2 ÷ tempo di CPU della slide 13</a:t>
             </a:r>
             <a:endParaRPr lang="en-US" sz="1200"/>
           </a:p>
@@ -33451,7 +33451,7 @@
         </p:nvSpPr>
         <p:spPr bwMode="auto">
           <a:xfrm>
-            <a:off x="797917" y="3060700"/>
+            <a:off x="797917" y="3355732"/>
             <a:ext cx="321866" cy="238720"/>
           </a:xfrm>
           <a:prstGeom prst="rect">
@@ -33496,8 +33496,8 @@
         </p:nvSpPr>
         <p:spPr bwMode="auto">
           <a:xfrm>
-            <a:off x="736600" y="3274019"/>
-            <a:ext cx="393700" cy="1282700"/>
+            <a:off x="736600" y="3570616"/>
+            <a:ext cx="393700" cy="987668"/>
           </a:xfrm>
           <a:custGeom>
             <a:avLst/>
@@ -33552,7 +33552,7 @@
         </p:nvSpPr>
         <p:spPr bwMode="auto">
           <a:xfrm>
-            <a:off x="1234347" y="2270720"/>
+            <a:off x="1234347" y="2331720"/>
             <a:ext cx="312539" cy="228600"/>
           </a:xfrm>
           <a:prstGeom prst="rect">
@@ -33583,7 +33583,7 @@
                 <a:ea typeface="Carlito"/>
                 <a:cs typeface="Carlito"/>
               </a:rPr>
-              <a:t>7,50</a:t>
+              <a:t>9,41</a:t>
             </a:r>
             <a:endParaRPr lang="en-US" sz="1150"/>
           </a:p>
@@ -33597,8 +33597,8 @@
         </p:nvSpPr>
         <p:spPr bwMode="auto">
           <a:xfrm>
-            <a:off x="1168400" y="2473920"/>
-            <a:ext cx="393700" cy="2082800"/>
+            <a:off x="1168400" y="2546604"/>
+            <a:ext cx="393700" cy="2011680"/>
           </a:xfrm>
           <a:custGeom>
             <a:avLst/>
@@ -33653,7 +33653,7 @@
         </p:nvSpPr>
         <p:spPr bwMode="auto">
           <a:xfrm>
-            <a:off x="1877417" y="3397250"/>
+            <a:off x="1877417" y="3616545"/>
             <a:ext cx="321866" cy="238720"/>
           </a:xfrm>
           <a:prstGeom prst="rect">
@@ -33698,8 +33698,8 @@
         </p:nvSpPr>
         <p:spPr bwMode="auto">
           <a:xfrm>
-            <a:off x="1816100" y="3610569"/>
-            <a:ext cx="393700" cy="946150"/>
+            <a:off x="1816100" y="3831429"/>
+            <a:ext cx="393700" cy="726855"/>
           </a:xfrm>
           <a:custGeom>
             <a:avLst/>
@@ -33754,7 +33754,7 @@
         </p:nvSpPr>
         <p:spPr bwMode="auto">
           <a:xfrm>
-            <a:off x="2309216" y="2540000"/>
+            <a:off x="2309216" y="2906792"/>
             <a:ext cx="321866" cy="238720"/>
           </a:xfrm>
           <a:prstGeom prst="rect">
@@ -33785,7 +33785,7 @@
                 <a:ea typeface="Carlito"/>
                 <a:cs typeface="Carlito"/>
               </a:rPr>
-              <a:t>6,50</a:t>
+              <a:t>6,72</a:t>
             </a:r>
             <a:endParaRPr lang="en-US" sz="1200"/>
           </a:p>
@@ -33799,8 +33799,8 @@
         </p:nvSpPr>
         <p:spPr bwMode="auto">
           <a:xfrm>
-            <a:off x="2247900" y="2753319"/>
-            <a:ext cx="393700" cy="1803400"/>
+            <a:off x="2247900" y="3121676"/>
+            <a:ext cx="393700" cy="1436608"/>
           </a:xfrm>
           <a:custGeom>
             <a:avLst/>
@@ -33855,7 +33855,7 @@
         </p:nvSpPr>
         <p:spPr bwMode="auto">
           <a:xfrm>
-            <a:off x="2956917" y="3505199"/>
+            <a:off x="2956917" y="3699919"/>
             <a:ext cx="321866" cy="238720"/>
           </a:xfrm>
           <a:prstGeom prst="rect">
@@ -33900,8 +33900,8 @@
         </p:nvSpPr>
         <p:spPr bwMode="auto">
           <a:xfrm>
-            <a:off x="2895600" y="3718520"/>
-            <a:ext cx="393700" cy="838200"/>
+            <a:off x="2895600" y="3914803"/>
+            <a:ext cx="393700" cy="643481"/>
           </a:xfrm>
           <a:custGeom>
             <a:avLst/>
@@ -33956,7 +33956,7 @@
         </p:nvSpPr>
         <p:spPr bwMode="auto">
           <a:xfrm>
-            <a:off x="3388717" y="2743200"/>
+            <a:off x="3388717" y="3056438"/>
             <a:ext cx="321866" cy="238720"/>
           </a:xfrm>
           <a:prstGeom prst="rect">
@@ -33987,7 +33987,7 @@
                 <a:ea typeface="Carlito"/>
                 <a:cs typeface="Carlito"/>
               </a:rPr>
-              <a:t>5,76</a:t>
+              <a:t>6,02</a:t>
             </a:r>
             <a:endParaRPr lang="en-US" sz="1200"/>
           </a:p>
@@ -34001,8 +34001,8 @@
         </p:nvSpPr>
         <p:spPr bwMode="auto">
           <a:xfrm>
-            <a:off x="3327400" y="2956520"/>
-            <a:ext cx="393700" cy="1600200"/>
+            <a:off x="3327400" y="3271322"/>
+            <a:ext cx="393700" cy="1286962"/>
           </a:xfrm>
           <a:custGeom>
             <a:avLst/>
@@ -34057,7 +34057,7 @@
         </p:nvSpPr>
         <p:spPr bwMode="auto">
           <a:xfrm>
-            <a:off x="4036417" y="3543300"/>
+            <a:off x="4036417" y="3729849"/>
             <a:ext cx="321866" cy="238720"/>
           </a:xfrm>
           <a:prstGeom prst="rect">
@@ -34102,8 +34102,8 @@
         </p:nvSpPr>
         <p:spPr bwMode="auto">
           <a:xfrm>
-            <a:off x="3975100" y="3756620"/>
-            <a:ext cx="393700" cy="800100"/>
+            <a:off x="3975100" y="3944733"/>
+            <a:ext cx="393700" cy="613551"/>
           </a:xfrm>
           <a:custGeom>
             <a:avLst/>
@@ -34158,7 +34158,7 @@
         </p:nvSpPr>
         <p:spPr bwMode="auto">
           <a:xfrm>
-            <a:off x="4468217" y="2794000"/>
+            <a:off x="4468217" y="3141951"/>
             <a:ext cx="321866" cy="238720"/>
           </a:xfrm>
           <a:prstGeom prst="rect">
@@ -34189,7 +34189,7 @@
                 <a:ea typeface="Carlito"/>
                 <a:cs typeface="Carlito"/>
               </a:rPr>
-              <a:t>5,58</a:t>
+              <a:t>5,62</a:t>
             </a:r>
             <a:endParaRPr lang="en-US" sz="1200"/>
           </a:p>
@@ -34203,8 +34203,8 @@
         </p:nvSpPr>
         <p:spPr bwMode="auto">
           <a:xfrm>
-            <a:off x="4406900" y="3007320"/>
-            <a:ext cx="393700" cy="1549400"/>
+            <a:off x="4406900" y="3356835"/>
+            <a:ext cx="393700" cy="1201449"/>
           </a:xfrm>
           <a:custGeom>
             <a:avLst/>
@@ -34259,7 +34259,7 @@
         </p:nvSpPr>
         <p:spPr bwMode="auto">
           <a:xfrm>
-            <a:off x="5115917" y="3810000"/>
+            <a:off x="5115917" y="3935079"/>
             <a:ext cx="321866" cy="238720"/>
           </a:xfrm>
           <a:prstGeom prst="rect">
@@ -34304,8 +34304,8 @@
         </p:nvSpPr>
         <p:spPr bwMode="auto">
           <a:xfrm>
-            <a:off x="5054600" y="4023320"/>
-            <a:ext cx="393700" cy="533400"/>
+            <a:off x="5054600" y="4149963"/>
+            <a:ext cx="393700" cy="408321"/>
           </a:xfrm>
           <a:custGeom>
             <a:avLst/>
@@ -34360,7 +34360,7 @@
         </p:nvSpPr>
         <p:spPr bwMode="auto">
           <a:xfrm>
-            <a:off x="5547717" y="3308350"/>
+            <a:off x="5547717" y="3533170"/>
             <a:ext cx="321866" cy="238720"/>
           </a:xfrm>
           <a:prstGeom prst="rect">
@@ -34391,7 +34391,7 @@
                 <a:ea typeface="Carlito"/>
                 <a:cs typeface="Carlito"/>
               </a:rPr>
-              <a:t>3,72</a:t>
+              <a:t>3,79</a:t>
             </a:r>
             <a:endParaRPr lang="en-US" sz="1200"/>
           </a:p>
@@ -34405,8 +34405,8 @@
         </p:nvSpPr>
         <p:spPr bwMode="auto">
           <a:xfrm>
-            <a:off x="5486400" y="3521670"/>
-            <a:ext cx="393700" cy="1035050"/>
+            <a:off x="5486400" y="3748054"/>
+            <a:ext cx="393700" cy="810230"/>
           </a:xfrm>
           <a:custGeom>
             <a:avLst/>
@@ -34461,7 +34461,7 @@
         </p:nvSpPr>
         <p:spPr bwMode="auto">
           <a:xfrm>
-            <a:off x="6195417" y="3930650"/>
+            <a:off x="6195417" y="4024867"/>
             <a:ext cx="321866" cy="238720"/>
           </a:xfrm>
           <a:prstGeom prst="rect">
@@ -34506,8 +34506,8 @@
         </p:nvSpPr>
         <p:spPr bwMode="auto">
           <a:xfrm>
-            <a:off x="6134100" y="4143970"/>
-            <a:ext cx="393700" cy="412750"/>
+            <a:off x="6134100" y="4239751"/>
+            <a:ext cx="393700" cy="318533"/>
           </a:xfrm>
           <a:custGeom>
             <a:avLst/>
@@ -34562,7 +34562,7 @@
         </p:nvSpPr>
         <p:spPr bwMode="auto">
           <a:xfrm>
-            <a:off x="6627217" y="3524250"/>
+            <a:off x="6627217" y="3727711"/>
             <a:ext cx="321866" cy="238720"/>
           </a:xfrm>
           <a:prstGeom prst="rect">
@@ -34593,7 +34593,7 @@
                 <a:ea typeface="Carlito"/>
                 <a:cs typeface="Carlito"/>
               </a:rPr>
-              <a:t>2,95</a:t>
+              <a:t>2,88</a:t>
             </a:r>
             <a:endParaRPr lang="en-US" sz="1200"/>
           </a:p>
@@ -34607,8 +34607,8 @@
         </p:nvSpPr>
         <p:spPr bwMode="auto">
           <a:xfrm>
-            <a:off x="6565900" y="3737570"/>
-            <a:ext cx="393700" cy="819150"/>
+            <a:off x="6565900" y="3942595"/>
+            <a:ext cx="393700" cy="615689"/>
           </a:xfrm>
           <a:custGeom>
             <a:avLst/>
@@ -34964,7 +34964,7 @@
                 <a:ea typeface="Carlito"/>
                 <a:cs typeface="Carlito"/>
               </a:rPr>
-              <a:t>×1,62</a:t>
+              <a:t>×2,04</a:t>
             </a:r>
             <a:endParaRPr lang="en-US" sz="1300"/>
           </a:p>
@@ -35009,7 +35009,7 @@
                 <a:ea typeface="Carlito"/>
                 <a:cs typeface="Carlito"/>
               </a:rPr>
-              <a:t>×1,91</a:t>
+              <a:t>×1,98</a:t>
             </a:r>
             <a:endParaRPr lang="en-US" sz="1300"/>
           </a:p>
@@ -35054,7 +35054,7 @@
                 <a:ea typeface="Carlito"/>
                 <a:cs typeface="Carlito"/>
               </a:rPr>
-              <a:t>×1,91</a:t>
+              <a:t>×2,00</a:t>
             </a:r>
             <a:endParaRPr lang="en-US" sz="1300"/>
           </a:p>
@@ -35099,7 +35099,7 @@
                 <a:ea typeface="Carlito"/>
                 <a:cs typeface="Carlito"/>
               </a:rPr>
-              <a:t>×1,95</a:t>
+              <a:t>×1,96</a:t>
             </a:r>
             <a:endParaRPr lang="en-US" sz="1300"/>
           </a:p>
@@ -35144,7 +35144,7 @@
                 <a:ea typeface="Carlito"/>
                 <a:cs typeface="Carlito"/>
               </a:rPr>
-              <a:t>×1,95</a:t>
+              <a:t>×1,98</a:t>
             </a:r>
             <a:endParaRPr lang="en-US" sz="1300"/>
           </a:p>
@@ -35189,7 +35189,7 @@
                 <a:ea typeface="Carlito"/>
                 <a:cs typeface="Carlito"/>
               </a:rPr>
-              <a:t>×1,98</a:t>
+              <a:t>×1,93</a:t>
             </a:r>
             <a:endParaRPr lang="en-US" sz="1300"/>
           </a:p>
@@ -35482,7 +35482,7 @@
                 <a:ea typeface="Carlito"/>
                 <a:cs typeface="Carlito"/>
               </a:rPr>
-              <a:t>Perché rxonly cresce meno</a:t>
+              <a:t>Quattro thread, due per coda</a:t>
             </a:r>
             <a:endParaRPr lang="en-US" sz="1400"/>
           </a:p>
@@ -35527,7 +35527,7 @@
                 <a:ea typeface="Carlito"/>
                 <a:cs typeface="Carlito"/>
               </a:rPr>
-              <a:t>Tre thread su due code: due scrivono nella stessa coda e si intralciano (slide 13).</a:t>
+              <a:t>Con tre thread una coda ne aveva uno solo (~2,8 M/s): rxonly non saturava (×1,64).</a:t>
             </a:r>
             <a:endParaRPr lang="en-US" sz="1300"/>
           </a:p>
@@ -35865,7 +35865,7 @@
                 <a:ea typeface="Carlito"/>
                 <a:cs typeface="Carlito"/>
               </a:rPr>
-              <a:t>Il costo per pacchetto resta quello di un core: un nodo con N code regge circa </a:t>
+              <a:t>Il costo per pacchetto resta quello di un core: un nodo con N code regge </a:t>
             </a:r>
             <a:r>
               <a:rPr lang="en-US" sz="1500" b="1">
@@ -35876,7 +35876,7 @@
                 <a:ea typeface="Carlito"/>
                 <a:cs typeface="Carlito"/>
               </a:rPr>
-              <a:t>N volte</a:t>
+              <a:t>circa N volte</a:t>
             </a:r>
             <a:r>
               <a:rPr lang="en-US" sz="1500">
@@ -35887,7 +35887,7 @@
                 <a:ea typeface="Carlito"/>
                 <a:cs typeface="Carlito"/>
               </a:rPr>
-              <a:t> la capacità misurata su un core, finché generatore e scheda reggono.</a:t>
+              <a:t> la capacità misurata su un core, con pktgen e con xdp_gen (slide 14).</a:t>
             </a:r>
             <a:endParaRPr lang="en-US" sz="1500"/>
           </a:p>
@@ -35932,7 +35932,7 @@
                 <a:ea typeface="Carlito"/>
                 <a:cs typeface="Carlito"/>
               </a:rPr>
-              <a:t>pktgen a 3 thread, 64 byte, 3 giri · due code d'ingresso, una per core (CPU 6 e 8) · rapporto = 2 core / 1 core</a:t>
+              <a:t>pktgen a 4 thread, 2 per coda · una coda d'uscita per core (CPU 6 e 8) · 64 byte, 3 giri · 1 core: 28/9, 2 core: 1/10</a:t>
             </a:r>
             <a:endParaRPr lang="en-US" sz="1200"/>
           </a:p>
@@ -36734,7 +36734,7 @@
                 <a:ea typeface="Carlito"/>
                 <a:cs typeface="Carlito"/>
               </a:rPr>
-              <a:t>Il nodo satura alla sua capacità, il ritardo salta di un ordine di grandezza e la perdita è tutta all'ingresso: il collo di bottiglia è il programma, e la capacità cresce con i core.</a:t>
+              <a:t>Il nodo satura alla sua capacità, il ritardo salta di un ordine di grandezza e la perdita è tutta all'ingresso: il collo di bottiglia è il programma, e due core reggono il doppio.</a:t>
             </a:r>
             <a:endParaRPr lang="en-US" sz="1450"/>
           </a:p>

--- a/docs/Test reale su dual boot.pptx
+++ b/docs/Test reale su dual boot.pptx
@@ -4679,7 +4679,7 @@
                 <a:ea typeface="Carlito"/>
                 <a:cs typeface="Carlito"/>
               </a:rPr>
-              <a:t>293 ns</a:t>
+              <a:t>292 ns</a:t>
             </a:r>
             <a:endParaRPr lang="en-US" sz="3600"/>
           </a:p>
@@ -9349,7 +9349,7 @@
         <p:spPr bwMode="auto">
           <a:xfrm>
             <a:off x="1943100" y="2006600"/>
-            <a:ext cx="3300000" cy="279400"/>
+            <a:ext cx="3284700" cy="279400"/>
           </a:xfrm>
           <a:prstGeom prst="roundRect">
             <a:avLst>
@@ -9382,7 +9382,7 @@
         </p:nvSpPr>
         <p:spPr bwMode="auto">
           <a:xfrm>
-            <a:off x="5319300" y="2025650"/>
+            <a:off x="5306438" y="2025650"/>
             <a:ext cx="640000" cy="292100"/>
           </a:xfrm>
           <a:prstGeom prst="rect">
@@ -9413,7 +9413,7 @@
                 <a:ea typeface="Carlito"/>
                 <a:cs typeface="Carlito"/>
               </a:rPr>
-              <a:t>15,03</a:t>
+              <a:t>14,96</a:t>
             </a:r>
             <a:endParaRPr lang="en-US" sz="1500"/>
           </a:p>
@@ -9595,7 +9595,7 @@
         <p:spPr bwMode="auto">
           <a:xfrm>
             <a:off x="1943100" y="2463800"/>
-            <a:ext cx="2665469" cy="279400"/>
+            <a:ext cx="2724807" cy="279400"/>
           </a:xfrm>
           <a:prstGeom prst="roundRect">
             <a:avLst>
@@ -9628,7 +9628,7 @@
         </p:nvSpPr>
         <p:spPr bwMode="auto">
           <a:xfrm>
-            <a:off x="4684769" y="2482850"/>
+            <a:off x="4746545" y="2482850"/>
             <a:ext cx="640000" cy="292100"/>
           </a:xfrm>
           <a:prstGeom prst="rect">
@@ -9659,7 +9659,7 @@
                 <a:ea typeface="Carlito"/>
                 <a:cs typeface="Carlito"/>
               </a:rPr>
-              <a:t>12,14</a:t>
+              <a:t>12,41</a:t>
             </a:r>
             <a:endParaRPr lang="en-US" sz="1500"/>
           </a:p>
@@ -9704,7 +9704,7 @@
                 <a:ea typeface="Carlito"/>
                 <a:cs typeface="Carlito"/>
               </a:rPr>
-              <a:t>≈ 67 ns</a:t>
+              <a:t>≈ 65 ns</a:t>
             </a:r>
             <a:endParaRPr lang="en-US" sz="1400"/>
           </a:p>
@@ -9841,7 +9841,7 @@
         <p:spPr bwMode="auto">
           <a:xfrm>
             <a:off x="1943100" y="2921000"/>
-            <a:ext cx="1664271" cy="279400"/>
+            <a:ext cx="1666502" cy="279400"/>
           </a:xfrm>
           <a:prstGeom prst="roundRect">
             <a:avLst>
@@ -9872,7 +9872,7 @@
         </p:nvSpPr>
         <p:spPr bwMode="auto">
           <a:xfrm>
-            <a:off x="3683571" y="2940050"/>
+            <a:off x="3688240" y="2940050"/>
             <a:ext cx="640000" cy="292100"/>
           </a:xfrm>
           <a:prstGeom prst="rect">
@@ -9903,7 +9903,7 @@
                 <a:ea typeface="Carlito"/>
                 <a:cs typeface="Carlito"/>
               </a:rPr>
-              <a:t>7,58</a:t>
+              <a:t>7,59</a:t>
             </a:r>
             <a:endParaRPr lang="en-US" sz="1500"/>
           </a:p>
@@ -9948,7 +9948,7 @@
                 <a:ea typeface="Carlito"/>
                 <a:cs typeface="Carlito"/>
               </a:rPr>
-              <a:t>116 ns</a:t>
+              <a:t>117 ns</a:t>
             </a:r>
             <a:endParaRPr lang="en-US" sz="1400"/>
           </a:p>
@@ -10085,7 +10085,7 @@
         <p:spPr bwMode="auto">
           <a:xfrm>
             <a:off x="1943100" y="3378200"/>
-            <a:ext cx="1486427" cy="279400"/>
+            <a:ext cx="1554523" cy="279400"/>
           </a:xfrm>
           <a:prstGeom prst="roundRect">
             <a:avLst>
@@ -10116,7 +10116,7 @@
         </p:nvSpPr>
         <p:spPr bwMode="auto">
           <a:xfrm>
-            <a:off x="3505727" y="3397250"/>
+            <a:off x="3576261" y="3397250"/>
             <a:ext cx="640000" cy="292100"/>
           </a:xfrm>
           <a:prstGeom prst="rect">
@@ -10147,7 +10147,7 @@
                 <a:ea typeface="Carlito"/>
                 <a:cs typeface="Carlito"/>
               </a:rPr>
-              <a:t>6,77</a:t>
+              <a:t>7,08</a:t>
             </a:r>
             <a:endParaRPr lang="en-US" sz="1500"/>
           </a:p>
@@ -10192,7 +10192,7 @@
                 <a:ea typeface="Carlito"/>
                 <a:cs typeface="Carlito"/>
               </a:rPr>
-              <a:t>125 ns</a:t>
+              <a:t>124 ns</a:t>
             </a:r>
             <a:endParaRPr lang="en-US" sz="1400"/>
           </a:p>
@@ -10329,7 +10329,7 @@
         <p:spPr bwMode="auto">
           <a:xfrm>
             <a:off x="1943100" y="3835400"/>
-            <a:ext cx="658682" cy="279400"/>
+            <a:ext cx="652109" cy="279400"/>
           </a:xfrm>
           <a:prstGeom prst="roundRect">
             <a:avLst>
@@ -10360,7 +10360,7 @@
         </p:nvSpPr>
         <p:spPr bwMode="auto">
           <a:xfrm>
-            <a:off x="2677982" y="3854450"/>
+            <a:off x="2673847" y="3854450"/>
             <a:ext cx="640000" cy="292100"/>
           </a:xfrm>
           <a:prstGeom prst="rect">
@@ -10391,7 +10391,7 @@
                 <a:ea typeface="Carlito"/>
                 <a:cs typeface="Carlito"/>
               </a:rPr>
-              <a:t>3,00</a:t>
+              <a:t>2,97</a:t>
             </a:r>
             <a:endParaRPr lang="en-US" sz="1500"/>
           </a:p>
@@ -10436,7 +10436,7 @@
                 <a:ea typeface="Carlito"/>
                 <a:cs typeface="Carlito"/>
               </a:rPr>
-              <a:t>293 ns</a:t>
+              <a:t>292 ns</a:t>
             </a:r>
             <a:endParaRPr lang="en-US" sz="1400"/>
           </a:p>
@@ -10573,7 +10573,7 @@
         <p:spPr bwMode="auto">
           <a:xfrm>
             <a:off x="1943100" y="4292600"/>
-            <a:ext cx="432534" cy="279400"/>
+            <a:ext cx="441326" cy="279400"/>
           </a:xfrm>
           <a:prstGeom prst="roundRect">
             <a:avLst>
@@ -10604,7 +10604,7 @@
         </p:nvSpPr>
         <p:spPr bwMode="auto">
           <a:xfrm>
-            <a:off x="2451834" y="4311650"/>
+            <a:off x="2463064" y="4311650"/>
             <a:ext cx="640000" cy="292100"/>
           </a:xfrm>
           <a:prstGeom prst="rect">
@@ -10635,7 +10635,7 @@
                 <a:ea typeface="Carlito"/>
                 <a:cs typeface="Carlito"/>
               </a:rPr>
-              <a:t>1,97</a:t>
+              <a:t>2,01</a:t>
             </a:r>
             <a:endParaRPr lang="en-US" sz="1500"/>
           </a:p>
@@ -10680,7 +10680,7 @@
                 <a:ea typeface="Carlito"/>
                 <a:cs typeface="Carlito"/>
               </a:rPr>
-              <a:t>428 ns</a:t>
+              <a:t>432 ns</a:t>
             </a:r>
             <a:endParaRPr lang="en-US" sz="1400"/>
           </a:p>
@@ -11085,7 +11085,7 @@
                 <a:ea typeface="Carlito"/>
                 <a:cs typeface="Carlito"/>
               </a:rPr>
-              <a:t>: 116, 125, 293 e 428 ns di CPU. Baseline e rxonly, con un thread, non saturano: i loro valori sono indicativi.</a:t>
+              <a:t>: 117, 124, 292 e 432 ns di CPU. Baseline e rxonly, con un thread, non saturano: i loro valori sono indicativi.</a:t>
             </a:r>
             <a:endParaRPr lang="en-US" sz="1500"/>
           </a:p>
@@ -11535,7 +11535,7 @@
         </p:nvSpPr>
         <p:spPr bwMode="auto">
           <a:xfrm>
-            <a:off x="836016" y="2443218"/>
+            <a:off x="836016" y="2479407"/>
             <a:ext cx="420000" cy="238720"/>
           </a:xfrm>
           <a:prstGeom prst="rect">
@@ -11566,7 +11566,7 @@
                 <a:ea typeface="Carlito"/>
                 <a:cs typeface="Carlito"/>
               </a:rPr>
-              <a:t>28,33</a:t>
+              <a:t>28,80</a:t>
             </a:r>
             <a:endParaRPr lang="en-US" sz="1200"/>
           </a:p>
@@ -11580,8 +11580,8 @@
         </p:nvSpPr>
         <p:spPr bwMode="auto">
           <a:xfrm>
-            <a:off x="736600" y="2658102"/>
-            <a:ext cx="469900" cy="1822458"/>
+            <a:off x="736600" y="2694291"/>
+            <a:ext cx="469900" cy="1786269"/>
           </a:xfrm>
           <a:custGeom>
             <a:avLst/>
@@ -11636,7 +11636,7 @@
         </p:nvSpPr>
         <p:spPr bwMode="auto">
           <a:xfrm>
-            <a:off x="1356717" y="2345388"/>
+            <a:off x="1356717" y="2345452"/>
             <a:ext cx="420000" cy="238720"/>
           </a:xfrm>
           <a:prstGeom prst="rect">
@@ -11667,7 +11667,7 @@
                 <a:ea typeface="Carlito"/>
                 <a:cs typeface="Carlito"/>
               </a:rPr>
-              <a:t>29,85</a:t>
+              <a:t>30,96</a:t>
             </a:r>
             <a:endParaRPr lang="en-US" sz="1200"/>
           </a:p>
@@ -11681,8 +11681,8 @@
         </p:nvSpPr>
         <p:spPr bwMode="auto">
           <a:xfrm>
-            <a:off x="1257300" y="2560272"/>
-            <a:ext cx="469900" cy="1920288"/>
+            <a:off x="1257300" y="2560336"/>
+            <a:ext cx="469900" cy="1920224"/>
           </a:xfrm>
           <a:custGeom>
             <a:avLst/>
@@ -11737,7 +11737,7 @@
         </p:nvSpPr>
         <p:spPr bwMode="auto">
           <a:xfrm>
-            <a:off x="2112367" y="3168856"/>
+            <a:off x="2112367" y="3237951"/>
             <a:ext cx="420000" cy="238720"/>
           </a:xfrm>
           <a:prstGeom prst="rect">
@@ -11768,7 +11768,7 @@
                 <a:ea typeface="Carlito"/>
                 <a:cs typeface="Carlito"/>
               </a:rPr>
-              <a:t>17,05</a:t>
+              <a:t>16,57</a:t>
             </a:r>
             <a:endParaRPr lang="en-US" sz="1200"/>
           </a:p>
@@ -11782,8 +11782,8 @@
         </p:nvSpPr>
         <p:spPr bwMode="auto">
           <a:xfrm>
-            <a:off x="2012949" y="3383740"/>
-            <a:ext cx="469900" cy="1096820"/>
+            <a:off x="2012949" y="3452835"/>
+            <a:ext cx="469900" cy="1027725"/>
           </a:xfrm>
           <a:custGeom>
             <a:avLst/>
@@ -11838,7 +11838,7 @@
         </p:nvSpPr>
         <p:spPr bwMode="auto">
           <a:xfrm>
-            <a:off x="2633067" y="3156545"/>
+            <a:off x="2633067" y="3201813"/>
             <a:ext cx="420000" cy="238720"/>
           </a:xfrm>
           <a:prstGeom prst="rect">
@@ -11869,7 +11869,7 @@
                 <a:ea typeface="Carlito"/>
                 <a:cs typeface="Carlito"/>
               </a:rPr>
-              <a:t>17,24</a:t>
+              <a:t>17,15</a:t>
             </a:r>
             <a:endParaRPr lang="en-US" sz="1200"/>
           </a:p>
@@ -11883,8 +11883,8 @@
         </p:nvSpPr>
         <p:spPr bwMode="auto">
           <a:xfrm>
-            <a:off x="2533650" y="3371429"/>
-            <a:ext cx="469900" cy="1109131"/>
+            <a:off x="2533650" y="3416697"/>
+            <a:ext cx="469900" cy="1063863"/>
           </a:xfrm>
           <a:custGeom>
             <a:avLst/>
@@ -11939,7 +11939,7 @@
         </p:nvSpPr>
         <p:spPr bwMode="auto">
           <a:xfrm>
-            <a:off x="3388717" y="3248625"/>
+            <a:off x="3388717" y="3280747"/>
             <a:ext cx="420000" cy="238720"/>
           </a:xfrm>
           <a:prstGeom prst="rect">
@@ -11970,7 +11970,7 @@
                 <a:ea typeface="Carlito"/>
                 <a:cs typeface="Carlito"/>
               </a:rPr>
-              <a:t>15,81</a:t>
+              <a:t>15,88</a:t>
             </a:r>
             <a:endParaRPr lang="en-US" sz="1200"/>
           </a:p>
@@ -11984,8 +11984,8 @@
         </p:nvSpPr>
         <p:spPr bwMode="auto">
           <a:xfrm>
-            <a:off x="3289300" y="3463509"/>
-            <a:ext cx="469900" cy="1017051"/>
+            <a:off x="3289300" y="3495631"/>
+            <a:ext cx="469900" cy="984929"/>
           </a:xfrm>
           <a:custGeom>
             <a:avLst/>
@@ -12040,7 +12040,7 @@
         </p:nvSpPr>
         <p:spPr bwMode="auto">
           <a:xfrm>
-            <a:off x="3909417" y="3236402"/>
+            <a:off x="3909417" y="3265301"/>
             <a:ext cx="420000" cy="238720"/>
           </a:xfrm>
           <a:prstGeom prst="rect">
@@ -12071,7 +12071,7 @@
                 <a:ea typeface="Carlito"/>
                 <a:cs typeface="Carlito"/>
               </a:rPr>
-              <a:t>16,00</a:t>
+              <a:t>16,13</a:t>
             </a:r>
             <a:endParaRPr lang="en-US" sz="1200"/>
           </a:p>
@@ -12085,8 +12085,8 @@
         </p:nvSpPr>
         <p:spPr bwMode="auto">
           <a:xfrm>
-            <a:off x="3810000" y="3451286"/>
-            <a:ext cx="469900" cy="1029274"/>
+            <a:off x="3810000" y="3480185"/>
+            <a:ext cx="469900" cy="1000375"/>
           </a:xfrm>
           <a:custGeom>
             <a:avLst/>
@@ -12141,7 +12141,7 @@
         </p:nvSpPr>
         <p:spPr bwMode="auto">
           <a:xfrm>
-            <a:off x="4665067" y="3835954"/>
+            <a:off x="4665067" y="3847640"/>
             <a:ext cx="420000" cy="238720"/>
           </a:xfrm>
           <a:prstGeom prst="rect">
@@ -12172,7 +12172,7 @@
                 <a:ea typeface="Carlito"/>
                 <a:cs typeface="Carlito"/>
               </a:rPr>
-              <a:t>6,68</a:t>
+              <a:t>6,74</a:t>
             </a:r>
             <a:endParaRPr lang="en-US" sz="1200"/>
           </a:p>
@@ -12186,8 +12186,8 @@
         </p:nvSpPr>
         <p:spPr bwMode="auto">
           <a:xfrm>
-            <a:off x="4565650" y="4050838"/>
-            <a:ext cx="469900" cy="429722"/>
+            <a:off x="4565650" y="4062524"/>
+            <a:ext cx="469900" cy="418036"/>
           </a:xfrm>
           <a:custGeom>
             <a:avLst/>
@@ -12242,7 +12242,7 @@
         </p:nvSpPr>
         <p:spPr bwMode="auto">
           <a:xfrm>
-            <a:off x="5185767" y="3826566"/>
+            <a:off x="5185767" y="3841296"/>
             <a:ext cx="420000" cy="238720"/>
           </a:xfrm>
           <a:prstGeom prst="rect">
@@ -12273,7 +12273,7 @@
                 <a:ea typeface="Carlito"/>
                 <a:cs typeface="Carlito"/>
               </a:rPr>
-              <a:t>6,83</a:t>
+              <a:t>6,84</a:t>
             </a:r>
             <a:endParaRPr lang="en-US" sz="1200"/>
           </a:p>
@@ -12287,8 +12287,8 @@
         </p:nvSpPr>
         <p:spPr bwMode="auto">
           <a:xfrm>
-            <a:off x="5086350" y="4041450"/>
-            <a:ext cx="469900" cy="439110"/>
+            <a:off x="5086350" y="4056180"/>
+            <a:ext cx="469900" cy="424380"/>
           </a:xfrm>
           <a:custGeom>
             <a:avLst/>
@@ -12343,7 +12343,7 @@
         </p:nvSpPr>
         <p:spPr bwMode="auto">
           <a:xfrm>
-            <a:off x="5941417" y="3969117"/>
+            <a:off x="5941417" y="3983471"/>
             <a:ext cx="420000" cy="238720"/>
           </a:xfrm>
           <a:prstGeom prst="rect">
@@ -12374,7 +12374,7 @@
                 <a:ea typeface="Carlito"/>
                 <a:cs typeface="Carlito"/>
               </a:rPr>
-              <a:t>4,61</a:t>
+              <a:t>4,55</a:t>
             </a:r>
             <a:endParaRPr lang="en-US" sz="1200"/>
           </a:p>
@@ -12388,8 +12388,8 @@
         </p:nvSpPr>
         <p:spPr bwMode="auto">
           <a:xfrm>
-            <a:off x="5842000" y="4184001"/>
-            <a:ext cx="469900" cy="296559"/>
+            <a:off x="5842000" y="4198355"/>
+            <a:ext cx="469900" cy="282205"/>
           </a:xfrm>
           <a:custGeom>
             <a:avLst/>
@@ -12444,7 +12444,7 @@
         </p:nvSpPr>
         <p:spPr bwMode="auto">
           <a:xfrm>
-            <a:off x="6462117" y="3965071"/>
+            <a:off x="6462117" y="3978199"/>
             <a:ext cx="420000" cy="238720"/>
           </a:xfrm>
           <a:prstGeom prst="rect">
@@ -12475,7 +12475,7 @@
                 <a:ea typeface="Carlito"/>
                 <a:cs typeface="Carlito"/>
               </a:rPr>
-              <a:t>4,67</a:t>
+              <a:t>4,63</a:t>
             </a:r>
             <a:endParaRPr lang="en-US" sz="1200"/>
           </a:p>
@@ -12489,8 +12489,8 @@
         </p:nvSpPr>
         <p:spPr bwMode="auto">
           <a:xfrm>
-            <a:off x="6362700" y="4179955"/>
-            <a:ext cx="469900" cy="300605"/>
+            <a:off x="6362700" y="4193083"/>
+            <a:ext cx="469900" cy="287477"/>
           </a:xfrm>
           <a:custGeom>
             <a:avLst/>
@@ -13094,7 +13094,7 @@
                 <a:ea typeface="Carlito"/>
                 <a:cs typeface="Carlito"/>
               </a:rPr>
-              <a:t>Tempo di CPU per pacchetto di ogni core: 68, 117, 127, 298 e 434 ns, contro 67, 116, 125, 293 e 428 con un core solo (slide 13).</a:t>
+              <a:t>Tempo di CPU per pacchetto di ogni core: 68, 121, 126, 297 e 439 ns, contro 65, 117, 124, 292 e 432 con un core solo (slide 13).</a:t>
             </a:r>
             <a:endParaRPr lang="en-US" sz="1300"/>
           </a:p>
@@ -13274,7 +13274,7 @@
                 <a:ea typeface="Carlito"/>
                 <a:cs typeface="Carlito"/>
               </a:rPr>
-              <a:t>95–99% del doppio</a:t>
+              <a:t>97–99% del doppio</a:t>
             </a:r>
             <a:r>
               <a:rPr lang="en-US" sz="1500">
@@ -13285,7 +13285,7 @@
                 <a:ea typeface="Carlito"/>
                 <a:cs typeface="Carlito"/>
               </a:rPr>
-              <a:t> di un core: il costo misurato su un core vale per ogni core.</a:t>
+              <a:t> di un core (P1–P3): il costo misurato su un core vale per ogni core.</a:t>
             </a:r>
             <a:endParaRPr lang="en-US" sz="1500"/>
           </a:p>
@@ -13903,7 +13903,7 @@
         <p:spPr bwMode="auto">
           <a:xfrm>
             <a:off x="1689100" y="2600920"/>
-            <a:ext cx="388821" cy="203200"/>
+            <a:ext cx="374985" cy="203200"/>
           </a:xfrm>
           <a:prstGeom prst="roundRect">
             <a:avLst>
@@ -13936,7 +13936,7 @@
         </p:nvSpPr>
         <p:spPr bwMode="auto">
           <a:xfrm>
-            <a:off x="2154121" y="2607270"/>
+            <a:off x="2142519" y="2607270"/>
             <a:ext cx="1066800" cy="256514"/>
           </a:xfrm>
           <a:prstGeom prst="rect">
@@ -13967,7 +13967,7 @@
                 <a:ea typeface="Carlito"/>
                 <a:cs typeface="Carlito"/>
               </a:rPr>
-              <a:t>≈ 67 ns</a:t>
+              <a:t>≈ 65 ns</a:t>
             </a:r>
             <a:endParaRPr lang="en-US" sz="1300"/>
           </a:p>
@@ -14104,7 +14104,7 @@
         <p:spPr bwMode="auto">
           <a:xfrm>
             <a:off x="1689100" y="3121620"/>
-            <a:ext cx="673183" cy="203200"/>
+            <a:ext cx="676830" cy="203200"/>
           </a:xfrm>
           <a:prstGeom prst="roundRect">
             <a:avLst>
@@ -14135,7 +14135,7 @@
         </p:nvSpPr>
         <p:spPr bwMode="auto">
           <a:xfrm>
-            <a:off x="2438483" y="3127970"/>
+            <a:off x="2444364" y="3127970"/>
             <a:ext cx="1700000" cy="256514"/>
           </a:xfrm>
           <a:prstGeom prst="rect">
@@ -14166,7 +14166,7 @@
                 <a:ea typeface="Carlito"/>
                 <a:cs typeface="Carlito"/>
               </a:rPr>
-              <a:t>116 ns   −224 ns</a:t>
+              <a:t>117 ns   −223 ns</a:t>
             </a:r>
             <a:endParaRPr lang="en-US" sz="1300"/>
           </a:p>
@@ -14303,7 +14303,7 @@
         <p:spPr bwMode="auto">
           <a:xfrm>
             <a:off x="1689100" y="3642320"/>
-            <a:ext cx="725413" cy="203200"/>
+            <a:ext cx="719785" cy="203200"/>
           </a:xfrm>
           <a:prstGeom prst="roundRect">
             <a:avLst>
@@ -14334,7 +14334,7 @@
         </p:nvSpPr>
         <p:spPr bwMode="auto">
           <a:xfrm>
-            <a:off x="2490713" y="3648670"/>
+            <a:off x="2487319" y="3648670"/>
             <a:ext cx="1700000" cy="256514"/>
           </a:xfrm>
           <a:prstGeom prst="rect">
@@ -14365,7 +14365,7 @@
                 <a:ea typeface="Carlito"/>
                 <a:cs typeface="Carlito"/>
               </a:rPr>
-              <a:t>125 ns   −231 ns</a:t>
+              <a:t>124 ns   −232 ns</a:t>
             </a:r>
             <a:endParaRPr lang="en-US" sz="1300"/>
           </a:p>
@@ -14502,7 +14502,7 @@
         <p:spPr bwMode="auto">
           <a:xfrm>
             <a:off x="1689100" y="4163020"/>
-            <a:ext cx="1700369" cy="203200"/>
+            <a:ext cx="1696720" cy="203200"/>
           </a:xfrm>
           <a:prstGeom prst="roundRect">
             <a:avLst>
@@ -14533,7 +14533,7 @@
         </p:nvSpPr>
         <p:spPr bwMode="auto">
           <a:xfrm>
-            <a:off x="3465669" y="4169370"/>
+            <a:off x="3464254" y="4169370"/>
             <a:ext cx="685800" cy="256514"/>
           </a:xfrm>
           <a:prstGeom prst="rect">
@@ -14564,7 +14564,7 @@
                 <a:ea typeface="Carlito"/>
                 <a:cs typeface="Carlito"/>
               </a:rPr>
-              <a:t>293 ns</a:t>
+              <a:t>292 ns</a:t>
             </a:r>
             <a:endParaRPr lang="en-US" sz="1300"/>
           </a:p>
@@ -14578,7 +14578,7 @@
         </p:nvSpPr>
         <p:spPr bwMode="auto">
           <a:xfrm>
-            <a:off x="4208619" y="4169370"/>
+            <a:off x="4204918" y="4169370"/>
             <a:ext cx="1193800" cy="256514"/>
           </a:xfrm>
           <a:prstGeom prst="rect">
@@ -14609,7 +14609,7 @@
                 <a:ea typeface="Carlito"/>
                 <a:cs typeface="Carlito"/>
               </a:rPr>
-              <a:t>−236 ns</a:t>
+              <a:t>−237 ns</a:t>
             </a:r>
             <a:endParaRPr lang="en-US" sz="1300"/>
           </a:p>
@@ -14746,7 +14746,7 @@
         <p:spPr bwMode="auto">
           <a:xfrm>
             <a:off x="1689100" y="4683720"/>
-            <a:ext cx="2483815" cy="203200"/>
+            <a:ext cx="2504738" cy="203200"/>
           </a:xfrm>
           <a:prstGeom prst="roundRect">
             <a:avLst>
@@ -14777,7 +14777,7 @@
         </p:nvSpPr>
         <p:spPr bwMode="auto">
           <a:xfrm>
-            <a:off x="4249115" y="4690070"/>
+            <a:off x="4272272" y="4690070"/>
             <a:ext cx="685800" cy="256514"/>
           </a:xfrm>
           <a:prstGeom prst="rect">
@@ -14808,7 +14808,7 @@
                 <a:ea typeface="Carlito"/>
                 <a:cs typeface="Carlito"/>
               </a:rPr>
-              <a:t>428 ns</a:t>
+              <a:t>432 ns</a:t>
             </a:r>
             <a:endParaRPr lang="en-US" sz="1300"/>
           </a:p>
@@ -14822,7 +14822,7 @@
         </p:nvSpPr>
         <p:spPr bwMode="auto">
           <a:xfrm>
-            <a:off x="4992065" y="4690070"/>
+            <a:off x="5012936" y="4690070"/>
             <a:ext cx="1193800" cy="256514"/>
           </a:xfrm>
           <a:prstGeom prst="rect">
@@ -14853,7 +14853,7 @@
                 <a:ea typeface="Carlito"/>
                 <a:cs typeface="Carlito"/>
               </a:rPr>
-              <a:t>−238 ns</a:t>
+              <a:t>−234 ns</a:t>
             </a:r>
             <a:endParaRPr lang="en-US" sz="1300"/>
           </a:p>
@@ -15191,7 +15191,7 @@
                 <a:ea typeface="Carlito"/>
                 <a:cs typeface="Carlito"/>
               </a:rPr>
-              <a:t>116, 125, 293 e 428 ns di CPU, un thread per coda. Baseline ≈ 67 ns: indicativa.</a:t>
+              <a:t>117, 124, 292 e 432 ns di CPU, un thread per coda. Baseline ≈ 65 ns: indicativa.</a:t>
             </a:r>
             <a:endParaRPr lang="en-US" sz="1300"/>
           </a:p>
@@ -15596,7 +15596,7 @@
                 <a:ea typeface="Carlito"/>
                 <a:cs typeface="Carlito"/>
               </a:rPr>
-              <a:t>pktgen del 28 settembre, xdp_gen del 30 (tempo di CPU) · P1: 340 − 116 = 224 · P1.5: 356 − 125 = 231 · P2: 529 − 293 = 236 · P3: 666 − 428 = 238 ns</a:t>
+              <a:t>pktgen 28/9, xdp_gen 1/10 (tempo di CPU) · P1: 340 − 117 = 223 · P1.5: 356 − 124 = 232 · P2: 529 − 292 = 237 · P3: 666 − 432 = 234 ns</a:t>
             </a:r>
             <a:endParaRPr lang="en-US" sz="1200"/>
           </a:p>
@@ -33451,7 +33451,7 @@
         </p:nvSpPr>
         <p:spPr bwMode="auto">
           <a:xfrm>
-            <a:off x="797917" y="3355732"/>
+            <a:off x="797917" y="3340767"/>
             <a:ext cx="321866" cy="238720"/>
           </a:xfrm>
           <a:prstGeom prst="rect">
@@ -33482,7 +33482,7 @@
                 <a:ea typeface="Carlito"/>
                 <a:cs typeface="Carlito"/>
               </a:rPr>
-              <a:t>4,62</a:t>
+              <a:t>4,69</a:t>
             </a:r>
             <a:endParaRPr lang="en-US" sz="1200"/>
           </a:p>
@@ -33496,8 +33496,8 @@
         </p:nvSpPr>
         <p:spPr bwMode="auto">
           <a:xfrm>
-            <a:off x="736600" y="3570616"/>
-            <a:ext cx="393700" cy="987668"/>
+            <a:off x="736600" y="3555651"/>
+            <a:ext cx="393700" cy="1002633"/>
           </a:xfrm>
           <a:custGeom>
             <a:avLst/>
@@ -33552,7 +33552,7 @@
         </p:nvSpPr>
         <p:spPr bwMode="auto">
           <a:xfrm>
-            <a:off x="1234347" y="2331720"/>
+            <a:off x="1234347" y="2357374"/>
             <a:ext cx="312539" cy="228600"/>
           </a:xfrm>
           <a:prstGeom prst="rect">
@@ -33583,7 +33583,7 @@
                 <a:ea typeface="Carlito"/>
                 <a:cs typeface="Carlito"/>
               </a:rPr>
-              <a:t>9,41</a:t>
+              <a:t>9,29</a:t>
             </a:r>
             <a:endParaRPr lang="en-US" sz="1150"/>
           </a:p>
@@ -33597,8 +33597,8 @@
         </p:nvSpPr>
         <p:spPr bwMode="auto">
           <a:xfrm>
-            <a:off x="1168400" y="2546604"/>
-            <a:ext cx="393700" cy="2011680"/>
+            <a:off x="1168400" y="2572258"/>
+            <a:ext cx="393700" cy="1986026"/>
           </a:xfrm>
           <a:custGeom>
             <a:avLst/>
@@ -33653,7 +33653,7 @@
         </p:nvSpPr>
         <p:spPr bwMode="auto">
           <a:xfrm>
-            <a:off x="1877417" y="3616545"/>
+            <a:off x="1877417" y="3614407"/>
             <a:ext cx="321866" cy="238720"/>
           </a:xfrm>
           <a:prstGeom prst="rect">
@@ -33684,7 +33684,7 @@
                 <a:ea typeface="Carlito"/>
                 <a:cs typeface="Carlito"/>
               </a:rPr>
-              <a:t>3,40</a:t>
+              <a:t>3,41</a:t>
             </a:r>
             <a:endParaRPr lang="en-US" sz="1200"/>
           </a:p>
@@ -33698,8 +33698,8 @@
         </p:nvSpPr>
         <p:spPr bwMode="auto">
           <a:xfrm>
-            <a:off x="1816100" y="3831429"/>
-            <a:ext cx="393700" cy="726855"/>
+            <a:off x="1816100" y="3829291"/>
+            <a:ext cx="393700" cy="728993"/>
           </a:xfrm>
           <a:custGeom>
             <a:avLst/>
@@ -33855,7 +33855,7 @@
         </p:nvSpPr>
         <p:spPr bwMode="auto">
           <a:xfrm>
-            <a:off x="2956917" y="3699919"/>
+            <a:off x="2956917" y="3702057"/>
             <a:ext cx="321866" cy="238720"/>
           </a:xfrm>
           <a:prstGeom prst="rect">
@@ -33886,7 +33886,7 @@
                 <a:ea typeface="Carlito"/>
                 <a:cs typeface="Carlito"/>
               </a:rPr>
-              <a:t>3,01</a:t>
+              <a:t>3,00</a:t>
             </a:r>
             <a:endParaRPr lang="en-US" sz="1200"/>
           </a:p>
@@ -33900,8 +33900,8 @@
         </p:nvSpPr>
         <p:spPr bwMode="auto">
           <a:xfrm>
-            <a:off x="2895600" y="3914803"/>
-            <a:ext cx="393700" cy="643481"/>
+            <a:off x="2895600" y="3916941"/>
+            <a:ext cx="393700" cy="641343"/>
           </a:xfrm>
           <a:custGeom>
             <a:avLst/>
@@ -33956,7 +33956,7 @@
         </p:nvSpPr>
         <p:spPr bwMode="auto">
           <a:xfrm>
-            <a:off x="3388717" y="3056438"/>
+            <a:off x="3388717" y="3069265"/>
             <a:ext cx="321866" cy="238720"/>
           </a:xfrm>
           <a:prstGeom prst="rect">
@@ -33987,7 +33987,7 @@
                 <a:ea typeface="Carlito"/>
                 <a:cs typeface="Carlito"/>
               </a:rPr>
-              <a:t>6,02</a:t>
+              <a:t>5,96</a:t>
             </a:r>
             <a:endParaRPr lang="en-US" sz="1200"/>
           </a:p>
@@ -34001,8 +34001,8 @@
         </p:nvSpPr>
         <p:spPr bwMode="auto">
           <a:xfrm>
-            <a:off x="3327400" y="3271322"/>
-            <a:ext cx="393700" cy="1286962"/>
+            <a:off x="3327400" y="3284149"/>
+            <a:ext cx="393700" cy="1274135"/>
           </a:xfrm>
           <a:custGeom>
             <a:avLst/>
@@ -34057,7 +34057,7 @@
         </p:nvSpPr>
         <p:spPr bwMode="auto">
           <a:xfrm>
-            <a:off x="4036417" y="3729849"/>
+            <a:off x="4036417" y="3731987"/>
             <a:ext cx="321866" cy="238720"/>
           </a:xfrm>
           <a:prstGeom prst="rect">
@@ -34088,7 +34088,7 @@
                 <a:ea typeface="Carlito"/>
                 <a:cs typeface="Carlito"/>
               </a:rPr>
-              <a:t>2,87</a:t>
+              <a:t>2,86</a:t>
             </a:r>
             <a:endParaRPr lang="en-US" sz="1200"/>
           </a:p>
@@ -34102,8 +34102,8 @@
         </p:nvSpPr>
         <p:spPr bwMode="auto">
           <a:xfrm>
-            <a:off x="3975100" y="3944733"/>
-            <a:ext cx="393700" cy="613551"/>
+            <a:off x="3975100" y="3946871"/>
+            <a:ext cx="393700" cy="611413"/>
           </a:xfrm>
           <a:custGeom>
             <a:avLst/>
@@ -34158,7 +34158,7 @@
         </p:nvSpPr>
         <p:spPr bwMode="auto">
           <a:xfrm>
-            <a:off x="4468217" y="3141951"/>
+            <a:off x="4468217" y="3146226"/>
             <a:ext cx="321866" cy="238720"/>
           </a:xfrm>
           <a:prstGeom prst="rect">
@@ -34189,7 +34189,7 @@
                 <a:ea typeface="Carlito"/>
                 <a:cs typeface="Carlito"/>
               </a:rPr>
-              <a:t>5,62</a:t>
+              <a:t>5,60</a:t>
             </a:r>
             <a:endParaRPr lang="en-US" sz="1200"/>
           </a:p>
@@ -34203,8 +34203,8 @@
         </p:nvSpPr>
         <p:spPr bwMode="auto">
           <a:xfrm>
-            <a:off x="4406900" y="3356835"/>
-            <a:ext cx="393700" cy="1201449"/>
+            <a:off x="4406900" y="3361110"/>
+            <a:ext cx="393700" cy="1197174"/>
           </a:xfrm>
           <a:custGeom>
             <a:avLst/>
@@ -34259,7 +34259,7 @@
         </p:nvSpPr>
         <p:spPr bwMode="auto">
           <a:xfrm>
-            <a:off x="5115917" y="3935079"/>
+            <a:off x="5115917" y="3937216"/>
             <a:ext cx="321866" cy="238720"/>
           </a:xfrm>
           <a:prstGeom prst="rect">
@@ -34290,7 +34290,7 @@
                 <a:ea typeface="Carlito"/>
                 <a:cs typeface="Carlito"/>
               </a:rPr>
-              <a:t>1,91</a:t>
+              <a:t>1,90</a:t>
             </a:r>
             <a:endParaRPr lang="en-US" sz="1200"/>
           </a:p>
@@ -34304,8 +34304,8 @@
         </p:nvSpPr>
         <p:spPr bwMode="auto">
           <a:xfrm>
-            <a:off x="5054600" y="4149963"/>
-            <a:ext cx="393700" cy="408321"/>
+            <a:off x="5054600" y="4152100"/>
+            <a:ext cx="393700" cy="406184"/>
           </a:xfrm>
           <a:custGeom>
             <a:avLst/>
@@ -34360,7 +34360,7 @@
         </p:nvSpPr>
         <p:spPr bwMode="auto">
           <a:xfrm>
-            <a:off x="5547717" y="3533170"/>
+            <a:off x="5547717" y="3556686"/>
             <a:ext cx="321866" cy="238720"/>
           </a:xfrm>
           <a:prstGeom prst="rect">
@@ -34391,7 +34391,7 @@
                 <a:ea typeface="Carlito"/>
                 <a:cs typeface="Carlito"/>
               </a:rPr>
-              <a:t>3,79</a:t>
+              <a:t>3,68</a:t>
             </a:r>
             <a:endParaRPr lang="en-US" sz="1200"/>
           </a:p>
@@ -34405,8 +34405,8 @@
         </p:nvSpPr>
         <p:spPr bwMode="auto">
           <a:xfrm>
-            <a:off x="5486400" y="3748054"/>
-            <a:ext cx="393700" cy="810230"/>
+            <a:off x="5486400" y="3771570"/>
+            <a:ext cx="393700" cy="786714"/>
           </a:xfrm>
           <a:custGeom>
             <a:avLst/>
@@ -34461,7 +34461,7 @@
         </p:nvSpPr>
         <p:spPr bwMode="auto">
           <a:xfrm>
-            <a:off x="6195417" y="4024867"/>
+            <a:off x="6195417" y="4031280"/>
             <a:ext cx="321866" cy="238720"/>
           </a:xfrm>
           <a:prstGeom prst="rect">
@@ -34492,7 +34492,7 @@
                 <a:ea typeface="Carlito"/>
                 <a:cs typeface="Carlito"/>
               </a:rPr>
-              <a:t>1,49</a:t>
+              <a:t>1,46</a:t>
             </a:r>
             <a:endParaRPr lang="en-US" sz="1200"/>
           </a:p>
@@ -34506,8 +34506,8 @@
         </p:nvSpPr>
         <p:spPr bwMode="auto">
           <a:xfrm>
-            <a:off x="6134100" y="4239751"/>
-            <a:ext cx="393700" cy="318533"/>
+            <a:off x="6134100" y="4246164"/>
+            <a:ext cx="393700" cy="312120"/>
           </a:xfrm>
           <a:custGeom>
             <a:avLst/>
@@ -34562,7 +34562,7 @@
         </p:nvSpPr>
         <p:spPr bwMode="auto">
           <a:xfrm>
-            <a:off x="6627217" y="3727711"/>
+            <a:off x="6627217" y="3742676"/>
             <a:ext cx="321866" cy="238720"/>
           </a:xfrm>
           <a:prstGeom prst="rect">
@@ -34593,7 +34593,7 @@
                 <a:ea typeface="Carlito"/>
                 <a:cs typeface="Carlito"/>
               </a:rPr>
-              <a:t>2,88</a:t>
+              <a:t>2,81</a:t>
             </a:r>
             <a:endParaRPr lang="en-US" sz="1200"/>
           </a:p>
@@ -34607,8 +34607,8 @@
         </p:nvSpPr>
         <p:spPr bwMode="auto">
           <a:xfrm>
-            <a:off x="6565900" y="3942595"/>
-            <a:ext cx="393700" cy="615689"/>
+            <a:off x="6565900" y="3957560"/>
+            <a:ext cx="393700" cy="600724"/>
           </a:xfrm>
           <a:custGeom>
             <a:avLst/>
@@ -34964,7 +34964,7 @@
                 <a:ea typeface="Carlito"/>
                 <a:cs typeface="Carlito"/>
               </a:rPr>
-              <a:t>×2,04</a:t>
+              <a:t>×1,98</a:t>
             </a:r>
             <a:endParaRPr lang="en-US" sz="1300"/>
           </a:p>
@@ -35009,7 +35009,7 @@
                 <a:ea typeface="Carlito"/>
                 <a:cs typeface="Carlito"/>
               </a:rPr>
-              <a:t>×1,98</a:t>
+              <a:t>×1,97</a:t>
             </a:r>
             <a:endParaRPr lang="en-US" sz="1300"/>
           </a:p>
@@ -35054,7 +35054,7 @@
                 <a:ea typeface="Carlito"/>
                 <a:cs typeface="Carlito"/>
               </a:rPr>
-              <a:t>×2,00</a:t>
+              <a:t>×1,99</a:t>
             </a:r>
             <a:endParaRPr lang="en-US" sz="1300"/>
           </a:p>
@@ -35144,7 +35144,7 @@
                 <a:ea typeface="Carlito"/>
                 <a:cs typeface="Carlito"/>
               </a:rPr>
-              <a:t>×1,98</a:t>
+              <a:t>×1,94</a:t>
             </a:r>
             <a:endParaRPr lang="en-US" sz="1300"/>
           </a:p>
@@ -35527,7 +35527,7 @@
                 <a:ea typeface="Carlito"/>
                 <a:cs typeface="Carlito"/>
               </a:rPr>
-              <a:t>Con tre thread una coda ne aveva uno solo (~2,8 M/s): rxonly non saturava (×1,64).</a:t>
+              <a:t>Con tre thread una coda ne aveva uno solo (~2,8 M/s): rxonly non saturava (×1,61).</a:t>
             </a:r>
             <a:endParaRPr lang="en-US" sz="1300"/>
           </a:p>
@@ -35932,7 +35932,7 @@
                 <a:ea typeface="Carlito"/>
                 <a:cs typeface="Carlito"/>
               </a:rPr>
-              <a:t>pktgen a 4 thread, 2 per coda · una coda d'uscita per core (CPU 6 e 8) · 64 byte, 3 giri · 1 core: 28/9, 2 core: 1/10</a:t>
+              <a:t>pktgen, 3 thread su 1 core, 4 (2 per coda) su 2 · una coda d'uscita per core · 64 byte, 3 giri, 1 ottobre</a:t>
             </a:r>
             <a:endParaRPr lang="en-US" sz="1200"/>
           </a:p>
@@ -36535,7 +36535,7 @@
                 <a:ea typeface="Carlito"/>
                 <a:cs typeface="Carlito"/>
               </a:rPr>
-              <a:t>pktgen confronta tutte le pipeline, da 3,31 a 1,50 M/s. xdp_gen, un thread per coda, misura P1–P3 senza la copia: 116–428 ns.</a:t>
+              <a:t>pktgen confronta tutte le pipeline, da 3,31 a 1,50 M/s. xdp_gen, un thread per coda, misura P1–P3 senza la copia: 117–432 ns.</a:t>
             </a:r>
             <a:endParaRPr lang="en-US" sz="1450"/>
           </a:p>

--- a/docs/Test reale su dual boot.pptx
+++ b/docs/Test reale su dual boot.pptx
@@ -15756,7 +15756,7 @@
                 <a:ea typeface="Carlito"/>
                 <a:cs typeface="Carlito"/>
               </a:rPr>
-              <a:t>5 · LA DOMANDA DEL RELATORE · COME SI MISURA</a:t>
+              <a:t>5 · LA DOMANDA · COME SI MISURA</a:t>
             </a:r>
             <a:endParaRPr lang="en-US" sz="1200"/>
           </a:p>
@@ -17931,7 +17931,7 @@
                 <a:ea typeface="Carlito"/>
                 <a:cs typeface="Carlito"/>
               </a:rPr>
-              <a:t>5 · LA DOMANDA DEL RELATORE · COME SI LEGGE</a:t>
+              <a:t>5 · LA DOMANDA · COME SI LEGGE</a:t>
             </a:r>
             <a:endParaRPr lang="en-US" sz="1200"/>
           </a:p>
@@ -19264,7 +19264,7 @@
                 <a:ea typeface="Carlito"/>
                 <a:cs typeface="Carlito"/>
               </a:rPr>
-              <a:t>5 · LA DOMANDA DEL RELATORE · PACCHETTI INOLTRATI</a:t>
+              <a:t>5 · LA DOMANDA · PACCHETTI INOLTRATI</a:t>
             </a:r>
             <a:endParaRPr lang="en-US" sz="1200"/>
           </a:p>
@@ -22078,7 +22078,7 @@
                 <a:ea typeface="Carlito"/>
                 <a:cs typeface="Carlito"/>
               </a:rPr>
-              <a:t>5 · LA DOMANDA DEL RELATORE · RICEVUTI E INOLTRATI</a:t>
+              <a:t>5 · LA DOMANDA · RICEVUTI E INOLTRATI</a:t>
             </a:r>
             <a:endParaRPr lang="en-US" sz="1200"/>
           </a:p>
@@ -24004,7 +24004,7 @@
                 <a:ea typeface="Carlito"/>
                 <a:cs typeface="Carlito"/>
               </a:rPr>
-              <a:t>LA DOMANDA DEL RELATORE</a:t>
+              <a:t>LA DOMANDA</a:t>
             </a:r>
             <a:endParaRPr lang="en-US" sz="1200"/>
           </a:p>
@@ -25686,7 +25686,7 @@
                 <a:ea typeface="Carlito"/>
                 <a:cs typeface="Carlito"/>
               </a:rPr>
-              <a:t>5 · LA DOMANDA DEL RELATORE · LA PERDITA</a:t>
+              <a:t>5 · LA DOMANDA · LA PERDITA</a:t>
             </a:r>
             <a:endParaRPr lang="en-US" sz="1200"/>
           </a:p>
@@ -28007,7 +28007,7 @@
                 <a:ea typeface="Carlito"/>
                 <a:cs typeface="Carlito"/>
               </a:rPr>
-              <a:t>5 · LA DOMANDA DEL RELATORE · IL PROGRAMMA O LA RICEZIONE?</a:t>
+              <a:t>5 · LA DOMANDA · IL PROGRAMMA O LA RICEZIONE?</a:t>
             </a:r>
             <a:endParaRPr lang="en-US" sz="1200"/>
           </a:p>
@@ -30713,7 +30713,7 @@
                 <a:ea typeface="Carlito"/>
                 <a:cs typeface="Carlito"/>
               </a:rPr>
-              <a:t>5 · LA DOMANDA DEL RELATORE · IL RITARDO</a:t>
+              <a:t>5 · LA DOMANDA · IL RITARDO</a:t>
             </a:r>
             <a:endParaRPr lang="en-US" sz="1200"/>
           </a:p>
@@ -33161,7 +33161,7 @@
                 <a:ea typeface="Carlito"/>
                 <a:cs typeface="Carlito"/>
               </a:rPr>
-              <a:t>5 · LA DOMANDA DEL RELATORE · PIÙ CORE</a:t>
+              <a:t>5 · LA DOMANDA · PIÙ CORE</a:t>
             </a:r>
             <a:endParaRPr lang="en-US" sz="1200"/>
           </a:p>

--- a/docs/Test reale su dual boot.pptx
+++ b/docs/Test reale su dual boot.pptx
@@ -17,9 +17,9 @@
     <p:sldId id="262" r:id="rId10"/>
     <p:sldId id="263" r:id="rId11"/>
     <p:sldId id="265" r:id="rId13"/>
-    <p:sldId id="270" r:id="rId18"/>
     <p:sldId id="267" r:id="rId15"/>
     <p:sldId id="269" r:id="rId17"/>
+    <p:sldId id="281" r:id="rId26"/>
     <p:sldId id="271" r:id="rId19"/>
     <p:sldId id="272" r:id="rId20"/>
     <p:sldId id="280" r:id="rId32"/>
@@ -573,91 +573,6 @@
             <a:fld id="{F7021451-1387-4CA6-816F-3879F97B5CBC}" type="slidenum">
               <a:rPr lang="en-US"/>
               <a:t>14</a:t>
-            </a:fld>
-            <a:endParaRPr lang="en-US"/>
-          </a:p>
-        </p:txBody>
-      </p:sp>
-    </p:spTree>
-  </p:cSld>
-  <p:clrMapOvr>
-    <a:masterClrMapping/>
-  </p:clrMapOvr>
-</p:notes>
-</file>
-
-<file path=ppt/notesSlides/notesSlide15.xml><?xml version="1.0" encoding="utf-8"?>
-<p:notes xmlns:a="http://schemas.openxmlformats.org/drawingml/2006/main" xmlns:r="http://schemas.openxmlformats.org/officeDocument/2006/relationships" xmlns:p="http://schemas.openxmlformats.org/presentationml/2006/main" xmlns:m="http://schemas.openxmlformats.org/officeDocument/2006/math" xmlns:w="http://schemas.openxmlformats.org/wordprocessingml/2006/main">
-  <p:cSld name="">
-    <p:spTree>
-      <p:nvGrpSpPr>
-        <p:cNvPr id="1" name=""/>
-        <p:cNvGrpSpPr/>
-        <p:nvPr/>
-      </p:nvGrpSpPr>
-      <p:grpSpPr bwMode="auto">
-        <a:xfrm>
-          <a:off x="0" y="0"/>
-          <a:ext cx="0" cy="0"/>
-          <a:chOff x="0" y="0"/>
-          <a:chExt cx="0" cy="0"/>
-        </a:xfrm>
-      </p:grpSpPr>
-      <p:sp>
-        <p:nvSpPr>
-          <p:cNvPr id="1734017709" name="Slide Image Placeholder 1"/>
-          <p:cNvSpPr>
-            <a:spLocks noChangeAspect="1" noGrp="1" noRot="1"/>
-          </p:cNvSpPr>
-          <p:nvPr>
-            <p:ph type="sldImg"/>
-          </p:nvPr>
-        </p:nvSpPr>
-        <p:spPr bwMode="auto"/>
-      </p:sp>
-      <p:sp>
-        <p:nvSpPr>
-          <p:cNvPr id="1849787392" name="Notes Placeholder 2"/>
-          <p:cNvSpPr>
-            <a:spLocks noGrp="1"/>
-          </p:cNvSpPr>
-          <p:nvPr>
-            <p:ph type="body" idx="1"/>
-          </p:nvPr>
-        </p:nvSpPr>
-        <p:spPr bwMode="auto"/>
-        <p:txBody>
-          <a:bodyPr/>
-          <a:lstStyle/>
-          <a:p>
-            <a:pPr>
-              <a:defRPr/>
-            </a:pPr>
-            <a:endParaRPr lang="en-US"/>
-          </a:p>
-        </p:txBody>
-      </p:sp>
-      <p:sp>
-        <p:nvSpPr>
-          <p:cNvPr id="868360974" name="Slide Number Placeholder 3"/>
-          <p:cNvSpPr>
-            <a:spLocks noGrp="1"/>
-          </p:cNvSpPr>
-          <p:nvPr>
-            <p:ph type="sldNum" sz="quarter" idx="10"/>
-          </p:nvPr>
-        </p:nvSpPr>
-        <p:spPr bwMode="auto"/>
-        <p:txBody>
-          <a:bodyPr/>
-          <a:lstStyle/>
-          <a:p>
-            <a:pPr>
-              <a:defRPr/>
-            </a:pPr>
-            <a:fld id="{F7021451-1387-4CA6-816F-3879F97B5CBC}" type="slidenum">
-              <a:rPr lang="en-US"/>
-              <a:t>15</a:t>
             </a:fld>
             <a:endParaRPr lang="en-US"/>
           </a:p>
@@ -2521,2270 +2436,6 @@
 
 <file path=ppt/slides/slide10.xml><?xml version="1.0" encoding="utf-8"?>
 <p:sld xmlns:a="http://schemas.openxmlformats.org/drawingml/2006/main" xmlns:r="http://schemas.openxmlformats.org/officeDocument/2006/relationships" xmlns:p="http://schemas.openxmlformats.org/presentationml/2006/main" xmlns:m="http://schemas.openxmlformats.org/officeDocument/2006/math" xmlns:w="http://schemas.openxmlformats.org/wordprocessingml/2006/main" xmlns:mc="http://schemas.openxmlformats.org/markup-compatibility/2006" showMasterPhAnim="0" showMasterSp="1" show="1">
-  <p:cSld name="Slide 15">
-    <p:bg>
-      <p:bgPr shadeToTitle="0">
-        <a:solidFill>
-          <a:srgbClr val="FFFFFF"/>
-        </a:solidFill>
-      </p:bgPr>
-    </p:bg>
-    <p:spTree>
-      <p:nvGrpSpPr>
-        <p:cNvPr id="1" name=""/>
-        <p:cNvGrpSpPr/>
-        <p:nvPr/>
-      </p:nvGrpSpPr>
-      <p:grpSpPr bwMode="auto">
-        <a:xfrm>
-          <a:off x="0" y="0"/>
-          <a:ext cx="0" cy="0"/>
-          <a:chOff x="0" y="0"/>
-          <a:chExt cx="0" cy="0"/>
-        </a:xfrm>
-      </p:grpSpPr>
-      <p:sp>
-        <p:nvSpPr>
-          <p:cNvPr id="230262287" name="Shape 0"/>
-          <p:cNvSpPr/>
-          <p:nvPr/>
-        </p:nvSpPr>
-        <p:spPr bwMode="auto">
-          <a:xfrm>
-            <a:off x="0" y="0"/>
-            <a:ext cx="12192000" cy="107949"/>
-          </a:xfrm>
-          <a:prstGeom prst="rect">
-            <a:avLst/>
-          </a:prstGeom>
-          <a:solidFill>
-            <a:srgbClr val="1F3A5F"/>
-          </a:solidFill>
-          <a:ln/>
-        </p:spPr>
-        <p:txBody>
-          <a:bodyPr/>
-          <a:lstStyle/>
-          <a:p>
-            <a:pPr>
-              <a:defRPr/>
-            </a:pPr>
-            <a:endParaRPr lang="it-IT"/>
-          </a:p>
-        </p:txBody>
-      </p:sp>
-      <p:sp>
-        <p:nvSpPr>
-          <p:cNvPr id="2072346178" name="Text 1"/>
-          <p:cNvSpPr/>
-          <p:nvPr/>
-        </p:nvSpPr>
-        <p:spPr bwMode="auto">
-          <a:xfrm>
-            <a:off x="546100" y="330200"/>
-            <a:ext cx="11432794" cy="238720"/>
-          </a:xfrm>
-          <a:prstGeom prst="rect">
-            <a:avLst/>
-          </a:prstGeom>
-          <a:noFill/>
-          <a:ln/>
-        </p:spPr>
-        <p:txBody>
-          <a:bodyPr wrap="square" lIns="0" tIns="0" rIns="0" bIns="0" rtlCol="0" anchor="t">
-            <a:normAutofit/>
-          </a:bodyPr>
-          <a:lstStyle/>
-          <a:p>
-            <a:pPr marL="0" indent="0" algn="l">
-              <a:lnSpc>
-                <a:spcPts val="1680"/>
-              </a:lnSpc>
-              <a:buNone/>
-              <a:defRPr/>
-            </a:pPr>
-            <a:r>
-              <a:rPr lang="en-US" sz="1200" b="1" spc="100">
-                <a:solidFill>
-                  <a:srgbClr val="E07A2D"/>
-                </a:solidFill>
-                <a:latin typeface="Carlito"/>
-                <a:ea typeface="Carlito"/>
-                <a:cs typeface="Carlito"/>
-              </a:rPr>
-              <a:t>3 · IL GENERATORE · L'ALTERNATIVA</a:t>
-            </a:r>
-            <a:endParaRPr lang="en-US" sz="1200"/>
-          </a:p>
-        </p:txBody>
-      </p:sp>
-      <p:sp>
-        <p:nvSpPr>
-          <p:cNvPr id="1018439312" name="Text 2"/>
-          <p:cNvSpPr/>
-          <p:nvPr/>
-        </p:nvSpPr>
-        <p:spPr bwMode="auto">
-          <a:xfrm>
-            <a:off x="546100" y="584200"/>
-            <a:ext cx="11432794" cy="444500"/>
-          </a:xfrm>
-          <a:prstGeom prst="rect">
-            <a:avLst/>
-          </a:prstGeom>
-          <a:noFill/>
-          <a:ln/>
-        </p:spPr>
-        <p:txBody>
-          <a:bodyPr wrap="square" lIns="0" tIns="0" rIns="0" bIns="0" rtlCol="0" anchor="t">
-            <a:normAutofit/>
-          </a:bodyPr>
-          <a:lstStyle/>
-          <a:p>
-            <a:pPr marL="0" indent="0" algn="l">
-              <a:lnSpc>
-                <a:spcPts val="3300"/>
-              </a:lnSpc>
-              <a:buNone/>
-              <a:defRPr/>
-            </a:pPr>
-            <a:r>
-              <a:rPr lang="en-US" sz="3000" b="1">
-                <a:solidFill>
-                  <a:srgbClr val="1F3A5F"/>
-                </a:solidFill>
-                <a:latin typeface="Carlito"/>
-                <a:ea typeface="Carlito"/>
-                <a:cs typeface="Carlito"/>
-              </a:rPr>
-              <a:t>L'alternativa, pktgen, costa 225–250 ns in più</a:t>
-            </a:r>
-            <a:endParaRPr lang="en-US" sz="3000"/>
-          </a:p>
-        </p:txBody>
-      </p:sp>
-      <p:sp>
-        <p:nvSpPr>
-          <p:cNvPr id="1550892152" name="Shape 3"/>
-          <p:cNvSpPr/>
-          <p:nvPr/>
-        </p:nvSpPr>
-        <p:spPr bwMode="auto">
-          <a:xfrm>
-            <a:off x="546100" y="1562100"/>
-            <a:ext cx="6540500" cy="3477220"/>
-          </a:xfrm>
-          <a:prstGeom prst="roundRect">
-            <a:avLst>
-              <a:gd name="adj" fmla="val 3652"/>
-            </a:avLst>
-          </a:prstGeom>
-          <a:solidFill>
-            <a:srgbClr val="F3F5F8"/>
-          </a:solidFill>
-          <a:ln/>
-        </p:spPr>
-        <p:txBody>
-          <a:bodyPr/>
-          <a:lstStyle/>
-          <a:p>
-            <a:pPr>
-              <a:defRPr/>
-            </a:pPr>
-            <a:endParaRPr lang="it-IT"/>
-          </a:p>
-        </p:txBody>
-      </p:sp>
-      <p:sp>
-        <p:nvSpPr>
-          <p:cNvPr id="1012120802" name="Text 4"/>
-          <p:cNvSpPr/>
-          <p:nvPr/>
-        </p:nvSpPr>
-        <p:spPr bwMode="auto">
-          <a:xfrm>
-            <a:off x="736600" y="1714500"/>
-            <a:ext cx="6344285" cy="292100"/>
-          </a:xfrm>
-          <a:prstGeom prst="rect">
-            <a:avLst/>
-          </a:prstGeom>
-          <a:noFill/>
-          <a:ln/>
-        </p:spPr>
-        <p:txBody>
-          <a:bodyPr wrap="square" lIns="0" tIns="0" rIns="0" bIns="0" rtlCol="0" anchor="t">
-            <a:normAutofit/>
-          </a:bodyPr>
-          <a:lstStyle/>
-          <a:p>
-            <a:pPr marL="0" indent="0" algn="l">
-              <a:lnSpc>
-                <a:spcPts val="2100"/>
-              </a:lnSpc>
-              <a:buNone/>
-              <a:defRPr/>
-            </a:pPr>
-            <a:r>
-              <a:rPr lang="en-US" sz="1500" b="1">
-                <a:solidFill>
-                  <a:srgbClr val="1F3A5F"/>
-                </a:solidFill>
-                <a:latin typeface="Carlito"/>
-                <a:ea typeface="Carlito"/>
-                <a:cs typeface="Carlito"/>
-              </a:rPr>
-              <a:t>Nanosecondi per pacchetto, stesso programma</a:t>
-            </a:r>
-            <a:endParaRPr lang="en-US" sz="1500"/>
-          </a:p>
-        </p:txBody>
-      </p:sp>
-      <p:sp>
-        <p:nvSpPr>
-          <p:cNvPr id="1869677495" name="Shape 5"/>
-          <p:cNvSpPr/>
-          <p:nvPr/>
-        </p:nvSpPr>
-        <p:spPr bwMode="auto">
-          <a:xfrm>
-            <a:off x="736600" y="2075129"/>
-            <a:ext cx="152400" cy="152400"/>
-          </a:xfrm>
-          <a:prstGeom prst="roundRect">
-            <a:avLst>
-              <a:gd name="adj" fmla="val 25000"/>
-            </a:avLst>
-          </a:prstGeom>
-          <a:solidFill>
-            <a:srgbClr val="E07A2D"/>
-          </a:solidFill>
-          <a:ln/>
-        </p:spPr>
-        <p:txBody>
-          <a:bodyPr/>
-          <a:lstStyle/>
-          <a:p>
-            <a:pPr>
-              <a:defRPr/>
-            </a:pPr>
-            <a:endParaRPr lang="it-IT"/>
-          </a:p>
-        </p:txBody>
-      </p:sp>
-      <p:sp>
-        <p:nvSpPr>
-          <p:cNvPr id="993226184" name="Text 6"/>
-          <p:cNvSpPr/>
-          <p:nvPr/>
-        </p:nvSpPr>
-        <p:spPr bwMode="auto">
-          <a:xfrm>
-            <a:off x="952500" y="2044700"/>
-            <a:ext cx="1193403" cy="238720"/>
-          </a:xfrm>
-          <a:prstGeom prst="rect">
-            <a:avLst/>
-          </a:prstGeom>
-          <a:noFill/>
-          <a:ln/>
-        </p:spPr>
-        <p:txBody>
-          <a:bodyPr wrap="square" lIns="0" tIns="0" rIns="0" bIns="0" rtlCol="0" anchor="t">
-            <a:normAutofit/>
-          </a:bodyPr>
-          <a:lstStyle/>
-          <a:p>
-            <a:pPr marL="0" indent="0" algn="l">
-              <a:lnSpc>
-                <a:spcPts val="1680"/>
-              </a:lnSpc>
-              <a:buNone/>
-              <a:defRPr/>
-            </a:pPr>
-            <a:r>
-              <a:rPr lang="en-US" sz="1200">
-                <a:solidFill>
-                  <a:srgbClr val="222B36"/>
-                </a:solidFill>
-                <a:latin typeface="Carlito"/>
-                <a:ea typeface="Carlito"/>
-                <a:cs typeface="Carlito"/>
-              </a:rPr>
-              <a:t>pktgen (con copia)</a:t>
-            </a:r>
-            <a:endParaRPr lang="en-US" sz="1200"/>
-          </a:p>
-        </p:txBody>
-      </p:sp>
-      <p:sp>
-        <p:nvSpPr>
-          <p:cNvPr id="2037176914" name="Shape 7"/>
-          <p:cNvSpPr/>
-          <p:nvPr/>
-        </p:nvSpPr>
-        <p:spPr bwMode="auto">
-          <a:xfrm>
-            <a:off x="2272903" y="2075129"/>
-            <a:ext cx="152400" cy="152400"/>
-          </a:xfrm>
-          <a:prstGeom prst="roundRect">
-            <a:avLst>
-              <a:gd name="adj" fmla="val 25000"/>
-            </a:avLst>
-          </a:prstGeom>
-          <a:solidFill>
-            <a:srgbClr val="2E9C6E"/>
-          </a:solidFill>
-          <a:ln/>
-        </p:spPr>
-        <p:txBody>
-          <a:bodyPr/>
-          <a:lstStyle/>
-          <a:p>
-            <a:pPr>
-              <a:defRPr/>
-            </a:pPr>
-            <a:endParaRPr lang="it-IT"/>
-          </a:p>
-        </p:txBody>
-      </p:sp>
-      <p:sp>
-        <p:nvSpPr>
-          <p:cNvPr id="517724669" name="Text 8"/>
-          <p:cNvSpPr/>
-          <p:nvPr/>
-        </p:nvSpPr>
-        <p:spPr bwMode="auto">
-          <a:xfrm>
-            <a:off x="2488803" y="2044700"/>
-            <a:ext cx="1415058" cy="238720"/>
-          </a:xfrm>
-          <a:prstGeom prst="rect">
-            <a:avLst/>
-          </a:prstGeom>
-          <a:noFill/>
-          <a:ln/>
-        </p:spPr>
-        <p:txBody>
-          <a:bodyPr wrap="square" lIns="0" tIns="0" rIns="0" bIns="0" rtlCol="0" anchor="t">
-            <a:normAutofit/>
-          </a:bodyPr>
-          <a:lstStyle/>
-          <a:p>
-            <a:pPr marL="0" indent="0" algn="l">
-              <a:lnSpc>
-                <a:spcPts val="1680"/>
-              </a:lnSpc>
-              <a:buNone/>
-              <a:defRPr/>
-            </a:pPr>
-            <a:r>
-              <a:rPr lang="en-US" sz="1200">
-                <a:solidFill>
-                  <a:srgbClr val="222B36"/>
-                </a:solidFill>
-                <a:latin typeface="Carlito"/>
-                <a:ea typeface="Carlito"/>
-                <a:cs typeface="Carlito"/>
-              </a:rPr>
-              <a:t>xdp_gen (senza copia)</a:t>
-            </a:r>
-            <a:endParaRPr lang="en-US" sz="1200"/>
-          </a:p>
-        </p:txBody>
-      </p:sp>
-      <p:sp>
-        <p:nvSpPr>
-          <p:cNvPr id="1274116744" name="Text 9"/>
-          <p:cNvSpPr/>
-          <p:nvPr/>
-        </p:nvSpPr>
-        <p:spPr bwMode="auto">
-          <a:xfrm>
-            <a:off x="736600" y="2466318"/>
-            <a:ext cx="876299" cy="256514"/>
-          </a:xfrm>
-          <a:prstGeom prst="rect">
-            <a:avLst/>
-          </a:prstGeom>
-          <a:noFill/>
-          <a:ln/>
-        </p:spPr>
-        <p:txBody>
-          <a:bodyPr wrap="square" lIns="0" tIns="0" rIns="0" bIns="0" rtlCol="0" anchor="t">
-            <a:normAutofit/>
-          </a:bodyPr>
-          <a:lstStyle/>
-          <a:p>
-            <a:pPr marL="0" indent="0" algn="l">
-              <a:lnSpc>
-                <a:spcPts val="1820"/>
-              </a:lnSpc>
-              <a:buNone/>
-              <a:defRPr/>
-            </a:pPr>
-            <a:r>
-              <a:rPr lang="en-US" sz="1300" b="1">
-                <a:solidFill>
-                  <a:srgbClr val="1F3A5F"/>
-                </a:solidFill>
-                <a:latin typeface="Carlito"/>
-                <a:ea typeface="Carlito"/>
-                <a:cs typeface="Carlito"/>
-              </a:rPr>
-              <a:t>baseline</a:t>
-            </a:r>
-            <a:endParaRPr lang="en-US" sz="1300"/>
-          </a:p>
-        </p:txBody>
-      </p:sp>
-      <p:sp>
-        <p:nvSpPr>
-          <p:cNvPr id="1359008047" name="Shape 10"/>
-          <p:cNvSpPr/>
-          <p:nvPr/>
-        </p:nvSpPr>
-        <p:spPr bwMode="auto">
-          <a:xfrm>
-            <a:off x="1689100" y="2359620"/>
-            <a:ext cx="1752599" cy="203200"/>
-          </a:xfrm>
-          <a:prstGeom prst="roundRect">
-            <a:avLst>
-              <a:gd name="adj" fmla="val 18750"/>
-            </a:avLst>
-          </a:prstGeom>
-          <a:solidFill>
-            <a:srgbClr val="E07A2D"/>
-          </a:solidFill>
-          <a:ln/>
-        </p:spPr>
-        <p:txBody>
-          <a:bodyPr/>
-          <a:lstStyle/>
-          <a:p>
-            <a:pPr>
-              <a:defRPr/>
-            </a:pPr>
-            <a:endParaRPr lang="it-IT"/>
-          </a:p>
-        </p:txBody>
-      </p:sp>
-      <p:sp>
-        <p:nvSpPr>
-          <p:cNvPr id="1977606422" name="Text 11"/>
-          <p:cNvSpPr/>
-          <p:nvPr/>
-        </p:nvSpPr>
-        <p:spPr bwMode="auto">
-          <a:xfrm>
-            <a:off x="3517900" y="2365970"/>
-            <a:ext cx="939800" cy="256514"/>
-          </a:xfrm>
-          <a:prstGeom prst="rect">
-            <a:avLst/>
-          </a:prstGeom>
-          <a:noFill/>
-          <a:ln/>
-        </p:spPr>
-        <p:txBody>
-          <a:bodyPr wrap="square" lIns="0" tIns="0" rIns="0" bIns="0" rtlCol="0" anchor="t">
-            <a:normAutofit/>
-          </a:bodyPr>
-          <a:lstStyle/>
-          <a:p>
-            <a:pPr marL="0" indent="0" algn="l">
-              <a:lnSpc>
-                <a:spcPts val="1820"/>
-              </a:lnSpc>
-              <a:buNone/>
-              <a:defRPr/>
-            </a:pPr>
-            <a:r>
-              <a:rPr lang="en-US" sz="1300" b="1">
-                <a:solidFill>
-                  <a:srgbClr val="222B36"/>
-                </a:solidFill>
-                <a:latin typeface="Carlito"/>
-                <a:ea typeface="Carlito"/>
-                <a:cs typeface="Carlito"/>
-              </a:rPr>
-              <a:t>302 ns</a:t>
-            </a:r>
-            <a:endParaRPr lang="en-US" sz="1300"/>
-          </a:p>
-        </p:txBody>
-      </p:sp>
-      <p:sp>
-        <p:nvSpPr>
-          <p:cNvPr id="874054731" name="Shape 12"/>
-          <p:cNvSpPr/>
-          <p:nvPr/>
-        </p:nvSpPr>
-        <p:spPr bwMode="auto">
-          <a:xfrm>
-            <a:off x="1689100" y="2600920"/>
-            <a:ext cx="383692" cy="203200"/>
-          </a:xfrm>
-          <a:prstGeom prst="roundRect">
-            <a:avLst>
-              <a:gd name="adj" fmla="val 18750"/>
-            </a:avLst>
-          </a:prstGeom>
-          <a:solidFill>
-            <a:srgbClr val="2E9C6E"/>
-          </a:solidFill>
-          <a:ln/>
-        </p:spPr>
-        <p:txBody>
-          <a:bodyPr/>
-          <a:lstStyle/>
-          <a:p>
-            <a:pPr>
-              <a:defRPr/>
-            </a:pPr>
-            <a:endParaRPr lang="it-IT"/>
-          </a:p>
-        </p:txBody>
-      </p:sp>
-      <p:sp>
-        <p:nvSpPr>
-          <p:cNvPr id="1034871553" name="Text 13"/>
-          <p:cNvSpPr/>
-          <p:nvPr/>
-        </p:nvSpPr>
-        <p:spPr bwMode="auto">
-          <a:xfrm>
-            <a:off x="2151226" y="2607270"/>
-            <a:ext cx="1700784" cy="256514"/>
-          </a:xfrm>
-          <a:prstGeom prst="rect">
-            <a:avLst/>
-          </a:prstGeom>
-          <a:noFill/>
-          <a:ln/>
-        </p:spPr>
-        <p:txBody>
-          <a:bodyPr wrap="square" lIns="0" tIns="0" rIns="0" bIns="0" rtlCol="0" anchor="t">
-            <a:normAutofit/>
-          </a:bodyPr>
-          <a:lstStyle/>
-          <a:p>
-            <a:pPr marL="0" indent="0" algn="l">
-              <a:lnSpc>
-                <a:spcPts val="1820"/>
-              </a:lnSpc>
-              <a:buNone/>
-              <a:defRPr/>
-            </a:pPr>
-            <a:r>
-              <a:rPr lang="en-US" sz="1300" b="1">
-                <a:solidFill>
-                  <a:srgbClr val="222B36"/>
-                </a:solidFill>
-                <a:latin typeface="Carlito"/>
-                <a:ea typeface="Carlito"/>
-                <a:cs typeface="Carlito"/>
-              </a:rPr>
-              <a:t>66 ns   −236 ns</a:t>
-            </a:r>
-            <a:endParaRPr lang="en-US" sz="1300"/>
-          </a:p>
-        </p:txBody>
-      </p:sp>
-      <p:sp>
-        <p:nvSpPr>
-          <p:cNvPr id="854225757" name="Text 14"/>
-          <p:cNvSpPr/>
-          <p:nvPr/>
-        </p:nvSpPr>
-        <p:spPr bwMode="auto">
-          <a:xfrm>
-            <a:off x="736600" y="2987018"/>
-            <a:ext cx="876299" cy="256514"/>
-          </a:xfrm>
-          <a:prstGeom prst="rect">
-            <a:avLst/>
-          </a:prstGeom>
-          <a:noFill/>
-          <a:ln/>
-        </p:spPr>
-        <p:txBody>
-          <a:bodyPr wrap="square" lIns="0" tIns="0" rIns="0" bIns="0" rtlCol="0" anchor="t">
-            <a:normAutofit/>
-          </a:bodyPr>
-          <a:lstStyle/>
-          <a:p>
-            <a:pPr marL="0" indent="0" algn="l">
-              <a:lnSpc>
-                <a:spcPts val="1820"/>
-              </a:lnSpc>
-              <a:buNone/>
-              <a:defRPr/>
-            </a:pPr>
-            <a:r>
-              <a:rPr lang="en-US" sz="1300" b="1">
-                <a:solidFill>
-                  <a:srgbClr val="1F3A5F"/>
-                </a:solidFill>
-                <a:latin typeface="Carlito"/>
-                <a:ea typeface="Carlito"/>
-                <a:cs typeface="Carlito"/>
-              </a:rPr>
-              <a:t>P1</a:t>
-            </a:r>
-            <a:endParaRPr lang="en-US" sz="1300"/>
-          </a:p>
-        </p:txBody>
-      </p:sp>
-      <p:sp>
-        <p:nvSpPr>
-          <p:cNvPr id="106711211" name="Shape 15"/>
-          <p:cNvSpPr/>
-          <p:nvPr/>
-        </p:nvSpPr>
-        <p:spPr bwMode="auto">
-          <a:xfrm>
-            <a:off x="1689100" y="2880320"/>
-            <a:ext cx="1974850" cy="203200"/>
-          </a:xfrm>
-          <a:prstGeom prst="roundRect">
-            <a:avLst>
-              <a:gd name="adj" fmla="val 18750"/>
-            </a:avLst>
-          </a:prstGeom>
-          <a:solidFill>
-            <a:srgbClr val="E07A2D"/>
-          </a:solidFill>
-          <a:ln/>
-        </p:spPr>
-        <p:txBody>
-          <a:bodyPr/>
-          <a:lstStyle/>
-          <a:p>
-            <a:pPr>
-              <a:defRPr/>
-            </a:pPr>
-            <a:endParaRPr lang="it-IT"/>
-          </a:p>
-        </p:txBody>
-      </p:sp>
-      <p:sp>
-        <p:nvSpPr>
-          <p:cNvPr id="680770838" name="Text 16"/>
-          <p:cNvSpPr/>
-          <p:nvPr/>
-        </p:nvSpPr>
-        <p:spPr bwMode="auto">
-          <a:xfrm>
-            <a:off x="3740149" y="2886670"/>
-            <a:ext cx="939800" cy="256514"/>
-          </a:xfrm>
-          <a:prstGeom prst="rect">
-            <a:avLst/>
-          </a:prstGeom>
-          <a:noFill/>
-          <a:ln/>
-        </p:spPr>
-        <p:txBody>
-          <a:bodyPr wrap="square" lIns="0" tIns="0" rIns="0" bIns="0" rtlCol="0" anchor="t">
-            <a:normAutofit/>
-          </a:bodyPr>
-          <a:lstStyle/>
-          <a:p>
-            <a:pPr marL="0" indent="0" algn="l">
-              <a:lnSpc>
-                <a:spcPts val="1820"/>
-              </a:lnSpc>
-              <a:buNone/>
-              <a:defRPr/>
-            </a:pPr>
-            <a:r>
-              <a:rPr lang="en-US" sz="1300" b="1">
-                <a:solidFill>
-                  <a:srgbClr val="222B36"/>
-                </a:solidFill>
-                <a:latin typeface="Carlito"/>
-                <a:ea typeface="Carlito"/>
-                <a:cs typeface="Carlito"/>
-              </a:rPr>
-              <a:t>340 ns</a:t>
-            </a:r>
-            <a:endParaRPr lang="en-US" sz="1300"/>
-          </a:p>
-        </p:txBody>
-      </p:sp>
-      <p:sp>
-        <p:nvSpPr>
-          <p:cNvPr id="482346709" name="Shape 17"/>
-          <p:cNvSpPr/>
-          <p:nvPr/>
-        </p:nvSpPr>
-        <p:spPr bwMode="auto">
-          <a:xfrm>
-            <a:off x="1689100" y="3121620"/>
-            <a:ext cx="668123" cy="203200"/>
-          </a:xfrm>
-          <a:prstGeom prst="roundRect">
-            <a:avLst>
-              <a:gd name="adj" fmla="val 18750"/>
-            </a:avLst>
-          </a:prstGeom>
-          <a:solidFill>
-            <a:srgbClr val="2E9C6E"/>
-          </a:solidFill>
-          <a:ln/>
-        </p:spPr>
-        <p:txBody>
-          <a:bodyPr/>
-          <a:lstStyle/>
-          <a:p>
-            <a:pPr>
-              <a:defRPr/>
-            </a:pPr>
-            <a:endParaRPr lang="it-IT"/>
-          </a:p>
-        </p:txBody>
-      </p:sp>
-      <p:sp>
-        <p:nvSpPr>
-          <p:cNvPr id="1646932008" name="Text 18"/>
-          <p:cNvSpPr/>
-          <p:nvPr/>
-        </p:nvSpPr>
-        <p:spPr bwMode="auto">
-          <a:xfrm>
-            <a:off x="2435657" y="3127970"/>
-            <a:ext cx="1700000" cy="256514"/>
-          </a:xfrm>
-          <a:prstGeom prst="rect">
-            <a:avLst/>
-          </a:prstGeom>
-          <a:noFill/>
-          <a:ln/>
-        </p:spPr>
-        <p:txBody>
-          <a:bodyPr wrap="square" lIns="0" tIns="0" rIns="0" bIns="0" rtlCol="0" anchor="t">
-            <a:normAutofit/>
-          </a:bodyPr>
-          <a:lstStyle/>
-          <a:p>
-            <a:pPr marL="0" indent="0" algn="l">
-              <a:lnSpc>
-                <a:spcPts val="1820"/>
-              </a:lnSpc>
-              <a:buNone/>
-              <a:defRPr/>
-            </a:pPr>
-            <a:r>
-              <a:rPr lang="en-US" sz="1300" b="1">
-                <a:solidFill>
-                  <a:srgbClr val="222B36"/>
-                </a:solidFill>
-                <a:latin typeface="Carlito"/>
-                <a:ea typeface="Carlito"/>
-                <a:cs typeface="Carlito"/>
-              </a:rPr>
-              <a:t>115 ns   −225 ns</a:t>
-            </a:r>
-            <a:endParaRPr lang="en-US" sz="1300"/>
-          </a:p>
-        </p:txBody>
-      </p:sp>
-      <p:sp>
-        <p:nvSpPr>
-          <p:cNvPr id="1558560373" name="Text 19"/>
-          <p:cNvSpPr/>
-          <p:nvPr/>
-        </p:nvSpPr>
-        <p:spPr bwMode="auto">
-          <a:xfrm>
-            <a:off x="736600" y="3507718"/>
-            <a:ext cx="876299" cy="256514"/>
-          </a:xfrm>
-          <a:prstGeom prst="rect">
-            <a:avLst/>
-          </a:prstGeom>
-          <a:noFill/>
-          <a:ln/>
-        </p:spPr>
-        <p:txBody>
-          <a:bodyPr wrap="square" lIns="0" tIns="0" rIns="0" bIns="0" rtlCol="0" anchor="t">
-            <a:normAutofit/>
-          </a:bodyPr>
-          <a:lstStyle/>
-          <a:p>
-            <a:pPr marL="0" indent="0" algn="l">
-              <a:lnSpc>
-                <a:spcPts val="1820"/>
-              </a:lnSpc>
-              <a:buNone/>
-              <a:defRPr/>
-            </a:pPr>
-            <a:r>
-              <a:rPr lang="en-US" sz="1300" b="1">
-                <a:solidFill>
-                  <a:srgbClr val="1F3A5F"/>
-                </a:solidFill>
-                <a:latin typeface="Carlito"/>
-                <a:ea typeface="Carlito"/>
-                <a:cs typeface="Carlito"/>
-              </a:rPr>
-              <a:t>P1.5</a:t>
-            </a:r>
-            <a:endParaRPr lang="en-US" sz="1300"/>
-          </a:p>
-        </p:txBody>
-      </p:sp>
-      <p:sp>
-        <p:nvSpPr>
-          <p:cNvPr id="686066982" name="Shape 20"/>
-          <p:cNvSpPr/>
-          <p:nvPr/>
-        </p:nvSpPr>
-        <p:spPr bwMode="auto">
-          <a:xfrm>
-            <a:off x="1689100" y="3401020"/>
-            <a:ext cx="2063750" cy="203200"/>
-          </a:xfrm>
-          <a:prstGeom prst="roundRect">
-            <a:avLst>
-              <a:gd name="adj" fmla="val 18750"/>
-            </a:avLst>
-          </a:prstGeom>
-          <a:solidFill>
-            <a:srgbClr val="E07A2D"/>
-          </a:solidFill>
-          <a:ln/>
-        </p:spPr>
-        <p:txBody>
-          <a:bodyPr/>
-          <a:lstStyle/>
-          <a:p>
-            <a:pPr>
-              <a:defRPr/>
-            </a:pPr>
-            <a:endParaRPr lang="it-IT"/>
-          </a:p>
-        </p:txBody>
-      </p:sp>
-      <p:sp>
-        <p:nvSpPr>
-          <p:cNvPr id="1733058696" name="Text 21"/>
-          <p:cNvSpPr/>
-          <p:nvPr/>
-        </p:nvSpPr>
-        <p:spPr bwMode="auto">
-          <a:xfrm>
-            <a:off x="3829050" y="3407370"/>
-            <a:ext cx="939800" cy="256514"/>
-          </a:xfrm>
-          <a:prstGeom prst="rect">
-            <a:avLst/>
-          </a:prstGeom>
-          <a:noFill/>
-          <a:ln/>
-        </p:spPr>
-        <p:txBody>
-          <a:bodyPr wrap="square" lIns="0" tIns="0" rIns="0" bIns="0" rtlCol="0" anchor="t">
-            <a:normAutofit/>
-          </a:bodyPr>
-          <a:lstStyle/>
-          <a:p>
-            <a:pPr marL="0" indent="0" algn="l">
-              <a:lnSpc>
-                <a:spcPts val="1820"/>
-              </a:lnSpc>
-              <a:buNone/>
-              <a:defRPr/>
-            </a:pPr>
-            <a:r>
-              <a:rPr lang="en-US" sz="1300" b="1">
-                <a:solidFill>
-                  <a:srgbClr val="222B36"/>
-                </a:solidFill>
-                <a:latin typeface="Carlito"/>
-                <a:ea typeface="Carlito"/>
-                <a:cs typeface="Carlito"/>
-              </a:rPr>
-              <a:t>356 ns</a:t>
-            </a:r>
-            <a:endParaRPr lang="en-US" sz="1300"/>
-          </a:p>
-        </p:txBody>
-      </p:sp>
-      <p:sp>
-        <p:nvSpPr>
-          <p:cNvPr id="1561069790" name="Shape 22"/>
-          <p:cNvSpPr/>
-          <p:nvPr/>
-        </p:nvSpPr>
-        <p:spPr bwMode="auto">
-          <a:xfrm>
-            <a:off x="1689100" y="3642320"/>
-            <a:ext cx="719205" cy="203200"/>
-          </a:xfrm>
-          <a:prstGeom prst="roundRect">
-            <a:avLst>
-              <a:gd name="adj" fmla="val 18750"/>
-            </a:avLst>
-          </a:prstGeom>
-          <a:solidFill>
-            <a:srgbClr val="2E9C6E"/>
-          </a:solidFill>
-          <a:ln/>
-        </p:spPr>
-        <p:txBody>
-          <a:bodyPr/>
-          <a:lstStyle/>
-          <a:p>
-            <a:pPr>
-              <a:defRPr/>
-            </a:pPr>
-            <a:endParaRPr lang="it-IT"/>
-          </a:p>
-        </p:txBody>
-      </p:sp>
-      <p:sp>
-        <p:nvSpPr>
-          <p:cNvPr id="1844850430" name="Text 23"/>
-          <p:cNvSpPr/>
-          <p:nvPr/>
-        </p:nvSpPr>
-        <p:spPr bwMode="auto">
-          <a:xfrm>
-            <a:off x="2486739" y="3648670"/>
-            <a:ext cx="1700000" cy="256514"/>
-          </a:xfrm>
-          <a:prstGeom prst="rect">
-            <a:avLst/>
-          </a:prstGeom>
-          <a:noFill/>
-          <a:ln/>
-        </p:spPr>
-        <p:txBody>
-          <a:bodyPr wrap="square" lIns="0" tIns="0" rIns="0" bIns="0" rtlCol="0" anchor="t">
-            <a:normAutofit/>
-          </a:bodyPr>
-          <a:lstStyle/>
-          <a:p>
-            <a:pPr marL="0" indent="0" algn="l">
-              <a:lnSpc>
-                <a:spcPts val="1820"/>
-              </a:lnSpc>
-              <a:buNone/>
-              <a:defRPr/>
-            </a:pPr>
-            <a:r>
-              <a:rPr lang="en-US" sz="1300" b="1">
-                <a:solidFill>
-                  <a:srgbClr val="222B36"/>
-                </a:solidFill>
-                <a:latin typeface="Carlito"/>
-                <a:ea typeface="Carlito"/>
-                <a:cs typeface="Carlito"/>
-              </a:rPr>
-              <a:t>124 ns   −232 ns</a:t>
-            </a:r>
-            <a:endParaRPr lang="en-US" sz="1300"/>
-          </a:p>
-        </p:txBody>
-      </p:sp>
-      <p:sp>
-        <p:nvSpPr>
-          <p:cNvPr id="311158080" name="Text 24"/>
-          <p:cNvSpPr/>
-          <p:nvPr/>
-        </p:nvSpPr>
-        <p:spPr bwMode="auto">
-          <a:xfrm>
-            <a:off x="736600" y="4028418"/>
-            <a:ext cx="876299" cy="256514"/>
-          </a:xfrm>
-          <a:prstGeom prst="rect">
-            <a:avLst/>
-          </a:prstGeom>
-          <a:noFill/>
-          <a:ln/>
-        </p:spPr>
-        <p:txBody>
-          <a:bodyPr wrap="square" lIns="0" tIns="0" rIns="0" bIns="0" rtlCol="0" anchor="t">
-            <a:normAutofit/>
-          </a:bodyPr>
-          <a:lstStyle/>
-          <a:p>
-            <a:pPr marL="0" indent="0" algn="l">
-              <a:lnSpc>
-                <a:spcPts val="1820"/>
-              </a:lnSpc>
-              <a:buNone/>
-              <a:defRPr/>
-            </a:pPr>
-            <a:r>
-              <a:rPr lang="en-US" sz="1300" b="1">
-                <a:solidFill>
-                  <a:srgbClr val="1F3A5F"/>
-                </a:solidFill>
-                <a:latin typeface="Carlito"/>
-                <a:ea typeface="Carlito"/>
-                <a:cs typeface="Carlito"/>
-              </a:rPr>
-              <a:t>P2</a:t>
-            </a:r>
-            <a:endParaRPr lang="en-US" sz="1300"/>
-          </a:p>
-        </p:txBody>
-      </p:sp>
-      <p:sp>
-        <p:nvSpPr>
-          <p:cNvPr id="599369607" name="Shape 25"/>
-          <p:cNvSpPr/>
-          <p:nvPr/>
-        </p:nvSpPr>
-        <p:spPr bwMode="auto">
-          <a:xfrm>
-            <a:off x="1689100" y="3921720"/>
-            <a:ext cx="3073400" cy="203200"/>
-          </a:xfrm>
-          <a:prstGeom prst="roundRect">
-            <a:avLst>
-              <a:gd name="adj" fmla="val 18750"/>
-            </a:avLst>
-          </a:prstGeom>
-          <a:solidFill>
-            <a:srgbClr val="E07A2D"/>
-          </a:solidFill>
-          <a:ln/>
-        </p:spPr>
-        <p:txBody>
-          <a:bodyPr/>
-          <a:lstStyle/>
-          <a:p>
-            <a:pPr>
-              <a:defRPr/>
-            </a:pPr>
-            <a:endParaRPr lang="it-IT"/>
-          </a:p>
-        </p:txBody>
-      </p:sp>
-      <p:sp>
-        <p:nvSpPr>
-          <p:cNvPr id="326970025" name="Text 26"/>
-          <p:cNvSpPr/>
-          <p:nvPr/>
-        </p:nvSpPr>
-        <p:spPr bwMode="auto">
-          <a:xfrm>
-            <a:off x="4838700" y="3928070"/>
-            <a:ext cx="939800" cy="256514"/>
-          </a:xfrm>
-          <a:prstGeom prst="rect">
-            <a:avLst/>
-          </a:prstGeom>
-          <a:noFill/>
-          <a:ln/>
-        </p:spPr>
-        <p:txBody>
-          <a:bodyPr wrap="square" lIns="0" tIns="0" rIns="0" bIns="0" rtlCol="0" anchor="t">
-            <a:normAutofit/>
-          </a:bodyPr>
-          <a:lstStyle/>
-          <a:p>
-            <a:pPr marL="0" indent="0" algn="l">
-              <a:lnSpc>
-                <a:spcPts val="1820"/>
-              </a:lnSpc>
-              <a:buNone/>
-              <a:defRPr/>
-            </a:pPr>
-            <a:r>
-              <a:rPr lang="en-US" sz="1300" b="1">
-                <a:solidFill>
-                  <a:srgbClr val="222B36"/>
-                </a:solidFill>
-                <a:latin typeface="Carlito"/>
-                <a:ea typeface="Carlito"/>
-                <a:cs typeface="Carlito"/>
-              </a:rPr>
-              <a:t>529 ns</a:t>
-            </a:r>
-            <a:endParaRPr lang="en-US" sz="1300"/>
-          </a:p>
-        </p:txBody>
-      </p:sp>
-      <p:sp>
-        <p:nvSpPr>
-          <p:cNvPr id="1286915460" name="Shape 27"/>
-          <p:cNvSpPr/>
-          <p:nvPr/>
-        </p:nvSpPr>
-        <p:spPr bwMode="auto">
-          <a:xfrm>
-            <a:off x="1689100" y="4163020"/>
-            <a:ext cx="1702525" cy="203200"/>
-          </a:xfrm>
-          <a:prstGeom prst="roundRect">
-            <a:avLst>
-              <a:gd name="adj" fmla="val 18750"/>
-            </a:avLst>
-          </a:prstGeom>
-          <a:solidFill>
-            <a:srgbClr val="2E9C6E"/>
-          </a:solidFill>
-          <a:ln/>
-        </p:spPr>
-        <p:txBody>
-          <a:bodyPr/>
-          <a:lstStyle/>
-          <a:p>
-            <a:pPr>
-              <a:defRPr/>
-            </a:pPr>
-            <a:endParaRPr lang="it-IT"/>
-          </a:p>
-        </p:txBody>
-      </p:sp>
-      <p:sp>
-        <p:nvSpPr>
-          <p:cNvPr id="717403374" name="Text 28"/>
-          <p:cNvSpPr/>
-          <p:nvPr/>
-        </p:nvSpPr>
-        <p:spPr bwMode="auto">
-          <a:xfrm>
-            <a:off x="3470059" y="4169370"/>
-            <a:ext cx="685800" cy="256514"/>
-          </a:xfrm>
-          <a:prstGeom prst="rect">
-            <a:avLst/>
-          </a:prstGeom>
-          <a:noFill/>
-          <a:ln/>
-        </p:spPr>
-        <p:txBody>
-          <a:bodyPr wrap="square" lIns="0" tIns="0" rIns="0" bIns="0" rtlCol="0" anchor="t">
-            <a:normAutofit/>
-          </a:bodyPr>
-          <a:lstStyle/>
-          <a:p>
-            <a:pPr marL="0" indent="0" algn="l">
-              <a:lnSpc>
-                <a:spcPts val="1820"/>
-              </a:lnSpc>
-              <a:buNone/>
-              <a:defRPr/>
-            </a:pPr>
-            <a:r>
-              <a:rPr lang="en-US" sz="1300" b="1">
-                <a:solidFill>
-                  <a:srgbClr val="222B36"/>
-                </a:solidFill>
-                <a:latin typeface="Carlito"/>
-                <a:ea typeface="Carlito"/>
-                <a:cs typeface="Carlito"/>
-              </a:rPr>
-              <a:t>293 ns</a:t>
-            </a:r>
-            <a:endParaRPr lang="en-US" sz="1300"/>
-          </a:p>
-        </p:txBody>
-      </p:sp>
-      <p:sp>
-        <p:nvSpPr>
-          <p:cNvPr id="327375694" name="Text 29"/>
-          <p:cNvSpPr/>
-          <p:nvPr/>
-        </p:nvSpPr>
-        <p:spPr bwMode="auto">
-          <a:xfrm>
-            <a:off x="4210723" y="4169370"/>
-            <a:ext cx="1193800" cy="256514"/>
-          </a:xfrm>
-          <a:prstGeom prst="rect">
-            <a:avLst/>
-          </a:prstGeom>
-          <a:noFill/>
-          <a:ln/>
-        </p:spPr>
-        <p:txBody>
-          <a:bodyPr wrap="square" lIns="0" tIns="0" rIns="0" bIns="0" rtlCol="0" anchor="t">
-            <a:normAutofit/>
-          </a:bodyPr>
-          <a:lstStyle/>
-          <a:p>
-            <a:pPr marL="0" indent="0" algn="l">
-              <a:lnSpc>
-                <a:spcPts val="1820"/>
-              </a:lnSpc>
-              <a:buNone/>
-              <a:defRPr/>
-            </a:pPr>
-            <a:r>
-              <a:rPr lang="en-US" sz="1300" b="1">
-                <a:solidFill>
-                  <a:srgbClr val="1F3A5F"/>
-                </a:solidFill>
-                <a:latin typeface="Carlito"/>
-                <a:ea typeface="Carlito"/>
-                <a:cs typeface="Carlito"/>
-              </a:rPr>
-              <a:t>−236 ns</a:t>
-            </a:r>
-            <a:endParaRPr lang="en-US" sz="1300"/>
-          </a:p>
-        </p:txBody>
-      </p:sp>
-      <p:sp>
-        <p:nvSpPr>
-          <p:cNvPr id="1955929787" name="Text 30"/>
-          <p:cNvSpPr/>
-          <p:nvPr/>
-        </p:nvSpPr>
-        <p:spPr bwMode="auto">
-          <a:xfrm>
-            <a:off x="736600" y="4549118"/>
-            <a:ext cx="876299" cy="256514"/>
-          </a:xfrm>
-          <a:prstGeom prst="rect">
-            <a:avLst/>
-          </a:prstGeom>
-          <a:noFill/>
-          <a:ln/>
-        </p:spPr>
-        <p:txBody>
-          <a:bodyPr wrap="square" lIns="0" tIns="0" rIns="0" bIns="0" rtlCol="0" anchor="t">
-            <a:normAutofit/>
-          </a:bodyPr>
-          <a:lstStyle/>
-          <a:p>
-            <a:pPr marL="0" indent="0" algn="l">
-              <a:lnSpc>
-                <a:spcPts val="1820"/>
-              </a:lnSpc>
-              <a:buNone/>
-              <a:defRPr/>
-            </a:pPr>
-            <a:r>
-              <a:rPr lang="en-US" sz="1300" b="1">
-                <a:solidFill>
-                  <a:srgbClr val="1F3A5F"/>
-                </a:solidFill>
-                <a:latin typeface="Carlito"/>
-                <a:ea typeface="Carlito"/>
-                <a:cs typeface="Carlito"/>
-              </a:rPr>
-              <a:t>P3</a:t>
-            </a:r>
-            <a:endParaRPr lang="en-US" sz="1300"/>
-          </a:p>
-        </p:txBody>
-      </p:sp>
-      <p:sp>
-        <p:nvSpPr>
-          <p:cNvPr id="552882207" name="Shape 31"/>
-          <p:cNvSpPr/>
-          <p:nvPr/>
-        </p:nvSpPr>
-        <p:spPr bwMode="auto">
-          <a:xfrm>
-            <a:off x="1689100" y="4442420"/>
-            <a:ext cx="3867150" cy="203200"/>
-          </a:xfrm>
-          <a:prstGeom prst="roundRect">
-            <a:avLst>
-              <a:gd name="adj" fmla="val 18750"/>
-            </a:avLst>
-          </a:prstGeom>
-          <a:solidFill>
-            <a:srgbClr val="E07A2D"/>
-          </a:solidFill>
-          <a:ln/>
-        </p:spPr>
-        <p:txBody>
-          <a:bodyPr/>
-          <a:lstStyle/>
-          <a:p>
-            <a:pPr>
-              <a:defRPr/>
-            </a:pPr>
-            <a:endParaRPr lang="it-IT"/>
-          </a:p>
-        </p:txBody>
-      </p:sp>
-      <p:sp>
-        <p:nvSpPr>
-          <p:cNvPr id="1123156934" name="Text 32"/>
-          <p:cNvSpPr/>
-          <p:nvPr/>
-        </p:nvSpPr>
-        <p:spPr bwMode="auto">
-          <a:xfrm>
-            <a:off x="5632450" y="4448770"/>
-            <a:ext cx="876299" cy="256514"/>
-          </a:xfrm>
-          <a:prstGeom prst="rect">
-            <a:avLst/>
-          </a:prstGeom>
-          <a:noFill/>
-          <a:ln/>
-        </p:spPr>
-        <p:txBody>
-          <a:bodyPr wrap="square" lIns="0" tIns="0" rIns="0" bIns="0" rtlCol="0" anchor="t">
-            <a:normAutofit/>
-          </a:bodyPr>
-          <a:lstStyle/>
-          <a:p>
-            <a:pPr marL="0" indent="0" algn="l">
-              <a:lnSpc>
-                <a:spcPts val="1820"/>
-              </a:lnSpc>
-              <a:buNone/>
-              <a:defRPr/>
-            </a:pPr>
-            <a:r>
-              <a:rPr lang="en-US" sz="1300" b="1">
-                <a:solidFill>
-                  <a:srgbClr val="222B36"/>
-                </a:solidFill>
-                <a:latin typeface="Carlito"/>
-                <a:ea typeface="Carlito"/>
-                <a:cs typeface="Carlito"/>
-              </a:rPr>
-              <a:t>666 ns</a:t>
-            </a:r>
-            <a:endParaRPr lang="en-US" sz="1300"/>
-          </a:p>
-        </p:txBody>
-      </p:sp>
-      <p:sp>
-        <p:nvSpPr>
-          <p:cNvPr id="1214684123" name="Shape 33"/>
-          <p:cNvSpPr/>
-          <p:nvPr/>
-        </p:nvSpPr>
-        <p:spPr bwMode="auto">
-          <a:xfrm>
-            <a:off x="1689100" y="4683720"/>
-            <a:ext cx="2413023" cy="203200"/>
-          </a:xfrm>
-          <a:prstGeom prst="roundRect">
-            <a:avLst>
-              <a:gd name="adj" fmla="val 18750"/>
-            </a:avLst>
-          </a:prstGeom>
-          <a:solidFill>
-            <a:srgbClr val="2E9C6E"/>
-          </a:solidFill>
-          <a:ln/>
-        </p:spPr>
-        <p:txBody>
-          <a:bodyPr/>
-          <a:lstStyle/>
-          <a:p>
-            <a:pPr>
-              <a:defRPr/>
-            </a:pPr>
-            <a:endParaRPr lang="it-IT"/>
-          </a:p>
-        </p:txBody>
-      </p:sp>
-      <p:sp>
-        <p:nvSpPr>
-          <p:cNvPr id="1830826382" name="Text 34"/>
-          <p:cNvSpPr/>
-          <p:nvPr/>
-        </p:nvSpPr>
-        <p:spPr bwMode="auto">
-          <a:xfrm>
-            <a:off x="4180557" y="4690070"/>
-            <a:ext cx="685800" cy="256514"/>
-          </a:xfrm>
-          <a:prstGeom prst="rect">
-            <a:avLst/>
-          </a:prstGeom>
-          <a:noFill/>
-          <a:ln/>
-        </p:spPr>
-        <p:txBody>
-          <a:bodyPr wrap="square" lIns="0" tIns="0" rIns="0" bIns="0" rtlCol="0" anchor="t">
-            <a:normAutofit/>
-          </a:bodyPr>
-          <a:lstStyle/>
-          <a:p>
-            <a:pPr marL="0" indent="0" algn="l">
-              <a:lnSpc>
-                <a:spcPts val="1820"/>
-              </a:lnSpc>
-              <a:buNone/>
-              <a:defRPr/>
-            </a:pPr>
-            <a:r>
-              <a:rPr lang="en-US" sz="1300" b="1">
-                <a:solidFill>
-                  <a:srgbClr val="222B36"/>
-                </a:solidFill>
-                <a:latin typeface="Carlito"/>
-                <a:ea typeface="Carlito"/>
-                <a:cs typeface="Carlito"/>
-              </a:rPr>
-              <a:t>416 ns</a:t>
-            </a:r>
-            <a:endParaRPr lang="en-US" sz="1300"/>
-          </a:p>
-        </p:txBody>
-      </p:sp>
-      <p:sp>
-        <p:nvSpPr>
-          <p:cNvPr id="1564814363" name="Text 35"/>
-          <p:cNvSpPr/>
-          <p:nvPr/>
-        </p:nvSpPr>
-        <p:spPr bwMode="auto">
-          <a:xfrm>
-            <a:off x="4921221" y="4690070"/>
-            <a:ext cx="1193800" cy="256514"/>
-          </a:xfrm>
-          <a:prstGeom prst="rect">
-            <a:avLst/>
-          </a:prstGeom>
-          <a:noFill/>
-          <a:ln/>
-        </p:spPr>
-        <p:txBody>
-          <a:bodyPr wrap="square" lIns="0" tIns="0" rIns="0" bIns="0" rtlCol="0" anchor="t">
-            <a:normAutofit/>
-          </a:bodyPr>
-          <a:lstStyle/>
-          <a:p>
-            <a:pPr marL="0" indent="0" algn="l">
-              <a:lnSpc>
-                <a:spcPts val="1820"/>
-              </a:lnSpc>
-              <a:buNone/>
-              <a:defRPr/>
-            </a:pPr>
-            <a:r>
-              <a:rPr lang="en-US" sz="1300" b="1">
-                <a:solidFill>
-                  <a:srgbClr val="1F3A5F"/>
-                </a:solidFill>
-                <a:latin typeface="Carlito"/>
-                <a:ea typeface="Carlito"/>
-                <a:cs typeface="Carlito"/>
-              </a:rPr>
-              <a:t>−250 ns</a:t>
-            </a:r>
-            <a:endParaRPr lang="en-US" sz="1300"/>
-          </a:p>
-        </p:txBody>
-      </p:sp>
-      <p:sp>
-        <p:nvSpPr>
-          <p:cNvPr id="320966211" name="Shape 36"/>
-          <p:cNvSpPr/>
-          <p:nvPr/>
-        </p:nvSpPr>
-        <p:spPr bwMode="auto">
-          <a:xfrm>
-            <a:off x="7264400" y="1562100"/>
-            <a:ext cx="4381500" cy="1099807"/>
-          </a:xfrm>
-          <a:prstGeom prst="roundRect">
-            <a:avLst>
-              <a:gd name="adj" fmla="val 11547"/>
-            </a:avLst>
-          </a:prstGeom>
-          <a:solidFill>
-            <a:srgbClr val="F3F5F8"/>
-          </a:solidFill>
-          <a:ln/>
-        </p:spPr>
-        <p:txBody>
-          <a:bodyPr/>
-          <a:lstStyle/>
-          <a:p>
-            <a:pPr>
-              <a:defRPr/>
-            </a:pPr>
-            <a:endParaRPr lang="it-IT"/>
-          </a:p>
-        </p:txBody>
-      </p:sp>
-      <p:sp>
-        <p:nvSpPr>
-          <p:cNvPr id="1143815715" name="Shape 37"/>
-          <p:cNvSpPr/>
-          <p:nvPr/>
-        </p:nvSpPr>
-        <p:spPr bwMode="auto">
-          <a:xfrm>
-            <a:off x="7264400" y="1562100"/>
-            <a:ext cx="4381500" cy="88900"/>
-          </a:xfrm>
-          <a:custGeom>
-            <a:avLst/>
-            <a:gdLst/>
-            <a:ahLst/>
-            <a:cxnLst/>
-            <a:rect l="l" t="t" r="r" b="b"/>
-            <a:pathLst>
-              <a:path w="4381500" h="88900" fill="norm" stroke="1" extrusionOk="0">
-                <a:moveTo>
-                  <a:pt x="5850" y="88900"/>
-                </a:moveTo>
-                <a:arcTo wR="127000" hR="127000" stAng="11847456" swAng="4352544"/>
-                <a:lnTo>
-                  <a:pt x="4254500" y="0"/>
-                </a:lnTo>
-                <a:arcTo wR="127000" hR="127000" stAng="16200000" swAng="4352544"/>
-                <a:close/>
-              </a:path>
-            </a:pathLst>
-          </a:custGeom>
-          <a:solidFill>
-            <a:srgbClr val="E07A2D"/>
-          </a:solidFill>
-          <a:ln/>
-        </p:spPr>
-        <p:txBody>
-          <a:bodyPr/>
-          <a:lstStyle/>
-          <a:p>
-            <a:pPr>
-              <a:defRPr/>
-            </a:pPr>
-            <a:endParaRPr lang="it-IT"/>
-          </a:p>
-        </p:txBody>
-      </p:sp>
-      <p:sp>
-        <p:nvSpPr>
-          <p:cNvPr id="276191563" name="Text 38"/>
-          <p:cNvSpPr/>
-          <p:nvPr/>
-        </p:nvSpPr>
-        <p:spPr bwMode="auto">
-          <a:xfrm>
-            <a:off x="7442200" y="1752599"/>
-            <a:ext cx="4146677" cy="274307"/>
-          </a:xfrm>
-          <a:prstGeom prst="rect">
-            <a:avLst/>
-          </a:prstGeom>
-          <a:noFill/>
-          <a:ln/>
-        </p:spPr>
-        <p:txBody>
-          <a:bodyPr wrap="square" lIns="0" tIns="0" rIns="0" bIns="0" rtlCol="0" anchor="t">
-            <a:normAutofit/>
-          </a:bodyPr>
-          <a:lstStyle/>
-          <a:p>
-            <a:pPr marL="0" indent="0" algn="l">
-              <a:lnSpc>
-                <a:spcPts val="1960"/>
-              </a:lnSpc>
-              <a:buNone/>
-              <a:defRPr/>
-            </a:pPr>
-            <a:r>
-              <a:rPr lang="en-US" sz="1400" b="1">
-                <a:solidFill>
-                  <a:srgbClr val="E07A2D"/>
-                </a:solidFill>
-                <a:latin typeface="Carlito"/>
-                <a:ea typeface="Carlito"/>
-                <a:cs typeface="Carlito"/>
-              </a:rPr>
-              <a:t>pktgen: il generatore di Linux</a:t>
-            </a:r>
-            <a:endParaRPr lang="en-US" sz="1400"/>
-          </a:p>
-        </p:txBody>
-      </p:sp>
-      <p:sp>
-        <p:nvSpPr>
-          <p:cNvPr id="1413696015" name="Text 39"/>
-          <p:cNvSpPr/>
-          <p:nvPr/>
-        </p:nvSpPr>
-        <p:spPr bwMode="auto">
-          <a:xfrm>
-            <a:off x="7442200" y="2039609"/>
-            <a:ext cx="4146677" cy="454554"/>
-          </a:xfrm>
-          <a:prstGeom prst="rect">
-            <a:avLst/>
-          </a:prstGeom>
-          <a:noFill/>
-          <a:ln/>
-        </p:spPr>
-        <p:txBody>
-          <a:bodyPr wrap="square" lIns="0" tIns="0" rIns="0" bIns="0" rtlCol="0" anchor="t">
-            <a:normAutofit/>
-          </a:bodyPr>
-          <a:lstStyle/>
-          <a:p>
-            <a:pPr marL="0" indent="0" algn="l">
-              <a:lnSpc>
-                <a:spcPts val="1690"/>
-              </a:lnSpc>
-              <a:buNone/>
-              <a:defRPr/>
-            </a:pPr>
-            <a:r>
-              <a:rPr lang="en-US" sz="1300">
-                <a:solidFill>
-                  <a:srgbClr val="222B36"/>
-                </a:solidFill>
-                <a:latin typeface="Carlito"/>
-                <a:ea typeface="Carlito"/>
-                <a:cs typeface="Carlito"/>
-              </a:rPr>
-              <a:t>Crea una skb, e il cavo virtuale la copia prima del nodo: lo stesso programma costa di più.</a:t>
-            </a:r>
-            <a:endParaRPr lang="en-US" sz="1300"/>
-          </a:p>
-        </p:txBody>
-      </p:sp>
-      <p:sp>
-        <p:nvSpPr>
-          <p:cNvPr id="33363353" name="Shape 40"/>
-          <p:cNvSpPr/>
-          <p:nvPr/>
-        </p:nvSpPr>
-        <p:spPr bwMode="auto">
-          <a:xfrm>
-            <a:off x="7264400" y="2750809"/>
-            <a:ext cx="4381500" cy="1099807"/>
-          </a:xfrm>
-          <a:prstGeom prst="roundRect">
-            <a:avLst>
-              <a:gd name="adj" fmla="val 11547"/>
-            </a:avLst>
-          </a:prstGeom>
-          <a:solidFill>
-            <a:srgbClr val="F3F5F8"/>
-          </a:solidFill>
-          <a:ln/>
-        </p:spPr>
-        <p:txBody>
-          <a:bodyPr/>
-          <a:lstStyle/>
-          <a:p>
-            <a:pPr>
-              <a:defRPr/>
-            </a:pPr>
-            <a:endParaRPr lang="it-IT"/>
-          </a:p>
-        </p:txBody>
-      </p:sp>
-      <p:sp>
-        <p:nvSpPr>
-          <p:cNvPr id="1187019319" name="Shape 41"/>
-          <p:cNvSpPr/>
-          <p:nvPr/>
-        </p:nvSpPr>
-        <p:spPr bwMode="auto">
-          <a:xfrm>
-            <a:off x="7264400" y="2750809"/>
-            <a:ext cx="4381500" cy="88900"/>
-          </a:xfrm>
-          <a:custGeom>
-            <a:avLst/>
-            <a:gdLst/>
-            <a:ahLst/>
-            <a:cxnLst/>
-            <a:rect l="l" t="t" r="r" b="b"/>
-            <a:pathLst>
-              <a:path w="4381500" h="88900" fill="norm" stroke="1" extrusionOk="0">
-                <a:moveTo>
-                  <a:pt x="5850" y="88900"/>
-                </a:moveTo>
-                <a:arcTo wR="127000" hR="127000" stAng="11847456" swAng="4352544"/>
-                <a:lnTo>
-                  <a:pt x="4254500" y="0"/>
-                </a:lnTo>
-                <a:arcTo wR="127000" hR="127000" stAng="16200000" swAng="4352544"/>
-                <a:close/>
-              </a:path>
-            </a:pathLst>
-          </a:custGeom>
-          <a:solidFill>
-            <a:srgbClr val="2E9C6E"/>
-          </a:solidFill>
-          <a:ln/>
-        </p:spPr>
-        <p:txBody>
-          <a:bodyPr/>
-          <a:lstStyle/>
-          <a:p>
-            <a:pPr>
-              <a:defRPr/>
-            </a:pPr>
-            <a:endParaRPr lang="it-IT"/>
-          </a:p>
-        </p:txBody>
-      </p:sp>
-      <p:sp>
-        <p:nvSpPr>
-          <p:cNvPr id="794735577" name="Text 42"/>
-          <p:cNvSpPr/>
-          <p:nvPr/>
-        </p:nvSpPr>
-        <p:spPr bwMode="auto">
-          <a:xfrm>
-            <a:off x="7442200" y="2941309"/>
-            <a:ext cx="4146677" cy="274307"/>
-          </a:xfrm>
-          <a:prstGeom prst="rect">
-            <a:avLst/>
-          </a:prstGeom>
-          <a:noFill/>
-          <a:ln/>
-        </p:spPr>
-        <p:txBody>
-          <a:bodyPr wrap="square" lIns="0" tIns="0" rIns="0" bIns="0" rtlCol="0" anchor="t">
-            <a:normAutofit/>
-          </a:bodyPr>
-          <a:lstStyle/>
-          <a:p>
-            <a:pPr marL="0" indent="0" algn="l">
-              <a:lnSpc>
-                <a:spcPts val="1960"/>
-              </a:lnSpc>
-              <a:buNone/>
-              <a:defRPr/>
-            </a:pPr>
-            <a:r>
-              <a:rPr lang="en-US" sz="1400" b="1">
-                <a:solidFill>
-                  <a:srgbClr val="2E9C6E"/>
-                </a:solidFill>
-                <a:latin typeface="Carlito"/>
-                <a:ea typeface="Carlito"/>
-                <a:cs typeface="Carlito"/>
-              </a:rPr>
-              <a:t>La rete neurale costa uguale</a:t>
-            </a:r>
-            <a:endParaRPr lang="en-US" sz="1400"/>
-          </a:p>
-        </p:txBody>
-      </p:sp>
-      <p:sp>
-        <p:nvSpPr>
-          <p:cNvPr id="1037587850" name="Text 43"/>
-          <p:cNvSpPr/>
-          <p:nvPr/>
-        </p:nvSpPr>
-        <p:spPr bwMode="auto">
-          <a:xfrm>
-            <a:off x="7442200" y="3228318"/>
-            <a:ext cx="4146677" cy="454554"/>
-          </a:xfrm>
-          <a:prstGeom prst="rect">
-            <a:avLst/>
-          </a:prstGeom>
-          <a:noFill/>
-          <a:ln/>
-        </p:spPr>
-        <p:txBody>
-          <a:bodyPr wrap="square" lIns="0" tIns="0" rIns="0" bIns="0" rtlCol="0" anchor="t">
-            <a:normAutofit/>
-          </a:bodyPr>
-          <a:lstStyle/>
-          <a:p>
-            <a:pPr marL="0" indent="0" algn="l">
-              <a:lnSpc>
-                <a:spcPts val="1690"/>
-              </a:lnSpc>
-              <a:buNone/>
-              <a:defRPr/>
-            </a:pPr>
-            <a:r>
-              <a:rPr lang="en-US" sz="1300">
-                <a:solidFill>
-                  <a:srgbClr val="222B36"/>
-                </a:solidFill>
-                <a:latin typeface="Carlito"/>
-                <a:ea typeface="Carlito"/>
-                <a:cs typeface="Carlito"/>
-              </a:rPr>
-              <a:t>Sopra la baseline: xdp_gen +49, +58, +227, +350 ns; pktgen +38, +53, +226, +364.</a:t>
-            </a:r>
-            <a:endParaRPr lang="en-US" sz="1300"/>
-          </a:p>
-        </p:txBody>
-      </p:sp>
-      <p:sp>
-        <p:nvSpPr>
-          <p:cNvPr id="1058785538" name="Shape 44"/>
-          <p:cNvSpPr/>
-          <p:nvPr/>
-        </p:nvSpPr>
-        <p:spPr bwMode="auto">
-          <a:xfrm>
-            <a:off x="7264400" y="3939518"/>
-            <a:ext cx="4381500" cy="1099807"/>
-          </a:xfrm>
-          <a:prstGeom prst="roundRect">
-            <a:avLst>
-              <a:gd name="adj" fmla="val 11547"/>
-            </a:avLst>
-          </a:prstGeom>
-          <a:solidFill>
-            <a:srgbClr val="F3F5F8"/>
-          </a:solidFill>
-          <a:ln/>
-        </p:spPr>
-        <p:txBody>
-          <a:bodyPr/>
-          <a:lstStyle/>
-          <a:p>
-            <a:pPr>
-              <a:defRPr/>
-            </a:pPr>
-            <a:endParaRPr lang="it-IT"/>
-          </a:p>
-        </p:txBody>
-      </p:sp>
-      <p:sp>
-        <p:nvSpPr>
-          <p:cNvPr id="220531357" name="Shape 45"/>
-          <p:cNvSpPr/>
-          <p:nvPr/>
-        </p:nvSpPr>
-        <p:spPr bwMode="auto">
-          <a:xfrm>
-            <a:off x="7264400" y="3939518"/>
-            <a:ext cx="4381500" cy="88900"/>
-          </a:xfrm>
-          <a:custGeom>
-            <a:avLst/>
-            <a:gdLst/>
-            <a:ahLst/>
-            <a:cxnLst/>
-            <a:rect l="l" t="t" r="r" b="b"/>
-            <a:pathLst>
-              <a:path w="4381500" h="88900" fill="norm" stroke="1" extrusionOk="0">
-                <a:moveTo>
-                  <a:pt x="5850" y="88900"/>
-                </a:moveTo>
-                <a:arcTo wR="127000" hR="127000" stAng="11847456" swAng="4352544"/>
-                <a:lnTo>
-                  <a:pt x="4254500" y="0"/>
-                </a:lnTo>
-                <a:arcTo wR="127000" hR="127000" stAng="16200000" swAng="4352544"/>
-                <a:close/>
-              </a:path>
-            </a:pathLst>
-          </a:custGeom>
-          <a:solidFill>
-            <a:srgbClr val="1F3A5F"/>
-          </a:solidFill>
-          <a:ln/>
-        </p:spPr>
-        <p:txBody>
-          <a:bodyPr/>
-          <a:lstStyle/>
-          <a:p>
-            <a:pPr>
-              <a:defRPr/>
-            </a:pPr>
-            <a:endParaRPr lang="it-IT"/>
-          </a:p>
-        </p:txBody>
-      </p:sp>
-      <p:sp>
-        <p:nvSpPr>
-          <p:cNvPr id="1049062466" name="Text 46"/>
-          <p:cNvSpPr/>
-          <p:nvPr/>
-        </p:nvSpPr>
-        <p:spPr bwMode="auto">
-          <a:xfrm>
-            <a:off x="7442200" y="4130018"/>
-            <a:ext cx="4146677" cy="274307"/>
-          </a:xfrm>
-          <a:prstGeom prst="rect">
-            <a:avLst/>
-          </a:prstGeom>
-          <a:noFill/>
-          <a:ln/>
-        </p:spPr>
-        <p:txBody>
-          <a:bodyPr wrap="square" lIns="0" tIns="0" rIns="0" bIns="0" rtlCol="0" anchor="t">
-            <a:normAutofit/>
-          </a:bodyPr>
-          <a:lstStyle/>
-          <a:p>
-            <a:pPr marL="0" indent="0" algn="l">
-              <a:lnSpc>
-                <a:spcPts val="1960"/>
-              </a:lnSpc>
-              <a:buNone/>
-              <a:defRPr/>
-            </a:pPr>
-            <a:r>
-              <a:rPr lang="en-US" sz="1400" b="1">
-                <a:solidFill>
-                  <a:srgbClr val="1F3A5F"/>
-                </a:solidFill>
-                <a:latin typeface="Carlito"/>
-                <a:ea typeface="Carlito"/>
-                <a:cs typeface="Carlito"/>
-              </a:rPr>
-              <a:t>Da dove vengono i 225–250 ns</a:t>
-            </a:r>
-            <a:endParaRPr lang="en-US" sz="1400"/>
-          </a:p>
-        </p:txBody>
-      </p:sp>
-      <p:sp>
-        <p:nvSpPr>
-          <p:cNvPr id="1739680763" name="Text 47"/>
-          <p:cNvSpPr/>
-          <p:nvPr/>
-        </p:nvSpPr>
-        <p:spPr bwMode="auto">
-          <a:xfrm>
-            <a:off x="7442200" y="4417020"/>
-            <a:ext cx="4146677" cy="454554"/>
-          </a:xfrm>
-          <a:prstGeom prst="rect">
-            <a:avLst/>
-          </a:prstGeom>
-          <a:noFill/>
-          <a:ln/>
-        </p:spPr>
-        <p:txBody>
-          <a:bodyPr wrap="square" lIns="0" tIns="0" rIns="0" bIns="0" rtlCol="0" anchor="t">
-            <a:normAutofit/>
-          </a:bodyPr>
-          <a:lstStyle/>
-          <a:p>
-            <a:pPr marL="0" indent="0" algn="l">
-              <a:lnSpc>
-                <a:spcPts val="1690"/>
-              </a:lnSpc>
-              <a:buNone/>
-              <a:defRPr/>
-            </a:pPr>
-            <a:r>
-              <a:rPr lang="en-US" sz="1300">
-                <a:solidFill>
-                  <a:srgbClr val="222B36"/>
-                </a:solidFill>
-                <a:latin typeface="Carlito"/>
-                <a:ea typeface="Carlito"/>
-                <a:cs typeface="Carlito"/>
-              </a:rPr>
-              <a:t>Dalla copia della skb e dal percorso dello stack: il costo del generatore, pagato sul core del nodo.</a:t>
-            </a:r>
-            <a:endParaRPr lang="en-US" sz="1300"/>
-          </a:p>
-        </p:txBody>
-      </p:sp>
-      <p:sp>
-        <p:nvSpPr>
-          <p:cNvPr id="1701427139" name="Shape 48"/>
-          <p:cNvSpPr/>
-          <p:nvPr/>
-        </p:nvSpPr>
-        <p:spPr bwMode="auto">
-          <a:xfrm>
-            <a:off x="546100" y="5486400"/>
-            <a:ext cx="11099800" cy="774700"/>
-          </a:xfrm>
-          <a:prstGeom prst="roundRect">
-            <a:avLst>
-              <a:gd name="adj" fmla="val 13115"/>
-            </a:avLst>
-          </a:prstGeom>
-          <a:solidFill>
-            <a:srgbClr val="FFF4DE"/>
-          </a:solidFill>
-          <a:ln/>
-        </p:spPr>
-        <p:txBody>
-          <a:bodyPr/>
-          <a:lstStyle/>
-          <a:p>
-            <a:pPr>
-              <a:defRPr/>
-            </a:pPr>
-            <a:endParaRPr lang="it-IT"/>
-          </a:p>
-        </p:txBody>
-      </p:sp>
-      <p:sp>
-        <p:nvSpPr>
-          <p:cNvPr id="808521586" name="Shape 49"/>
-          <p:cNvSpPr/>
-          <p:nvPr/>
-        </p:nvSpPr>
-        <p:spPr bwMode="auto">
-          <a:xfrm>
-            <a:off x="546100" y="5486400"/>
-            <a:ext cx="82550" cy="774700"/>
-          </a:xfrm>
-          <a:custGeom>
-            <a:avLst/>
-            <a:gdLst/>
-            <a:ahLst/>
-            <a:cxnLst/>
-            <a:rect l="l" t="t" r="r" b="b"/>
-            <a:pathLst>
-              <a:path w="82550" h="774700" fill="norm" stroke="1" extrusionOk="0">
-                <a:moveTo>
-                  <a:pt x="0" y="101600"/>
-                </a:moveTo>
-                <a:arcTo wR="101600" hR="101600" stAng="10800000" swAng="4751585"/>
-                <a:lnTo>
-                  <a:pt x="82550" y="772898"/>
-                </a:lnTo>
-                <a:arcTo wR="101600" hR="101600" stAng="6048415" swAng="4751585"/>
-                <a:close/>
-              </a:path>
-            </a:pathLst>
-          </a:custGeom>
-          <a:solidFill>
-            <a:srgbClr val="F2B134"/>
-          </a:solidFill>
-          <a:ln/>
-        </p:spPr>
-        <p:txBody>
-          <a:bodyPr/>
-          <a:lstStyle/>
-          <a:p>
-            <a:pPr>
-              <a:defRPr/>
-            </a:pPr>
-            <a:endParaRPr lang="it-IT"/>
-          </a:p>
-        </p:txBody>
-      </p:sp>
-      <p:sp>
-        <p:nvSpPr>
-          <p:cNvPr id="1488972013" name="Text 50"/>
-          <p:cNvSpPr/>
-          <p:nvPr/>
-        </p:nvSpPr>
-        <p:spPr bwMode="auto">
-          <a:xfrm>
-            <a:off x="819150" y="5767058"/>
-            <a:ext cx="876299" cy="238720"/>
-          </a:xfrm>
-          <a:prstGeom prst="rect">
-            <a:avLst/>
-          </a:prstGeom>
-          <a:noFill/>
-          <a:ln/>
-        </p:spPr>
-        <p:txBody>
-          <a:bodyPr wrap="square" lIns="0" tIns="0" rIns="0" bIns="0" rtlCol="0" anchor="t">
-            <a:normAutofit/>
-          </a:bodyPr>
-          <a:lstStyle/>
-          <a:p>
-            <a:pPr marL="0" indent="0" algn="l">
-              <a:lnSpc>
-                <a:spcPts val="1680"/>
-              </a:lnSpc>
-              <a:buNone/>
-              <a:defRPr/>
-            </a:pPr>
-            <a:r>
-              <a:rPr lang="en-US" sz="1200" b="1" spc="100">
-                <a:solidFill>
-                  <a:srgbClr val="B57A00"/>
-                </a:solidFill>
-                <a:latin typeface="Carlito"/>
-                <a:ea typeface="Carlito"/>
-                <a:cs typeface="Carlito"/>
-              </a:rPr>
-              <a:t>QUINDI</a:t>
-            </a:r>
-            <a:endParaRPr lang="en-US" sz="1200"/>
-          </a:p>
-        </p:txBody>
-      </p:sp>
-      <p:sp>
-        <p:nvSpPr>
-          <p:cNvPr id="1844412690" name="Text 51"/>
-          <p:cNvSpPr/>
-          <p:nvPr/>
-        </p:nvSpPr>
-        <p:spPr bwMode="auto">
-          <a:xfrm>
-            <a:off x="1822450" y="5626100"/>
-            <a:ext cx="9882696" cy="520700"/>
-          </a:xfrm>
-          <a:prstGeom prst="rect">
-            <a:avLst/>
-          </a:prstGeom>
-          <a:noFill/>
-          <a:ln/>
-        </p:spPr>
-        <p:txBody>
-          <a:bodyPr wrap="square" lIns="0" tIns="0" rIns="0" bIns="0" rtlCol="0" anchor="t">
-            <a:normAutofit/>
-          </a:bodyPr>
-          <a:lstStyle/>
-          <a:p>
-            <a:pPr marL="0" indent="0" algn="l">
-              <a:lnSpc>
-                <a:spcPts val="1950"/>
-              </a:lnSpc>
-              <a:buNone/>
-              <a:defRPr/>
-            </a:pPr>
-            <a:r>
-              <a:rPr lang="en-US" sz="1500">
-                <a:solidFill>
-                  <a:srgbClr val="222B36"/>
-                </a:solidFill>
-                <a:latin typeface="Carlito"/>
-                <a:ea typeface="Carlito"/>
-                <a:cs typeface="Carlito"/>
-              </a:rPr>
-              <a:t>Il banco usa </a:t>
-            </a:r>
-            <a:r>
-              <a:rPr lang="en-US" sz="1500" b="1">
-                <a:solidFill>
-                  <a:srgbClr val="222B36"/>
-                </a:solidFill>
-                <a:latin typeface="Carlito"/>
-                <a:ea typeface="Carlito"/>
-                <a:cs typeface="Carlito"/>
-              </a:rPr>
-              <a:t>xdp_gen</a:t>
-            </a:r>
-            <a:r>
-              <a:rPr lang="en-US" sz="1500">
-                <a:solidFill>
-                  <a:srgbClr val="222B36"/>
-                </a:solidFill>
-                <a:latin typeface="Carlito"/>
-                <a:ea typeface="Carlito"/>
-                <a:cs typeface="Carlito"/>
-              </a:rPr>
-              <a:t>, che non ha la copia. pktgen resta un'alternativa: sopra la baseline dà la stessa risposta.</a:t>
-            </a:r>
-            <a:endParaRPr lang="en-US" sz="1500"/>
-          </a:p>
-        </p:txBody>
-      </p:sp>
-      <p:sp>
-        <p:nvSpPr>
-          <p:cNvPr id="47309394" name="Text 52"/>
-          <p:cNvSpPr/>
-          <p:nvPr/>
-        </p:nvSpPr>
-        <p:spPr bwMode="auto">
-          <a:xfrm>
-            <a:off x="546100" y="6426200"/>
-            <a:ext cx="10072370" cy="238720"/>
-          </a:xfrm>
-          <a:prstGeom prst="rect">
-            <a:avLst/>
-          </a:prstGeom>
-          <a:noFill/>
-          <a:ln/>
-        </p:spPr>
-        <p:txBody>
-          <a:bodyPr wrap="square" lIns="0" tIns="0" rIns="0" bIns="0" rtlCol="0" anchor="t">
-            <a:normAutofit/>
-          </a:bodyPr>
-          <a:lstStyle/>
-          <a:p>
-            <a:pPr marL="0" indent="0" algn="l">
-              <a:lnSpc>
-                <a:spcPts val="1680"/>
-              </a:lnSpc>
-              <a:buNone/>
-              <a:defRPr/>
-            </a:pPr>
-            <a:r>
-              <a:rPr lang="en-US" sz="1200" i="1">
-                <a:solidFill>
-                  <a:srgbClr val="6B7C93"/>
-                </a:solidFill>
-                <a:latin typeface="Carlito"/>
-                <a:ea typeface="Carlito"/>
-                <a:cs typeface="Carlito"/>
-              </a:rPr>
-              <a:t>pktgen 28/9, xdp_gen 2/10 (nodo al 100%) · P1: 340 − 115 = 225 · P1.5: 356 − 124 = 232 · P2: 529 − 293 = 236 · P3: 666 − 416 = 250 ns</a:t>
-            </a:r>
-            <a:endParaRPr lang="en-US" sz="1200"/>
-          </a:p>
-        </p:txBody>
-      </p:sp>
-      <p:sp>
-        <p:nvSpPr>
-          <p:cNvPr id="1874844399" name="Text 53"/>
-          <p:cNvSpPr/>
-          <p:nvPr/>
-        </p:nvSpPr>
-        <p:spPr bwMode="auto">
-          <a:xfrm>
-            <a:off x="10960099" y="6426200"/>
-            <a:ext cx="685800" cy="238720"/>
-          </a:xfrm>
-          <a:prstGeom prst="rect">
-            <a:avLst/>
-          </a:prstGeom>
-          <a:noFill/>
-          <a:ln/>
-        </p:spPr>
-        <p:txBody>
-          <a:bodyPr wrap="square" lIns="0" tIns="0" rIns="0" bIns="0" rtlCol="0" anchor="t">
-            <a:normAutofit/>
-          </a:bodyPr>
-          <a:lstStyle/>
-          <a:p>
-            <a:pPr marL="0" indent="0" algn="r">
-              <a:lnSpc>
-                <a:spcPts val="1680"/>
-              </a:lnSpc>
-              <a:buNone/>
-              <a:defRPr/>
-            </a:pPr>
-            <a:r>
-              <a:rPr lang="en-US" sz="1200">
-                <a:solidFill>
-                  <a:srgbClr val="6B7C93"/>
-                </a:solidFill>
-                <a:latin typeface="Carlito"/>
-                <a:ea typeface="Carlito"/>
-                <a:cs typeface="Carlito"/>
-              </a:rPr>
-              <a:t>10</a:t>
-            </a:r>
-            <a:endParaRPr lang="en-US" sz="1200"/>
-          </a:p>
-        </p:txBody>
-      </p:sp>
-    </p:spTree>
-  </p:cSld>
-  <p:clrMapOvr>
-    <a:masterClrMapping/>
-  </p:clrMapOvr>
-  <mc:AlternateContent xmlns:mc="http://schemas.openxmlformats.org/markup-compatibility/2006">
-    <mc:Choice xmlns:p159="http://schemas.microsoft.com/office/powerpoint/2015/09/main" xmlns:p14="http://schemas.microsoft.com/office/powerpoint/2010/main" Requires="p159">
-      <p:transition p14:dur="500" advClick="1"/>
-    </mc:Choice>
-    <mc:Fallback>
-      <p:transition advClick="1"/>
-    </mc:Fallback>
-  </mc:AlternateContent>
-</p:sld>
-</file>
-
-<file path=ppt/slides/slide11.xml><?xml version="1.0" encoding="utf-8"?>
-<p:sld xmlns:a="http://schemas.openxmlformats.org/drawingml/2006/main" xmlns:r="http://schemas.openxmlformats.org/officeDocument/2006/relationships" xmlns:p="http://schemas.openxmlformats.org/presentationml/2006/main" xmlns:m="http://schemas.openxmlformats.org/officeDocument/2006/math" xmlns:w="http://schemas.openxmlformats.org/wordprocessingml/2006/main" xmlns:mc="http://schemas.openxmlformats.org/markup-compatibility/2006" showMasterPhAnim="0" showMasterSp="1" show="1">
   <p:cSld name="Slide 12">
     <p:bg>
       <p:bgPr shadeToTitle="0">
@@ -4876,9 +2527,8 @@
                 <a:ea typeface="Carlito"/>
                 <a:cs typeface="Carlito"/>
               </a:rPr>
-              <a:t>4 · I RISULTATI SUL DUAL BOOT · XDP_GEN</a:t>
-            </a:r>
-            <a:endParaRPr lang="en-US" sz="1200"/>
+              <a:t>4 · I RISULTATI · XDP_GEN</a:t>
+            </a:r>
           </a:p>
         </p:txBody>
       </p:sp>
@@ -4966,9 +2616,8 @@
                 <a:ea typeface="Carlito"/>
                 <a:cs typeface="Carlito"/>
               </a:rPr>
-              <a:t>3 giri, 64 byte, 2 ottobre · un thread di xdp_gen, uscita su un core suo · nodo al 100% · variazione fra i giri 1,2–3,1%</a:t>
-            </a:r>
-            <a:endParaRPr lang="en-US" sz="1200"/>
+              <a:t>3 giri, 64 byte · un thread di xdp_gen, uscita su un core suo · nodo al 100% · contatori hardware del core del nodo</a:t>
+            </a:r>
           </a:p>
         </p:txBody>
       </p:sp>
@@ -5011,9 +2660,8 @@
                 <a:ea typeface="Carlito"/>
                 <a:cs typeface="Carlito"/>
               </a:rPr>
-              <a:t>11</a:t>
-            </a:r>
-            <a:endParaRPr lang="en-US" sz="1200"/>
+              <a:t>10</a:t>
+            </a:r>
           </a:p>
         </p:txBody>
       </p:sp>
@@ -5238,7 +2886,7 @@
         <p:spPr bwMode="auto">
           <a:xfrm>
             <a:off x="2514600" y="1917700"/>
-            <a:ext cx="3072383" cy="279400"/>
+            <a:ext cx="3130004" cy="279400"/>
           </a:xfrm>
           <a:prstGeom prst="roundRect">
             <a:avLst>
@@ -5269,7 +2917,7 @@
         </p:nvSpPr>
         <p:spPr bwMode="auto">
           <a:xfrm>
-            <a:off x="5660135" y="1936750"/>
+            <a:off x="5708104" y="1936750"/>
             <a:ext cx="585216" cy="292100"/>
           </a:xfrm>
           <a:prstGeom prst="rect">
@@ -5300,9 +2948,8 @@
                 <a:ea typeface="Carlito"/>
                 <a:cs typeface="Carlito"/>
               </a:rPr>
-              <a:t>19,11</a:t>
-            </a:r>
-            <a:endParaRPr lang="en-US" sz="1500"/>
+              <a:t>19,47</a:t>
+            </a:r>
           </a:p>
         </p:txBody>
       </p:sp>
@@ -5345,9 +2992,8 @@
                 <a:ea typeface="Carlito"/>
                 <a:cs typeface="Carlito"/>
               </a:rPr>
-              <a:t>≈ 40 ns</a:t>
-            </a:r>
-            <a:endParaRPr lang="en-US" sz="1400"/>
+              <a:t>≈ 41 ns</a:t>
+            </a:r>
           </a:p>
         </p:txBody>
       </p:sp>
@@ -5482,7 +3128,7 @@
         <p:spPr bwMode="auto">
           <a:xfrm>
             <a:off x="2514600" y="2374900"/>
-            <a:ext cx="2432504" cy="279400"/>
+            <a:ext cx="2454810" cy="279400"/>
           </a:xfrm>
           <a:prstGeom prst="roundRect">
             <a:avLst>
@@ -5513,7 +3159,7 @@
         </p:nvSpPr>
         <p:spPr bwMode="auto">
           <a:xfrm>
-            <a:off x="5020256" y="2393950"/>
+            <a:off x="5032910" y="2393950"/>
             <a:ext cx="585216" cy="292100"/>
           </a:xfrm>
           <a:prstGeom prst="rect">
@@ -5544,9 +3190,8 @@
                 <a:ea typeface="Carlito"/>
                 <a:cs typeface="Carlito"/>
               </a:rPr>
-              <a:t>15,13</a:t>
-            </a:r>
-            <a:endParaRPr lang="en-US" sz="1500"/>
+              <a:t>15,27</a:t>
+            </a:r>
           </a:p>
         </p:txBody>
       </p:sp>
@@ -5591,7 +3236,6 @@
               </a:rPr>
               <a:t>66 ns</a:t>
             </a:r>
-            <a:endParaRPr lang="en-US" sz="1400"/>
           </a:p>
         </p:txBody>
       </p:sp>
@@ -5726,7 +3370,7 @@
         <p:spPr bwMode="auto">
           <a:xfrm>
             <a:off x="2514600" y="2832100"/>
-            <a:ext cx="1397122" cy="279400"/>
+            <a:ext cx="1376108" cy="279400"/>
           </a:xfrm>
           <a:prstGeom prst="roundRect">
             <a:avLst>
@@ -5757,7 +3401,7 @@
         </p:nvSpPr>
         <p:spPr bwMode="auto">
           <a:xfrm>
-            <a:off x="3984874" y="2851150"/>
+            <a:off x="3954208" y="2851150"/>
             <a:ext cx="585216" cy="292100"/>
           </a:xfrm>
           <a:prstGeom prst="rect">
@@ -5788,9 +3432,8 @@
                 <a:ea typeface="Carlito"/>
                 <a:cs typeface="Carlito"/>
               </a:rPr>
-              <a:t>8,69</a:t>
-            </a:r>
-            <a:endParaRPr lang="en-US" sz="1500"/>
+              <a:t>8,56</a:t>
+            </a:r>
           </a:p>
         </p:txBody>
       </p:sp>
@@ -5833,9 +3476,8 @@
                 <a:ea typeface="Carlito"/>
                 <a:cs typeface="Carlito"/>
               </a:rPr>
-              <a:t>115 ns</a:t>
-            </a:r>
-            <a:endParaRPr lang="en-US" sz="1400"/>
+              <a:t>117 ns</a:t>
+            </a:r>
           </a:p>
         </p:txBody>
       </p:sp>
@@ -5878,9 +3520,8 @@
                 <a:ea typeface="Carlito"/>
                 <a:cs typeface="Carlito"/>
               </a:rPr>
-              <a:t>+49 ns</a:t>
-            </a:r>
-            <a:endParaRPr lang="en-US" sz="1400"/>
+              <a:t>+51 ns</a:t>
+            </a:r>
           </a:p>
         </p:txBody>
       </p:sp>
@@ -5970,7 +3611,7 @@
         <p:spPr bwMode="auto">
           <a:xfrm>
             <a:off x="2514600" y="3289300"/>
-            <a:ext cx="1297443" cy="279400"/>
+            <a:ext cx="1292513" cy="279400"/>
           </a:xfrm>
           <a:prstGeom prst="roundRect">
             <a:avLst>
@@ -6001,7 +3642,7 @@
         </p:nvSpPr>
         <p:spPr bwMode="auto">
           <a:xfrm>
-            <a:off x="3885195" y="3308350"/>
+            <a:off x="3870613" y="3308350"/>
             <a:ext cx="585216" cy="292100"/>
           </a:xfrm>
           <a:prstGeom prst="rect">
@@ -6032,9 +3673,8 @@
                 <a:ea typeface="Carlito"/>
                 <a:cs typeface="Carlito"/>
               </a:rPr>
-              <a:t>8,07</a:t>
-            </a:r>
-            <a:endParaRPr lang="en-US" sz="1500"/>
+              <a:t>8,04</a:t>
+            </a:r>
           </a:p>
         </p:txBody>
       </p:sp>
@@ -6079,7 +3719,6 @@
               </a:rPr>
               <a:t>124 ns</a:t>
             </a:r>
-            <a:endParaRPr lang="en-US" sz="1400"/>
           </a:p>
         </p:txBody>
       </p:sp>
@@ -6124,7 +3763,6 @@
               </a:rPr>
               <a:t>+58 ns</a:t>
             </a:r>
-            <a:endParaRPr lang="en-US" sz="1400"/>
           </a:p>
         </p:txBody>
       </p:sp>
@@ -6214,7 +3852,7 @@
         <p:spPr bwMode="auto">
           <a:xfrm>
             <a:off x="2514600" y="3746500"/>
-            <a:ext cx="548238" cy="279400"/>
+            <a:ext cx="554623" cy="279400"/>
           </a:xfrm>
           <a:prstGeom prst="roundRect">
             <a:avLst>
@@ -6245,7 +3883,7 @@
         </p:nvSpPr>
         <p:spPr bwMode="auto">
           <a:xfrm>
-            <a:off x="3135990" y="3765550"/>
+            <a:off x="3132723" y="3765550"/>
             <a:ext cx="585216" cy="292100"/>
           </a:xfrm>
           <a:prstGeom prst="rect">
@@ -6276,9 +3914,8 @@
                 <a:ea typeface="Carlito"/>
                 <a:cs typeface="Carlito"/>
               </a:rPr>
-              <a:t>3,41</a:t>
-            </a:r>
-            <a:endParaRPr lang="en-US" sz="1500"/>
+              <a:t>3,45</a:t>
+            </a:r>
           </a:p>
         </p:txBody>
       </p:sp>
@@ -6321,9 +3958,8 @@
                 <a:ea typeface="Carlito"/>
                 <a:cs typeface="Carlito"/>
               </a:rPr>
-              <a:t>293 ns</a:t>
-            </a:r>
-            <a:endParaRPr lang="en-US" sz="1400"/>
+              <a:t>290 ns</a:t>
+            </a:r>
           </a:p>
         </p:txBody>
       </p:sp>
@@ -6366,9 +4002,8 @@
                 <a:ea typeface="Carlito"/>
                 <a:cs typeface="Carlito"/>
               </a:rPr>
-              <a:t>+227 ns</a:t>
-            </a:r>
-            <a:endParaRPr lang="en-US" sz="1400"/>
+              <a:t>+224 ns</a:t>
+            </a:r>
           </a:p>
         </p:txBody>
       </p:sp>
@@ -6458,7 +4093,7 @@
         <p:spPr bwMode="auto">
           <a:xfrm>
             <a:off x="2514600" y="4203700"/>
-            <a:ext cx="387464" cy="279400"/>
+            <a:ext cx="379394" cy="279400"/>
           </a:xfrm>
           <a:prstGeom prst="roundRect">
             <a:avLst>
@@ -6489,7 +4124,7 @@
         </p:nvSpPr>
         <p:spPr bwMode="auto">
           <a:xfrm>
-            <a:off x="2975216" y="4222750"/>
+            <a:off x="2957494" y="4222750"/>
             <a:ext cx="585216" cy="292100"/>
           </a:xfrm>
           <a:prstGeom prst="rect">
@@ -6520,9 +4155,8 @@
                 <a:ea typeface="Carlito"/>
                 <a:cs typeface="Carlito"/>
               </a:rPr>
-              <a:t>2,41</a:t>
-            </a:r>
-            <a:endParaRPr lang="en-US" sz="1500"/>
+              <a:t>2,36</a:t>
+            </a:r>
           </a:p>
         </p:txBody>
       </p:sp>
@@ -6565,9 +4199,8 @@
                 <a:ea typeface="Carlito"/>
                 <a:cs typeface="Carlito"/>
               </a:rPr>
-              <a:t>416 ns</a:t>
-            </a:r>
-            <a:endParaRPr lang="en-US" sz="1400"/>
+              <a:t>425 ns</a:t>
+            </a:r>
           </a:p>
         </p:txBody>
       </p:sp>
@@ -6610,9 +4243,8 @@
                 <a:ea typeface="Carlito"/>
                 <a:cs typeface="Carlito"/>
               </a:rPr>
-              <a:t>+350 ns</a:t>
-            </a:r>
-            <a:endParaRPr lang="en-US" sz="1400"/>
+              <a:t>+359 ns</a:t>
+            </a:r>
           </a:p>
         </p:txBody>
       </p:sp>
@@ -6779,9 +4411,8 @@
                 <a:ea typeface="Carlito"/>
                 <a:cs typeface="Carlito"/>
               </a:rPr>
-              <a:t>Sotto la sua capacità nessuna pipeline respinge un pacchetto: perdita ≤ 0,02% (curve della slide 15).</a:t>
-            </a:r>
-            <a:endParaRPr lang="en-US" sz="1250"/>
+              <a:t>Sotto la sua capacità nessuna pipeline respinge un pacchetto: perdita ≤ 0,05% (curve della slide 15).</a:t>
+            </a:r>
           </a:p>
         </p:txBody>
       </p:sp>
@@ -6948,9 +4579,8 @@
                 <a:ea typeface="Carlito"/>
                 <a:cs typeface="Carlito"/>
               </a:rPr>
-              <a:t>8,69 contro 8,07 M/s, con variazioni dell'1,3 e 1,2% fra i giri: congelare il nodo vale circa 9 ns per pacchetto.</a:t>
-            </a:r>
-            <a:endParaRPr lang="en-US" sz="1300"/>
+              <a:t>8,56 contro 8,04 M/s: congelare il nodo vale circa 7 ns e 206 istruzioni per pacchetto.</a:t>
+            </a:r>
           </a:p>
         </p:txBody>
       </p:sp>
@@ -7109,7 +4739,7 @@
               <a:defRPr/>
             </a:pPr>
             <a:r>
-              <a:rPr lang="en-US" sz="1500">
+              <a:rPr lang="en-US" sz="1500" b="0">
                 <a:solidFill>
                   <a:srgbClr val="222B36"/>
                 </a:solidFill>
@@ -7131,7 +4761,7 @@
               <a:t>~50–60 ns</a:t>
             </a:r>
             <a:r>
-              <a:rPr lang="en-US" sz="1500">
+              <a:rPr lang="en-US" sz="1500" b="0">
                 <a:solidFill>
                   <a:srgbClr val="222B36"/>
                 </a:solidFill>
@@ -7150,10 +4780,10 @@
                 <a:ea typeface="Carlito"/>
                 <a:cs typeface="Carlito"/>
               </a:rPr>
-              <a:t>~230 ns</a:t>
-            </a:r>
-            <a:r>
-              <a:rPr lang="en-US" sz="1500">
+              <a:t>~225 ns</a:t>
+            </a:r>
+            <a:r>
+              <a:rPr lang="en-US" sz="1500" b="0">
                 <a:solidFill>
                   <a:srgbClr val="222B36"/>
                 </a:solidFill>
@@ -7172,10 +4802,10 @@
                 <a:ea typeface="Carlito"/>
                 <a:cs typeface="Carlito"/>
               </a:rPr>
-              <a:t>~350 ns</a:t>
-            </a:r>
-            <a:r>
-              <a:rPr lang="en-US" sz="1500">
+              <a:t>~360 ns</a:t>
+            </a:r>
+            <a:r>
+              <a:rPr lang="en-US" sz="1500" b="0">
                 <a:solidFill>
                   <a:srgbClr val="222B36"/>
                 </a:solidFill>
@@ -7185,7 +4815,6 @@
               </a:rPr>
               <a:t> con anche la profondità (P3).</a:t>
             </a:r>
-            <a:endParaRPr lang="en-US" sz="1500"/>
           </a:p>
         </p:txBody>
       </p:sp>
@@ -7205,7 +4834,7 @@
 </p:sld>
 </file>
 
-<file path=ppt/slides/slide12.xml><?xml version="1.0" encoding="utf-8"?>
+<file path=ppt/slides/slide11.xml><?xml version="1.0" encoding="utf-8"?>
 <p:sld xmlns:a="http://schemas.openxmlformats.org/drawingml/2006/main" xmlns:r="http://schemas.openxmlformats.org/officeDocument/2006/relationships" xmlns:p="http://schemas.openxmlformats.org/presentationml/2006/main" xmlns:m="http://schemas.openxmlformats.org/officeDocument/2006/math" xmlns:w="http://schemas.openxmlformats.org/wordprocessingml/2006/main" xmlns:mc="http://schemas.openxmlformats.org/markup-compatibility/2006" showMasterPhAnim="0" showMasterSp="1" show="1">
   <p:cSld name="Slide 14">
     <p:bg>
@@ -7298,9 +4927,8 @@
                 <a:ea typeface="Carlito"/>
                 <a:cs typeface="Carlito"/>
               </a:rPr>
-              <a:t>4 · I RISULTATI SUL DUAL BOOT · XDP_GEN</a:t>
-            </a:r>
-            <a:endParaRPr lang="en-US" sz="1200"/>
+              <a:t>4 · I RISULTATI · XDP_GEN</a:t>
+            </a:r>
           </a:p>
         </p:txBody>
       </p:sp>
@@ -7588,7 +5216,7 @@
         </p:nvSpPr>
         <p:spPr bwMode="auto">
           <a:xfrm>
-            <a:off x="836016" y="2412702"/>
+            <a:off x="836016" y="2404741"/>
             <a:ext cx="420000" cy="238720"/>
           </a:xfrm>
           <a:prstGeom prst="rect">
@@ -7619,9 +5247,8 @@
                 <a:ea typeface="Carlito"/>
                 <a:cs typeface="Carlito"/>
               </a:rPr>
-              <a:t>29,20</a:t>
-            </a:r>
-            <a:endParaRPr lang="en-US" sz="1200"/>
+              <a:t>29,11</a:t>
+            </a:r>
           </a:p>
         </p:txBody>
       </p:sp>
@@ -7633,8 +5260,8 @@
         </p:nvSpPr>
         <p:spPr bwMode="auto">
           <a:xfrm>
-            <a:off x="736600" y="2627586"/>
-            <a:ext cx="469900" cy="1852974"/>
+            <a:off x="736600" y="2633341"/>
+            <a:ext cx="469900" cy="1847219"/>
           </a:xfrm>
           <a:custGeom>
             <a:avLst/>
@@ -7689,7 +5316,7 @@
         </p:nvSpPr>
         <p:spPr bwMode="auto">
           <a:xfrm>
-            <a:off x="1356717" y="2345436"/>
+            <a:off x="1356717" y="2313998"/>
             <a:ext cx="420000" cy="238720"/>
           </a:xfrm>
           <a:prstGeom prst="rect">
@@ -7720,9 +5347,8 @@
                 <a:ea typeface="Carlito"/>
                 <a:cs typeface="Carlito"/>
               </a:rPr>
-              <a:t>30,26</a:t>
-            </a:r>
-            <a:endParaRPr lang="en-US" sz="1200"/>
+              <a:t>30,54</a:t>
+            </a:r>
           </a:p>
         </p:txBody>
       </p:sp>
@@ -7734,8 +5360,8 @@
         </p:nvSpPr>
         <p:spPr bwMode="auto">
           <a:xfrm>
-            <a:off x="1257300" y="2560320"/>
-            <a:ext cx="469900" cy="1920240"/>
+            <a:off x="1257300" y="2542598"/>
+            <a:ext cx="469900" cy="1937962"/>
           </a:xfrm>
           <a:custGeom>
             <a:avLst/>
@@ -7790,7 +5416,7 @@
         </p:nvSpPr>
         <p:spPr bwMode="auto">
           <a:xfrm>
-            <a:off x="2112367" y="3197043"/>
+            <a:off x="2112367" y="3144009"/>
             <a:ext cx="420000" cy="238720"/>
           </a:xfrm>
           <a:prstGeom prst="rect">
@@ -7821,9 +5447,8 @@
                 <a:ea typeface="Carlito"/>
                 <a:cs typeface="Carlito"/>
               </a:rPr>
-              <a:t>16,84</a:t>
-            </a:r>
-            <a:endParaRPr lang="en-US" sz="1200"/>
+              <a:t>17,46</a:t>
+            </a:r>
           </a:p>
         </p:txBody>
       </p:sp>
@@ -7835,8 +5460,8 @@
         </p:nvSpPr>
         <p:spPr bwMode="auto">
           <a:xfrm>
-            <a:off x="2012949" y="3411927"/>
-            <a:ext cx="469900" cy="1068633"/>
+            <a:off x="2012949" y="3372609"/>
+            <a:ext cx="469900" cy="1107951"/>
           </a:xfrm>
           <a:custGeom>
             <a:avLst/>
@@ -7891,7 +5516,7 @@
         </p:nvSpPr>
         <p:spPr bwMode="auto">
           <a:xfrm>
-            <a:off x="2633067" y="3162776"/>
+            <a:off x="2633067" y="3165585"/>
             <a:ext cx="420000" cy="238720"/>
           </a:xfrm>
           <a:prstGeom prst="rect">
@@ -7922,9 +5547,8 @@
                 <a:ea typeface="Carlito"/>
                 <a:cs typeface="Carlito"/>
               </a:rPr>
-              <a:t>17,38</a:t>
-            </a:r>
-            <a:endParaRPr lang="en-US" sz="1200"/>
+              <a:t>17,12</a:t>
+            </a:r>
           </a:p>
         </p:txBody>
       </p:sp>
@@ -7936,8 +5560,8 @@
         </p:nvSpPr>
         <p:spPr bwMode="auto">
           <a:xfrm>
-            <a:off x="2533650" y="3377660"/>
-            <a:ext cx="469900" cy="1102900"/>
+            <a:off x="2533650" y="3394185"/>
+            <a:ext cx="469900" cy="1086375"/>
           </a:xfrm>
           <a:custGeom>
             <a:avLst/>
@@ -7992,7 +5616,7 @@
         </p:nvSpPr>
         <p:spPr bwMode="auto">
           <a:xfrm>
-            <a:off x="3388717" y="3268116"/>
+            <a:off x="3388717" y="3224599"/>
             <a:ext cx="420000" cy="238720"/>
           </a:xfrm>
           <a:prstGeom prst="rect">
@@ -8023,9 +5647,8 @@
                 <a:ea typeface="Carlito"/>
                 <a:cs typeface="Carlito"/>
               </a:rPr>
-              <a:t>15,72</a:t>
-            </a:r>
-            <a:endParaRPr lang="en-US" sz="1200"/>
+              <a:t>16,19</a:t>
+            </a:r>
           </a:p>
         </p:txBody>
       </p:sp>
@@ -8037,8 +5660,8 @@
         </p:nvSpPr>
         <p:spPr bwMode="auto">
           <a:xfrm>
-            <a:off x="3289300" y="3483000"/>
-            <a:ext cx="469900" cy="997560"/>
+            <a:off x="3289300" y="3453199"/>
+            <a:ext cx="469900" cy="1027361"/>
           </a:xfrm>
           <a:custGeom>
             <a:avLst/>
@@ -8093,7 +5716,7 @@
         </p:nvSpPr>
         <p:spPr bwMode="auto">
           <a:xfrm>
-            <a:off x="3909417" y="3241464"/>
+            <a:off x="3909417" y="3231579"/>
             <a:ext cx="420000" cy="238720"/>
           </a:xfrm>
           <a:prstGeom prst="rect">
@@ -8124,9 +5747,8 @@
                 <a:ea typeface="Carlito"/>
                 <a:cs typeface="Carlito"/>
               </a:rPr>
-              <a:t>16,14</a:t>
-            </a:r>
-            <a:endParaRPr lang="en-US" sz="1200"/>
+              <a:t>16,08</a:t>
+            </a:r>
           </a:p>
         </p:txBody>
       </p:sp>
@@ -8138,8 +5760,8 @@
         </p:nvSpPr>
         <p:spPr bwMode="auto">
           <a:xfrm>
-            <a:off x="3810000" y="3456348"/>
-            <a:ext cx="469900" cy="1024212"/>
+            <a:off x="3810000" y="3460179"/>
+            <a:ext cx="469900" cy="1020381"/>
           </a:xfrm>
           <a:custGeom>
             <a:avLst/>
@@ -8194,7 +5816,7 @@
         </p:nvSpPr>
         <p:spPr bwMode="auto">
           <a:xfrm>
-            <a:off x="4665067" y="3837969"/>
+            <a:off x="4665067" y="3831243"/>
             <a:ext cx="420000" cy="238720"/>
           </a:xfrm>
           <a:prstGeom prst="rect">
@@ -8225,9 +5847,8 @@
                 <a:ea typeface="Carlito"/>
                 <a:cs typeface="Carlito"/>
               </a:rPr>
-              <a:t>6,74</a:t>
-            </a:r>
-            <a:endParaRPr lang="en-US" sz="1200"/>
+              <a:t>6,63</a:t>
+            </a:r>
           </a:p>
         </p:txBody>
       </p:sp>
@@ -8239,8 +5860,8 @@
         </p:nvSpPr>
         <p:spPr bwMode="auto">
           <a:xfrm>
-            <a:off x="4565650" y="4052853"/>
-            <a:ext cx="469900" cy="427707"/>
+            <a:off x="4565650" y="4059843"/>
+            <a:ext cx="469900" cy="420717"/>
           </a:xfrm>
           <a:custGeom>
             <a:avLst/>
@@ -8295,7 +5916,7 @@
         </p:nvSpPr>
         <p:spPr bwMode="auto">
           <a:xfrm>
-            <a:off x="5185767" y="3832893"/>
+            <a:off x="5185767" y="3814110"/>
             <a:ext cx="420000" cy="238720"/>
           </a:xfrm>
           <a:prstGeom prst="rect">
@@ -8326,9 +5947,8 @@
                 <a:ea typeface="Carlito"/>
                 <a:cs typeface="Carlito"/>
               </a:rPr>
-              <a:t>6,82</a:t>
-            </a:r>
-            <a:endParaRPr lang="en-US" sz="1200"/>
+              <a:t>6,90</a:t>
+            </a:r>
           </a:p>
         </p:txBody>
       </p:sp>
@@ -8340,8 +5960,8 @@
         </p:nvSpPr>
         <p:spPr bwMode="auto">
           <a:xfrm>
-            <a:off x="5086350" y="4047777"/>
-            <a:ext cx="469900" cy="432783"/>
+            <a:off x="5086350" y="4042710"/>
+            <a:ext cx="469900" cy="437850"/>
           </a:xfrm>
           <a:custGeom>
             <a:avLst/>
@@ -8396,7 +6016,7 @@
         </p:nvSpPr>
         <p:spPr bwMode="auto">
           <a:xfrm>
-            <a:off x="5941417" y="3975039"/>
+            <a:off x="5941417" y="3960060"/>
             <a:ext cx="420000" cy="238720"/>
           </a:xfrm>
           <a:prstGeom prst="rect">
@@ -8427,9 +6047,8 @@
                 <a:ea typeface="Carlito"/>
                 <a:cs typeface="Carlito"/>
               </a:rPr>
-              <a:t>4,58</a:t>
-            </a:r>
-            <a:endParaRPr lang="en-US" sz="1200"/>
+              <a:t>4,60</a:t>
+            </a:r>
           </a:p>
         </p:txBody>
       </p:sp>
@@ -8441,8 +6060,8 @@
         </p:nvSpPr>
         <p:spPr bwMode="auto">
           <a:xfrm>
-            <a:off x="5842000" y="4189923"/>
-            <a:ext cx="469900" cy="290637"/>
+            <a:off x="5842000" y="4188660"/>
+            <a:ext cx="469900" cy="291900"/>
           </a:xfrm>
           <a:custGeom>
             <a:avLst/>
@@ -8497,7 +6116,7 @@
         </p:nvSpPr>
         <p:spPr bwMode="auto">
           <a:xfrm>
-            <a:off x="6462117" y="3959809"/>
+            <a:off x="6462117" y="3952445"/>
             <a:ext cx="420000" cy="238720"/>
           </a:xfrm>
           <a:prstGeom prst="rect">
@@ -8528,9 +6147,8 @@
                 <a:ea typeface="Carlito"/>
                 <a:cs typeface="Carlito"/>
               </a:rPr>
-              <a:t>4,82</a:t>
-            </a:r>
-            <a:endParaRPr lang="en-US" sz="1200"/>
+              <a:t>4,72</a:t>
+            </a:r>
           </a:p>
         </p:txBody>
       </p:sp>
@@ -8542,8 +6160,8 @@
         </p:nvSpPr>
         <p:spPr bwMode="auto">
           <a:xfrm>
-            <a:off x="6362700" y="4174693"/>
-            <a:ext cx="469900" cy="305867"/>
+            <a:off x="6362700" y="4181045"/>
+            <a:ext cx="469900" cy="299515"/>
           </a:xfrm>
           <a:custGeom>
             <a:avLst/>
@@ -8978,9 +6596,8 @@
                 <a:ea typeface="Carlito"/>
                 <a:cs typeface="Carlito"/>
               </a:rPr>
-              <a:t>Prima i due core del nodo scrivevano nella stessa coda d'uscita, svuotata da un solo core: la baseline elaborava 13,1 M/s e ne arrivavano 4,3. Ora ogni core ha la sua coda e il suo core d'uscita: arrivano tutti.</a:t>
-            </a:r>
-            <a:endParaRPr lang="en-US" sz="1300"/>
+              <a:t>Il cavo virtuale sceglie la coda d'uscita dal core che inoltra: ogni core del nodo ha la sua coda e il suo core d'uscita, così nessuna coda ha due scrittori e arrivano tutti.</a:t>
+            </a:r>
           </a:p>
         </p:txBody>
       </p:sp>
@@ -9147,9 +6764,8 @@
                 <a:ea typeface="Carlito"/>
                 <a:cs typeface="Carlito"/>
               </a:rPr>
-              <a:t>Tempo di CPU per pacchetto di ogni core: 67, 119, 127, 297 e 436 ns, contro 66, 115, 124, 293 e 416 con un core solo (slide 11).</a:t>
-            </a:r>
-            <a:endParaRPr lang="en-US" sz="1300"/>
+              <a:t>Tempo di CPU per pacchetto di ogni core: 67, 114, 124, 301 e 434 ns, contro 66, 117, 124, 290 e 425 con un core solo (slide 10).</a:t>
+            </a:r>
           </a:p>
         </p:txBody>
       </p:sp>
@@ -9308,7 +6924,7 @@
               <a:defRPr/>
             </a:pPr>
             <a:r>
-              <a:rPr lang="en-US" sz="1500">
+              <a:rPr lang="en-US" sz="1500" b="0">
                 <a:solidFill>
                   <a:srgbClr val="222B36"/>
                 </a:solidFill>
@@ -9327,10 +6943,10 @@
                 <a:ea typeface="Carlito"/>
                 <a:cs typeface="Carlito"/>
               </a:rPr>
-              <a:t>95–99% del doppio</a:t>
-            </a:r>
-            <a:r>
-              <a:rPr lang="en-US" sz="1500">
+              <a:t>95–102% del doppio</a:t>
+            </a:r>
+            <a:r>
+              <a:rPr lang="en-US" sz="1500" b="0">
                 <a:solidFill>
                   <a:srgbClr val="222B36"/>
                 </a:solidFill>
@@ -9338,9 +6954,8 @@
                 <a:ea typeface="Carlito"/>
                 <a:cs typeface="Carlito"/>
               </a:rPr>
-              <a:t> di un core: il costo misurato su un core vale per ogni core.</a:t>
-            </a:r>
-            <a:endParaRPr lang="en-US" sz="1500"/>
+              <a:t> di un core: il costo misurato su un core vale per ogni core. Lo stesso su due E-core (99–102%).</a:t>
+            </a:r>
           </a:p>
         </p:txBody>
       </p:sp>
@@ -9383,9 +6998,8 @@
                 <a:ea typeface="Carlito"/>
                 <a:cs typeface="Carlito"/>
               </a:rPr>
-              <a:t>xdp_gen, 2 ottobre, 64 byte, 3 giri · nodo su CPU 6 e 8, un thread per coda, uscita su CPU 3 e 5 · 2 × un core = il doppio della slide 11</a:t>
-            </a:r>
-            <a:endParaRPr lang="en-US" sz="1200"/>
+              <a:t>xdp_gen, 64 byte, 3 giri · nodo su CPU 6 e 8, un thread per coda, uscita su CPU 3 e 5 · 2 × un core = il doppio della slide 10</a:t>
+            </a:r>
           </a:p>
         </p:txBody>
       </p:sp>
@@ -9428,9 +7042,8 @@
                 <a:ea typeface="Carlito"/>
                 <a:cs typeface="Carlito"/>
               </a:rPr>
-              <a:t>12</a:t>
-            </a:r>
-            <a:endParaRPr lang="en-US" sz="1200"/>
+              <a:t>11</a:t>
+            </a:r>
           </a:p>
         </p:txBody>
       </p:sp>
@@ -9447,6 +7060,2339 @@
       <p:transition advClick="1"/>
     </mc:Fallback>
   </mc:AlternateContent>
+</p:sld>
+</file>
+
+<file path=ppt/slides/slide12.xml><?xml version="1.0" encoding="utf-8"?>
+<p:sld xmlns:a="http://schemas.openxmlformats.org/drawingml/2006/main" xmlns:p="http://schemas.openxmlformats.org/presentationml/2006/main" xmlns:r="http://schemas.openxmlformats.org/officeDocument/2006/relationships">
+  <p:cSld>
+    <p:bg>
+      <p:bgPr shadeToTitle="0">
+        <a:solidFill>
+          <a:srgbClr val="FFFFFF"/>
+        </a:solidFill>
+      </p:bgPr>
+    </p:bg>
+    <p:spTree>
+      <p:nvGrpSpPr>
+        <p:cNvPr id="1" name=""/>
+        <p:cNvGrpSpPr/>
+        <p:nvPr/>
+      </p:nvGrpSpPr>
+      <p:grpSpPr/>
+      <p:sp>
+        <p:nvSpPr>
+          <p:cNvPr id="1844083399" name="Shape 0"/>
+          <p:cNvSpPr/>
+          <p:nvPr/>
+        </p:nvSpPr>
+        <p:spPr bwMode="auto">
+          <a:xfrm>
+            <a:off x="0" y="0"/>
+            <a:ext cx="12192000" cy="107949"/>
+          </a:xfrm>
+          <a:prstGeom prst="rect">
+            <a:avLst/>
+          </a:prstGeom>
+          <a:solidFill>
+            <a:srgbClr val="1F3A5F"/>
+          </a:solidFill>
+          <a:ln/>
+        </p:spPr>
+        <p:txBody>
+          <a:bodyPr/>
+          <a:lstStyle/>
+          <a:p>
+            <a:pPr>
+              <a:defRPr/>
+            </a:pPr>
+            <a:endParaRPr lang="it-IT"/>
+          </a:p>
+        </p:txBody>
+      </p:sp>
+      <p:sp>
+        <p:nvSpPr>
+          <p:cNvPr id="49797831" name="Text 1"/>
+          <p:cNvSpPr/>
+          <p:nvPr/>
+        </p:nvSpPr>
+        <p:spPr bwMode="auto">
+          <a:xfrm>
+            <a:off x="546100" y="330200"/>
+            <a:ext cx="11432794" cy="238720"/>
+          </a:xfrm>
+          <a:prstGeom prst="rect">
+            <a:avLst/>
+          </a:prstGeom>
+          <a:noFill/>
+          <a:ln/>
+        </p:spPr>
+        <p:txBody>
+          <a:bodyPr wrap="square" lIns="0" tIns="0" rIns="0" bIns="0" rtlCol="0" anchor="t">
+            <a:normAutofit/>
+          </a:bodyPr>
+          <a:lstStyle/>
+          <a:p>
+            <a:pPr marL="0" indent="0" algn="l">
+              <a:lnSpc>
+                <a:spcPts val="1680"/>
+              </a:lnSpc>
+              <a:buNone/>
+              <a:defRPr/>
+            </a:pPr>
+            <a:r>
+              <a:rPr lang="en-US" sz="1200" b="1" spc="100">
+                <a:solidFill>
+                  <a:srgbClr val="E07A2D"/>
+                </a:solidFill>
+                <a:latin typeface="Carlito"/>
+                <a:ea typeface="Carlito"/>
+                <a:cs typeface="Carlito"/>
+              </a:rPr>
+              <a:t>4 · I RISULTATI · I CORE LENTI</a:t>
+            </a:r>
+          </a:p>
+        </p:txBody>
+      </p:sp>
+      <p:sp>
+        <p:nvSpPr>
+          <p:cNvPr id="536327148" name="Text 2"/>
+          <p:cNvSpPr/>
+          <p:nvPr/>
+        </p:nvSpPr>
+        <p:spPr bwMode="auto">
+          <a:xfrm>
+            <a:off x="546100" y="584200"/>
+            <a:ext cx="11432794" cy="444500"/>
+          </a:xfrm>
+          <a:prstGeom prst="rect">
+            <a:avLst/>
+          </a:prstGeom>
+          <a:noFill/>
+          <a:ln/>
+        </p:spPr>
+        <p:txBody>
+          <a:bodyPr wrap="square" lIns="0" tIns="0" rIns="0" bIns="0" rtlCol="0" anchor="t">
+            <a:normAutofit/>
+          </a:bodyPr>
+          <a:lstStyle/>
+          <a:p>
+            <a:pPr marL="0" indent="0" algn="l">
+              <a:lnSpc>
+                <a:spcPts val="3300"/>
+              </a:lnSpc>
+              <a:buNone/>
+              <a:defRPr/>
+            </a:pPr>
+            <a:r>
+              <a:rPr lang="en-US" sz="3000" b="1">
+                <a:solidFill>
+                  <a:srgbClr val="1F3A5F"/>
+                </a:solidFill>
+                <a:latin typeface="Carlito"/>
+                <a:ea typeface="Carlito"/>
+                <a:cs typeface="Carlito"/>
+              </a:rPr>
+              <a:t>Su un E-core il nodo regge dal 61 all'82%</a:t>
+            </a:r>
+          </a:p>
+        </p:txBody>
+      </p:sp>
+      <p:sp>
+        <p:nvSpPr>
+          <p:cNvPr id="893306286" name="Text 3"/>
+          <p:cNvSpPr/>
+          <p:nvPr/>
+        </p:nvSpPr>
+        <p:spPr bwMode="auto">
+          <a:xfrm>
+            <a:off x="546100" y="6426200"/>
+            <a:ext cx="10072370" cy="238720"/>
+          </a:xfrm>
+          <a:prstGeom prst="rect">
+            <a:avLst/>
+          </a:prstGeom>
+          <a:noFill/>
+          <a:ln/>
+        </p:spPr>
+        <p:txBody>
+          <a:bodyPr wrap="square" lIns="0" tIns="0" rIns="0" bIns="0" rtlCol="0" anchor="t">
+            <a:normAutofit/>
+          </a:bodyPr>
+          <a:lstStyle/>
+          <a:p>
+            <a:pPr marL="0" indent="0" algn="l">
+              <a:lnSpc>
+                <a:spcPts val="1680"/>
+              </a:lnSpc>
+              <a:buNone/>
+              <a:defRPr/>
+            </a:pPr>
+            <a:r>
+              <a:rPr lang="en-US" sz="1200" i="1">
+                <a:solidFill>
+                  <a:srgbClr val="6B7C93"/>
+                </a:solidFill>
+                <a:latin typeface="Carlito"/>
+                <a:ea typeface="Carlito"/>
+                <a:cs typeface="Carlito"/>
+              </a:rPr>
+              <a:t>E-core (CPU 12) a 3,5 GHz, il suo modulo a riposo · generatore e uscita su P-core · 3 giri, 64 byte · IPC dai contatori hardware</a:t>
+            </a:r>
+          </a:p>
+        </p:txBody>
+      </p:sp>
+      <p:sp>
+        <p:nvSpPr>
+          <p:cNvPr id="1910261858" name="Text 4"/>
+          <p:cNvSpPr/>
+          <p:nvPr/>
+        </p:nvSpPr>
+        <p:spPr bwMode="auto">
+          <a:xfrm>
+            <a:off x="10960099" y="6426200"/>
+            <a:ext cx="685800" cy="238720"/>
+          </a:xfrm>
+          <a:prstGeom prst="rect">
+            <a:avLst/>
+          </a:prstGeom>
+          <a:noFill/>
+          <a:ln/>
+        </p:spPr>
+        <p:txBody>
+          <a:bodyPr wrap="square" lIns="0" tIns="0" rIns="0" bIns="0" rtlCol="0" anchor="t">
+            <a:normAutofit/>
+          </a:bodyPr>
+          <a:lstStyle/>
+          <a:p>
+            <a:pPr marL="0" indent="0" algn="r">
+              <a:lnSpc>
+                <a:spcPts val="1680"/>
+              </a:lnSpc>
+              <a:buNone/>
+              <a:defRPr/>
+            </a:pPr>
+            <a:r>
+              <a:rPr lang="en-US" sz="1200">
+                <a:solidFill>
+                  <a:srgbClr val="6B7C93"/>
+                </a:solidFill>
+                <a:latin typeface="Carlito"/>
+                <a:ea typeface="Carlito"/>
+                <a:cs typeface="Carlito"/>
+              </a:rPr>
+              <a:t>12</a:t>
+            </a:r>
+          </a:p>
+        </p:txBody>
+      </p:sp>
+      <p:sp>
+        <p:nvSpPr>
+          <p:cNvPr id="861404636" name="Text 5"/>
+          <p:cNvSpPr/>
+          <p:nvPr/>
+        </p:nvSpPr>
+        <p:spPr bwMode="auto">
+          <a:xfrm>
+            <a:off x="2599816" y="1653579"/>
+            <a:ext cx="3662680" cy="238720"/>
+          </a:xfrm>
+          <a:prstGeom prst="rect">
+            <a:avLst/>
+          </a:prstGeom>
+          <a:noFill/>
+          <a:ln/>
+        </p:spPr>
+        <p:txBody>
+          <a:bodyPr wrap="square" lIns="0" tIns="0" rIns="0" bIns="0" rtlCol="0" anchor="t">
+            <a:normAutofit/>
+          </a:bodyPr>
+          <a:lstStyle/>
+          <a:p>
+            <a:pPr marL="0" indent="0" algn="l">
+              <a:lnSpc>
+                <a:spcPts val="1680"/>
+              </a:lnSpc>
+              <a:buNone/>
+              <a:defRPr/>
+            </a:pPr>
+            <a:r>
+              <a:rPr lang="en-US" sz="1200">
+                <a:solidFill>
+                  <a:srgbClr val="6B7C93"/>
+                </a:solidFill>
+                <a:latin typeface="Carlito"/>
+                <a:ea typeface="Carlito"/>
+                <a:cs typeface="Carlito"/>
+              </a:rPr>
+              <a:t>milioni di pacchetti al secondo, E-core</a:t>
+            </a:r>
+          </a:p>
+        </p:txBody>
+      </p:sp>
+      <p:sp>
+        <p:nvSpPr>
+          <p:cNvPr id="1109358125" name="Text 6"/>
+          <p:cNvSpPr/>
+          <p:nvPr/>
+        </p:nvSpPr>
+        <p:spPr bwMode="auto">
+          <a:xfrm>
+            <a:off x="6262497" y="1653579"/>
+            <a:ext cx="1003300" cy="238720"/>
+          </a:xfrm>
+          <a:prstGeom prst="rect">
+            <a:avLst/>
+          </a:prstGeom>
+          <a:noFill/>
+          <a:ln/>
+        </p:spPr>
+        <p:txBody>
+          <a:bodyPr wrap="square" lIns="0" tIns="0" rIns="0" bIns="0" rtlCol="0" anchor="t">
+            <a:normAutofit/>
+          </a:bodyPr>
+          <a:lstStyle/>
+          <a:p>
+            <a:pPr marL="0" indent="0" algn="r">
+              <a:lnSpc>
+                <a:spcPts val="1680"/>
+              </a:lnSpc>
+              <a:buNone/>
+              <a:defRPr/>
+            </a:pPr>
+            <a:r>
+              <a:rPr lang="en-US" sz="1200">
+                <a:solidFill>
+                  <a:srgbClr val="6B7C93"/>
+                </a:solidFill>
+                <a:latin typeface="Carlito"/>
+                <a:ea typeface="Carlito"/>
+                <a:cs typeface="Carlito"/>
+              </a:rPr>
+              <a:t>ns/pacchetto</a:t>
+            </a:r>
+          </a:p>
+        </p:txBody>
+      </p:sp>
+      <p:sp>
+        <p:nvSpPr>
+          <p:cNvPr id="2072870536" name="Text 7"/>
+          <p:cNvSpPr/>
+          <p:nvPr/>
+        </p:nvSpPr>
+        <p:spPr bwMode="auto">
+          <a:xfrm flipH="0" flipV="0">
+            <a:off x="7551152" y="1650999"/>
+            <a:ext cx="952499" cy="238719"/>
+          </a:xfrm>
+          <a:prstGeom prst="rect">
+            <a:avLst/>
+          </a:prstGeom>
+          <a:noFill/>
+          <a:ln/>
+        </p:spPr>
+        <p:txBody>
+          <a:bodyPr wrap="square" lIns="0" tIns="0" rIns="0" bIns="0" rtlCol="0" anchor="t">
+            <a:normAutofit/>
+          </a:bodyPr>
+          <a:lstStyle/>
+          <a:p>
+            <a:pPr marL="0" indent="0" algn="r">
+              <a:lnSpc>
+                <a:spcPts val="1680"/>
+              </a:lnSpc>
+              <a:buNone/>
+              <a:defRPr/>
+            </a:pPr>
+            <a:r>
+              <a:rPr lang="en-US" sz="1200">
+                <a:solidFill>
+                  <a:srgbClr val="6B7C93"/>
+                </a:solidFill>
+                <a:latin typeface="Carlito"/>
+                <a:ea typeface="Carlito"/>
+                <a:cs typeface="Carlito"/>
+              </a:rPr>
+              <a:t>rispetto al P-core</a:t>
+            </a:r>
+          </a:p>
+        </p:txBody>
+      </p:sp>
+      <p:sp>
+        <p:nvSpPr>
+          <p:cNvPr id="445628566" name="Shape 8"/>
+          <p:cNvSpPr/>
+          <p:nvPr/>
+        </p:nvSpPr>
+        <p:spPr bwMode="auto">
+          <a:xfrm>
+            <a:off x="546100" y="2038288"/>
+            <a:ext cx="165100" cy="165100"/>
+          </a:xfrm>
+          <a:prstGeom prst="roundRect">
+            <a:avLst>
+              <a:gd name="adj" fmla="val 26923"/>
+            </a:avLst>
+          </a:prstGeom>
+          <a:solidFill>
+            <a:srgbClr val="6B7C93"/>
+          </a:solidFill>
+          <a:ln/>
+        </p:spPr>
+        <p:txBody>
+          <a:bodyPr/>
+          <a:lstStyle/>
+          <a:p>
+            <a:pPr>
+              <a:defRPr/>
+            </a:pPr>
+            <a:endParaRPr lang="it-IT"/>
+          </a:p>
+        </p:txBody>
+      </p:sp>
+      <p:sp>
+        <p:nvSpPr>
+          <p:cNvPr id="1192535326" name="Text 9"/>
+          <p:cNvSpPr/>
+          <p:nvPr/>
+        </p:nvSpPr>
+        <p:spPr bwMode="auto">
+          <a:xfrm>
+            <a:off x="787400" y="1996418"/>
+            <a:ext cx="510514" cy="274307"/>
+          </a:xfrm>
+          <a:prstGeom prst="rect">
+            <a:avLst/>
+          </a:prstGeom>
+          <a:noFill/>
+          <a:ln/>
+        </p:spPr>
+        <p:txBody>
+          <a:bodyPr wrap="square" lIns="0" tIns="0" rIns="0" bIns="0" rtlCol="0" anchor="t">
+            <a:normAutofit/>
+          </a:bodyPr>
+          <a:lstStyle/>
+          <a:p>
+            <a:pPr marL="0" indent="0" algn="l">
+              <a:lnSpc>
+                <a:spcPts val="1960"/>
+              </a:lnSpc>
+              <a:buNone/>
+              <a:defRPr/>
+            </a:pPr>
+            <a:r>
+              <a:rPr lang="en-US" sz="1400" b="1">
+                <a:solidFill>
+                  <a:srgbClr val="222B36"/>
+                </a:solidFill>
+                <a:latin typeface="Carlito"/>
+                <a:ea typeface="Carlito"/>
+                <a:cs typeface="Carlito"/>
+              </a:rPr>
+              <a:t>rxonly</a:t>
+            </a:r>
+            <a:endParaRPr lang="en-US" sz="1400"/>
+          </a:p>
+        </p:txBody>
+      </p:sp>
+      <p:sp>
+        <p:nvSpPr>
+          <p:cNvPr id="610077576" name="Shape 10"/>
+          <p:cNvSpPr/>
+          <p:nvPr/>
+        </p:nvSpPr>
+        <p:spPr bwMode="auto">
+          <a:xfrm>
+            <a:off x="2514600" y="1917700"/>
+            <a:ext cx="2054517" cy="279400"/>
+          </a:xfrm>
+          <a:prstGeom prst="roundRect">
+            <a:avLst>
+              <a:gd name="adj" fmla="val 13636"/>
+            </a:avLst>
+          </a:prstGeom>
+          <a:solidFill>
+            <a:srgbClr val="6B7C93"/>
+          </a:solidFill>
+          <a:ln/>
+        </p:spPr>
+        <p:txBody>
+          <a:bodyPr/>
+          <a:lstStyle/>
+          <a:p>
+            <a:pPr>
+              <a:defRPr/>
+            </a:pPr>
+            <a:endParaRPr lang="it-IT"/>
+          </a:p>
+        </p:txBody>
+      </p:sp>
+      <p:sp>
+        <p:nvSpPr>
+          <p:cNvPr id="1298618175" name="Text 11"/>
+          <p:cNvSpPr/>
+          <p:nvPr/>
+        </p:nvSpPr>
+        <p:spPr bwMode="auto">
+          <a:xfrm>
+            <a:off x="4632617" y="1936750"/>
+            <a:ext cx="585216" cy="292100"/>
+          </a:xfrm>
+          <a:prstGeom prst="rect">
+            <a:avLst/>
+          </a:prstGeom>
+          <a:noFill/>
+          <a:ln/>
+        </p:spPr>
+        <p:txBody>
+          <a:bodyPr wrap="square" lIns="0" tIns="0" rIns="0" bIns="0" rtlCol="0" anchor="t">
+            <a:normAutofit/>
+          </a:bodyPr>
+          <a:lstStyle/>
+          <a:p>
+            <a:pPr marL="0" indent="0" algn="l">
+              <a:lnSpc>
+                <a:spcPts val="2100"/>
+              </a:lnSpc>
+              <a:buNone/>
+              <a:defRPr/>
+            </a:pPr>
+            <a:r>
+              <a:rPr lang="en-US" sz="1500" b="1">
+                <a:solidFill>
+                  <a:srgbClr val="222B36"/>
+                </a:solidFill>
+                <a:latin typeface="Carlito"/>
+                <a:ea typeface="Carlito"/>
+                <a:cs typeface="Carlito"/>
+              </a:rPr>
+              <a:t>12,78</a:t>
+            </a:r>
+          </a:p>
+        </p:txBody>
+      </p:sp>
+      <p:sp>
+        <p:nvSpPr>
+          <p:cNvPr id="1413649438" name="Text 12"/>
+          <p:cNvSpPr/>
+          <p:nvPr/>
+        </p:nvSpPr>
+        <p:spPr bwMode="auto">
+          <a:xfrm>
+            <a:off x="6146800" y="1996418"/>
+            <a:ext cx="1003300" cy="274307"/>
+          </a:xfrm>
+          <a:prstGeom prst="rect">
+            <a:avLst/>
+          </a:prstGeom>
+          <a:noFill/>
+          <a:ln/>
+        </p:spPr>
+        <p:txBody>
+          <a:bodyPr wrap="square" lIns="0" tIns="0" rIns="0" bIns="0" rtlCol="0" anchor="t">
+            <a:normAutofit/>
+          </a:bodyPr>
+          <a:lstStyle/>
+          <a:p>
+            <a:pPr marL="0" indent="0" algn="r">
+              <a:lnSpc>
+                <a:spcPts val="1960"/>
+              </a:lnSpc>
+              <a:buNone/>
+              <a:defRPr/>
+            </a:pPr>
+            <a:r>
+              <a:rPr lang="en-US" sz="1400">
+                <a:solidFill>
+                  <a:srgbClr val="222B36"/>
+                </a:solidFill>
+                <a:latin typeface="Carlito"/>
+                <a:ea typeface="Carlito"/>
+                <a:cs typeface="Carlito"/>
+              </a:rPr>
+              <a:t>78 ns</a:t>
+            </a:r>
+          </a:p>
+        </p:txBody>
+      </p:sp>
+      <p:sp>
+        <p:nvSpPr>
+          <p:cNvPr id="90523107" name="Text 13"/>
+          <p:cNvSpPr/>
+          <p:nvPr/>
+        </p:nvSpPr>
+        <p:spPr bwMode="auto">
+          <a:xfrm>
+            <a:off x="7226300" y="1996418"/>
+            <a:ext cx="1193800" cy="274307"/>
+          </a:xfrm>
+          <a:prstGeom prst="rect">
+            <a:avLst/>
+          </a:prstGeom>
+          <a:noFill/>
+          <a:ln/>
+        </p:spPr>
+        <p:txBody>
+          <a:bodyPr wrap="square" lIns="0" tIns="0" rIns="0" bIns="0" rtlCol="0" anchor="t">
+            <a:normAutofit/>
+          </a:bodyPr>
+          <a:lstStyle/>
+          <a:p>
+            <a:pPr marL="0" indent="0" algn="r">
+              <a:lnSpc>
+                <a:spcPts val="1960"/>
+              </a:lnSpc>
+              <a:buNone/>
+              <a:defRPr/>
+            </a:pPr>
+            <a:r>
+              <a:rPr lang="en-US" sz="1400" b="1">
+                <a:solidFill>
+                  <a:srgbClr val="6B7C93"/>
+                </a:solidFill>
+                <a:latin typeface="Carlito"/>
+                <a:ea typeface="Carlito"/>
+                <a:cs typeface="Carlito"/>
+              </a:rPr>
+              <a:t>0,66</a:t>
+            </a:r>
+          </a:p>
+        </p:txBody>
+      </p:sp>
+      <p:sp>
+        <p:nvSpPr>
+          <p:cNvPr id="1112953265" name="Shape 14"/>
+          <p:cNvSpPr/>
+          <p:nvPr/>
+        </p:nvSpPr>
+        <p:spPr bwMode="auto">
+          <a:xfrm>
+            <a:off x="546100" y="2495488"/>
+            <a:ext cx="165100" cy="165100"/>
+          </a:xfrm>
+          <a:prstGeom prst="roundRect">
+            <a:avLst>
+              <a:gd name="adj" fmla="val 26923"/>
+            </a:avLst>
+          </a:prstGeom>
+          <a:solidFill>
+            <a:srgbClr val="8794A6"/>
+          </a:solidFill>
+          <a:ln/>
+        </p:spPr>
+        <p:txBody>
+          <a:bodyPr/>
+          <a:lstStyle/>
+          <a:p>
+            <a:pPr>
+              <a:defRPr/>
+            </a:pPr>
+            <a:endParaRPr lang="it-IT"/>
+          </a:p>
+        </p:txBody>
+      </p:sp>
+      <p:sp>
+        <p:nvSpPr>
+          <p:cNvPr id="1723666099" name="Text 15"/>
+          <p:cNvSpPr/>
+          <p:nvPr/>
+        </p:nvSpPr>
+        <p:spPr bwMode="auto">
+          <a:xfrm>
+            <a:off x="787400" y="2453618"/>
+            <a:ext cx="666683" cy="274307"/>
+          </a:xfrm>
+          <a:prstGeom prst="rect">
+            <a:avLst/>
+          </a:prstGeom>
+          <a:noFill/>
+          <a:ln/>
+        </p:spPr>
+        <p:txBody>
+          <a:bodyPr wrap="square" lIns="0" tIns="0" rIns="0" bIns="0" rtlCol="0" anchor="t">
+            <a:normAutofit/>
+          </a:bodyPr>
+          <a:lstStyle/>
+          <a:p>
+            <a:pPr marL="0" indent="0" algn="l">
+              <a:lnSpc>
+                <a:spcPts val="1960"/>
+              </a:lnSpc>
+              <a:buNone/>
+              <a:defRPr/>
+            </a:pPr>
+            <a:r>
+              <a:rPr lang="en-US" sz="1400" b="1">
+                <a:solidFill>
+                  <a:srgbClr val="222B36"/>
+                </a:solidFill>
+                <a:latin typeface="Carlito"/>
+                <a:ea typeface="Carlito"/>
+                <a:cs typeface="Carlito"/>
+              </a:rPr>
+              <a:t>baseline</a:t>
+            </a:r>
+            <a:endParaRPr lang="en-US" sz="1400"/>
+          </a:p>
+        </p:txBody>
+      </p:sp>
+      <p:sp>
+        <p:nvSpPr>
+          <p:cNvPr id="1560298444" name="Shape 16"/>
+          <p:cNvSpPr/>
+          <p:nvPr/>
+        </p:nvSpPr>
+        <p:spPr bwMode="auto">
+          <a:xfrm>
+            <a:off x="2514600" y="2374900"/>
+            <a:ext cx="1509540" cy="279400"/>
+          </a:xfrm>
+          <a:prstGeom prst="roundRect">
+            <a:avLst>
+              <a:gd name="adj" fmla="val 13636"/>
+            </a:avLst>
+          </a:prstGeom>
+          <a:solidFill>
+            <a:srgbClr val="8794A6"/>
+          </a:solidFill>
+          <a:ln/>
+        </p:spPr>
+        <p:txBody>
+          <a:bodyPr/>
+          <a:lstStyle/>
+          <a:p>
+            <a:pPr>
+              <a:defRPr/>
+            </a:pPr>
+            <a:endParaRPr lang="it-IT"/>
+          </a:p>
+        </p:txBody>
+      </p:sp>
+      <p:sp>
+        <p:nvSpPr>
+          <p:cNvPr id="272694460" name="Text 17"/>
+          <p:cNvSpPr/>
+          <p:nvPr/>
+        </p:nvSpPr>
+        <p:spPr bwMode="auto">
+          <a:xfrm>
+            <a:off x="4087640" y="2393950"/>
+            <a:ext cx="585216" cy="292100"/>
+          </a:xfrm>
+          <a:prstGeom prst="rect">
+            <a:avLst/>
+          </a:prstGeom>
+          <a:noFill/>
+          <a:ln/>
+        </p:spPr>
+        <p:txBody>
+          <a:bodyPr wrap="square" lIns="0" tIns="0" rIns="0" bIns="0" rtlCol="0" anchor="t">
+            <a:normAutofit/>
+          </a:bodyPr>
+          <a:lstStyle/>
+          <a:p>
+            <a:pPr marL="0" indent="0" algn="l">
+              <a:lnSpc>
+                <a:spcPts val="2100"/>
+              </a:lnSpc>
+              <a:buNone/>
+              <a:defRPr/>
+            </a:pPr>
+            <a:r>
+              <a:rPr lang="en-US" sz="1500" b="1">
+                <a:solidFill>
+                  <a:srgbClr val="222B36"/>
+                </a:solidFill>
+                <a:latin typeface="Carlito"/>
+                <a:ea typeface="Carlito"/>
+                <a:cs typeface="Carlito"/>
+              </a:rPr>
+              <a:t>9,39</a:t>
+            </a:r>
+          </a:p>
+        </p:txBody>
+      </p:sp>
+      <p:sp>
+        <p:nvSpPr>
+          <p:cNvPr id="960834326" name="Text 18"/>
+          <p:cNvSpPr/>
+          <p:nvPr/>
+        </p:nvSpPr>
+        <p:spPr bwMode="auto">
+          <a:xfrm>
+            <a:off x="6146800" y="2453618"/>
+            <a:ext cx="1003300" cy="274307"/>
+          </a:xfrm>
+          <a:prstGeom prst="rect">
+            <a:avLst/>
+          </a:prstGeom>
+          <a:noFill/>
+          <a:ln/>
+        </p:spPr>
+        <p:txBody>
+          <a:bodyPr wrap="square" lIns="0" tIns="0" rIns="0" bIns="0" rtlCol="0" anchor="t">
+            <a:normAutofit/>
+          </a:bodyPr>
+          <a:lstStyle/>
+          <a:p>
+            <a:pPr marL="0" indent="0" algn="r">
+              <a:lnSpc>
+                <a:spcPts val="1960"/>
+              </a:lnSpc>
+              <a:buNone/>
+              <a:defRPr/>
+            </a:pPr>
+            <a:r>
+              <a:rPr lang="en-US" sz="1400">
+                <a:solidFill>
+                  <a:srgbClr val="222B36"/>
+                </a:solidFill>
+                <a:latin typeface="Carlito"/>
+                <a:ea typeface="Carlito"/>
+                <a:cs typeface="Carlito"/>
+              </a:rPr>
+              <a:t>106 ns</a:t>
+            </a:r>
+          </a:p>
+        </p:txBody>
+      </p:sp>
+      <p:sp>
+        <p:nvSpPr>
+          <p:cNvPr id="1798542865" name="Text 19"/>
+          <p:cNvSpPr/>
+          <p:nvPr/>
+        </p:nvSpPr>
+        <p:spPr bwMode="auto">
+          <a:xfrm>
+            <a:off x="7226300" y="2453618"/>
+            <a:ext cx="1193800" cy="274307"/>
+          </a:xfrm>
+          <a:prstGeom prst="rect">
+            <a:avLst/>
+          </a:prstGeom>
+          <a:noFill/>
+          <a:ln/>
+        </p:spPr>
+        <p:txBody>
+          <a:bodyPr wrap="square" lIns="0" tIns="0" rIns="0" bIns="0" rtlCol="0" anchor="t">
+            <a:normAutofit/>
+          </a:bodyPr>
+          <a:lstStyle/>
+          <a:p>
+            <a:pPr marL="0" indent="0" algn="r">
+              <a:lnSpc>
+                <a:spcPts val="1960"/>
+              </a:lnSpc>
+              <a:buNone/>
+              <a:defRPr/>
+            </a:pPr>
+            <a:r>
+              <a:rPr lang="en-US" sz="1400" b="1">
+                <a:solidFill>
+                  <a:srgbClr val="6B7C93"/>
+                </a:solidFill>
+                <a:latin typeface="Carlito"/>
+                <a:ea typeface="Carlito"/>
+                <a:cs typeface="Carlito"/>
+              </a:rPr>
+              <a:t>0,61</a:t>
+            </a:r>
+          </a:p>
+        </p:txBody>
+      </p:sp>
+      <p:sp>
+        <p:nvSpPr>
+          <p:cNvPr id="1304371161" name="Shape 20"/>
+          <p:cNvSpPr/>
+          <p:nvPr/>
+        </p:nvSpPr>
+        <p:spPr bwMode="auto">
+          <a:xfrm>
+            <a:off x="546100" y="2952688"/>
+            <a:ext cx="165100" cy="165100"/>
+          </a:xfrm>
+          <a:prstGeom prst="roundRect">
+            <a:avLst>
+              <a:gd name="adj" fmla="val 26923"/>
+            </a:avLst>
+          </a:prstGeom>
+          <a:solidFill>
+            <a:srgbClr val="C8551E"/>
+          </a:solidFill>
+          <a:ln/>
+        </p:spPr>
+        <p:txBody>
+          <a:bodyPr/>
+          <a:lstStyle/>
+          <a:p>
+            <a:pPr>
+              <a:defRPr/>
+            </a:pPr>
+            <a:endParaRPr lang="it-IT"/>
+          </a:p>
+        </p:txBody>
+      </p:sp>
+      <p:sp>
+        <p:nvSpPr>
+          <p:cNvPr id="1205013140" name="Text 21"/>
+          <p:cNvSpPr/>
+          <p:nvPr/>
+        </p:nvSpPr>
+        <p:spPr bwMode="auto">
+          <a:xfrm>
+            <a:off x="787400" y="2910818"/>
+            <a:ext cx="755981" cy="274307"/>
+          </a:xfrm>
+          <a:prstGeom prst="rect">
+            <a:avLst/>
+          </a:prstGeom>
+          <a:noFill/>
+          <a:ln/>
+        </p:spPr>
+        <p:txBody>
+          <a:bodyPr wrap="square" lIns="0" tIns="0" rIns="0" bIns="0" rtlCol="0" anchor="t">
+            <a:normAutofit/>
+          </a:bodyPr>
+          <a:lstStyle/>
+          <a:p>
+            <a:pPr marL="0" indent="0" algn="l">
+              <a:lnSpc>
+                <a:spcPts val="1960"/>
+              </a:lnSpc>
+              <a:buNone/>
+              <a:defRPr/>
+            </a:pPr>
+            <a:r>
+              <a:rPr lang="en-US" sz="1400" b="1">
+                <a:solidFill>
+                  <a:srgbClr val="222B36"/>
+                </a:solidFill>
+                <a:latin typeface="Carlito"/>
+                <a:ea typeface="Carlito"/>
+                <a:cs typeface="Carlito"/>
+              </a:rPr>
+              <a:t>P1 statica</a:t>
+            </a:r>
+            <a:endParaRPr lang="en-US" sz="1400"/>
+          </a:p>
+        </p:txBody>
+      </p:sp>
+      <p:sp>
+        <p:nvSpPr>
+          <p:cNvPr id="1482702441" name="Shape 22"/>
+          <p:cNvSpPr/>
+          <p:nvPr/>
+        </p:nvSpPr>
+        <p:spPr bwMode="auto">
+          <a:xfrm>
+            <a:off x="2514600" y="2832100"/>
+            <a:ext cx="1020828" cy="279400"/>
+          </a:xfrm>
+          <a:prstGeom prst="roundRect">
+            <a:avLst>
+              <a:gd name="adj" fmla="val 13636"/>
+            </a:avLst>
+          </a:prstGeom>
+          <a:solidFill>
+            <a:srgbClr val="C8551E"/>
+          </a:solidFill>
+          <a:ln/>
+        </p:spPr>
+        <p:txBody>
+          <a:bodyPr/>
+          <a:lstStyle/>
+          <a:p>
+            <a:pPr>
+              <a:defRPr/>
+            </a:pPr>
+            <a:endParaRPr lang="it-IT"/>
+          </a:p>
+        </p:txBody>
+      </p:sp>
+      <p:sp>
+        <p:nvSpPr>
+          <p:cNvPr id="1000272069" name="Text 23"/>
+          <p:cNvSpPr/>
+          <p:nvPr/>
+        </p:nvSpPr>
+        <p:spPr bwMode="auto">
+          <a:xfrm>
+            <a:off x="3598928" y="2851150"/>
+            <a:ext cx="585216" cy="292100"/>
+          </a:xfrm>
+          <a:prstGeom prst="rect">
+            <a:avLst/>
+          </a:prstGeom>
+          <a:noFill/>
+          <a:ln/>
+        </p:spPr>
+        <p:txBody>
+          <a:bodyPr wrap="square" lIns="0" tIns="0" rIns="0" bIns="0" rtlCol="0" anchor="t">
+            <a:normAutofit/>
+          </a:bodyPr>
+          <a:lstStyle/>
+          <a:p>
+            <a:pPr marL="0" indent="0" algn="l">
+              <a:lnSpc>
+                <a:spcPts val="2100"/>
+              </a:lnSpc>
+              <a:buNone/>
+              <a:defRPr/>
+            </a:pPr>
+            <a:r>
+              <a:rPr lang="en-US" sz="1500" b="1">
+                <a:solidFill>
+                  <a:srgbClr val="222B36"/>
+                </a:solidFill>
+                <a:latin typeface="Carlito"/>
+                <a:ea typeface="Carlito"/>
+                <a:cs typeface="Carlito"/>
+              </a:rPr>
+              <a:t>6,35</a:t>
+            </a:r>
+          </a:p>
+        </p:txBody>
+      </p:sp>
+      <p:sp>
+        <p:nvSpPr>
+          <p:cNvPr id="1020742350" name="Text 24"/>
+          <p:cNvSpPr/>
+          <p:nvPr/>
+        </p:nvSpPr>
+        <p:spPr bwMode="auto">
+          <a:xfrm>
+            <a:off x="6146800" y="2910818"/>
+            <a:ext cx="1003300" cy="274307"/>
+          </a:xfrm>
+          <a:prstGeom prst="rect">
+            <a:avLst/>
+          </a:prstGeom>
+          <a:noFill/>
+          <a:ln/>
+        </p:spPr>
+        <p:txBody>
+          <a:bodyPr wrap="square" lIns="0" tIns="0" rIns="0" bIns="0" rtlCol="0" anchor="t">
+            <a:normAutofit/>
+          </a:bodyPr>
+          <a:lstStyle/>
+          <a:p>
+            <a:pPr marL="0" indent="0" algn="r">
+              <a:lnSpc>
+                <a:spcPts val="1960"/>
+              </a:lnSpc>
+              <a:buNone/>
+              <a:defRPr/>
+            </a:pPr>
+            <a:r>
+              <a:rPr lang="en-US" sz="1400">
+                <a:solidFill>
+                  <a:srgbClr val="222B36"/>
+                </a:solidFill>
+                <a:latin typeface="Carlito"/>
+                <a:ea typeface="Carlito"/>
+                <a:cs typeface="Carlito"/>
+              </a:rPr>
+              <a:t>158 ns</a:t>
+            </a:r>
+          </a:p>
+        </p:txBody>
+      </p:sp>
+      <p:sp>
+        <p:nvSpPr>
+          <p:cNvPr id="817162400" name="Text 25"/>
+          <p:cNvSpPr/>
+          <p:nvPr/>
+        </p:nvSpPr>
+        <p:spPr bwMode="auto">
+          <a:xfrm>
+            <a:off x="7226300" y="2910818"/>
+            <a:ext cx="1193800" cy="274307"/>
+          </a:xfrm>
+          <a:prstGeom prst="rect">
+            <a:avLst/>
+          </a:prstGeom>
+          <a:noFill/>
+          <a:ln/>
+        </p:spPr>
+        <p:txBody>
+          <a:bodyPr wrap="square" lIns="0" tIns="0" rIns="0" bIns="0" rtlCol="0" anchor="t">
+            <a:normAutofit/>
+          </a:bodyPr>
+          <a:lstStyle/>
+          <a:p>
+            <a:pPr marL="0" indent="0" algn="r">
+              <a:lnSpc>
+                <a:spcPts val="1960"/>
+              </a:lnSpc>
+              <a:buNone/>
+              <a:defRPr/>
+            </a:pPr>
+            <a:r>
+              <a:rPr lang="en-US" sz="1400" b="1">
+                <a:solidFill>
+                  <a:srgbClr val="1F3A5F"/>
+                </a:solidFill>
+                <a:latin typeface="Carlito"/>
+                <a:ea typeface="Carlito"/>
+                <a:cs typeface="Carlito"/>
+              </a:rPr>
+              <a:t>0,74</a:t>
+            </a:r>
+          </a:p>
+        </p:txBody>
+      </p:sp>
+      <p:sp>
+        <p:nvSpPr>
+          <p:cNvPr id="758748805" name="Shape 26"/>
+          <p:cNvSpPr/>
+          <p:nvPr/>
+        </p:nvSpPr>
+        <p:spPr bwMode="auto">
+          <a:xfrm>
+            <a:off x="546100" y="3409887"/>
+            <a:ext cx="165100" cy="165100"/>
+          </a:xfrm>
+          <a:prstGeom prst="roundRect">
+            <a:avLst>
+              <a:gd name="adj" fmla="val 26923"/>
+            </a:avLst>
+          </a:prstGeom>
+          <a:solidFill>
+            <a:srgbClr val="F09A3E"/>
+          </a:solidFill>
+          <a:ln/>
+        </p:spPr>
+        <p:txBody>
+          <a:bodyPr/>
+          <a:lstStyle/>
+          <a:p>
+            <a:pPr>
+              <a:defRPr/>
+            </a:pPr>
+            <a:endParaRPr lang="it-IT"/>
+          </a:p>
+        </p:txBody>
+      </p:sp>
+      <p:sp>
+        <p:nvSpPr>
+          <p:cNvPr id="1888970033" name="Text 27"/>
+          <p:cNvSpPr/>
+          <p:nvPr/>
+        </p:nvSpPr>
+        <p:spPr bwMode="auto">
+          <a:xfrm>
+            <a:off x="787400" y="3368018"/>
+            <a:ext cx="1202465" cy="274307"/>
+          </a:xfrm>
+          <a:prstGeom prst="rect">
+            <a:avLst/>
+          </a:prstGeom>
+          <a:noFill/>
+          <a:ln/>
+        </p:spPr>
+        <p:txBody>
+          <a:bodyPr wrap="square" lIns="0" tIns="0" rIns="0" bIns="0" rtlCol="0" anchor="t">
+            <a:normAutofit/>
+          </a:bodyPr>
+          <a:lstStyle/>
+          <a:p>
+            <a:pPr marL="0" indent="0" algn="l">
+              <a:lnSpc>
+                <a:spcPts val="1960"/>
+              </a:lnSpc>
+              <a:buNone/>
+              <a:defRPr/>
+            </a:pPr>
+            <a:r>
+              <a:rPr lang="en-US" sz="1400" b="1">
+                <a:solidFill>
+                  <a:srgbClr val="222B36"/>
+                </a:solidFill>
+                <a:latin typeface="Carlito"/>
+                <a:ea typeface="Carlito"/>
+                <a:cs typeface="Carlito"/>
+              </a:rPr>
+              <a:t>P1.5 hardcoded</a:t>
+            </a:r>
+            <a:endParaRPr lang="en-US" sz="1400"/>
+          </a:p>
+        </p:txBody>
+      </p:sp>
+      <p:sp>
+        <p:nvSpPr>
+          <p:cNvPr id="2071565254" name="Shape 28"/>
+          <p:cNvSpPr/>
+          <p:nvPr/>
+        </p:nvSpPr>
+        <p:spPr bwMode="auto">
+          <a:xfrm>
+            <a:off x="2514600" y="3289300"/>
+            <a:ext cx="938840" cy="279400"/>
+          </a:xfrm>
+          <a:prstGeom prst="roundRect">
+            <a:avLst>
+              <a:gd name="adj" fmla="val 13636"/>
+            </a:avLst>
+          </a:prstGeom>
+          <a:solidFill>
+            <a:srgbClr val="F09A3E"/>
+          </a:solidFill>
+          <a:ln/>
+        </p:spPr>
+        <p:txBody>
+          <a:bodyPr/>
+          <a:lstStyle/>
+          <a:p>
+            <a:pPr>
+              <a:defRPr/>
+            </a:pPr>
+            <a:endParaRPr lang="it-IT"/>
+          </a:p>
+        </p:txBody>
+      </p:sp>
+      <p:sp>
+        <p:nvSpPr>
+          <p:cNvPr id="1390906181" name="Text 29"/>
+          <p:cNvSpPr/>
+          <p:nvPr/>
+        </p:nvSpPr>
+        <p:spPr bwMode="auto">
+          <a:xfrm>
+            <a:off x="3516940" y="3308350"/>
+            <a:ext cx="585216" cy="292100"/>
+          </a:xfrm>
+          <a:prstGeom prst="rect">
+            <a:avLst/>
+          </a:prstGeom>
+          <a:noFill/>
+          <a:ln/>
+        </p:spPr>
+        <p:txBody>
+          <a:bodyPr wrap="square" lIns="0" tIns="0" rIns="0" bIns="0" rtlCol="0" anchor="t">
+            <a:normAutofit/>
+          </a:bodyPr>
+          <a:lstStyle/>
+          <a:p>
+            <a:pPr marL="0" indent="0" algn="l">
+              <a:lnSpc>
+                <a:spcPts val="2100"/>
+              </a:lnSpc>
+              <a:buNone/>
+              <a:defRPr/>
+            </a:pPr>
+            <a:r>
+              <a:rPr lang="en-US" sz="1500" b="1">
+                <a:solidFill>
+                  <a:srgbClr val="222B36"/>
+                </a:solidFill>
+                <a:latin typeface="Carlito"/>
+                <a:ea typeface="Carlito"/>
+                <a:cs typeface="Carlito"/>
+              </a:rPr>
+              <a:t>5,84</a:t>
+            </a:r>
+          </a:p>
+        </p:txBody>
+      </p:sp>
+      <p:sp>
+        <p:nvSpPr>
+          <p:cNvPr id="494621169" name="Text 30"/>
+          <p:cNvSpPr/>
+          <p:nvPr/>
+        </p:nvSpPr>
+        <p:spPr bwMode="auto">
+          <a:xfrm>
+            <a:off x="6146800" y="3368018"/>
+            <a:ext cx="1003300" cy="274307"/>
+          </a:xfrm>
+          <a:prstGeom prst="rect">
+            <a:avLst/>
+          </a:prstGeom>
+          <a:noFill/>
+          <a:ln/>
+        </p:spPr>
+        <p:txBody>
+          <a:bodyPr wrap="square" lIns="0" tIns="0" rIns="0" bIns="0" rtlCol="0" anchor="t">
+            <a:normAutofit/>
+          </a:bodyPr>
+          <a:lstStyle/>
+          <a:p>
+            <a:pPr marL="0" indent="0" algn="r">
+              <a:lnSpc>
+                <a:spcPts val="1960"/>
+              </a:lnSpc>
+              <a:buNone/>
+              <a:defRPr/>
+            </a:pPr>
+            <a:r>
+              <a:rPr lang="en-US" sz="1400">
+                <a:solidFill>
+                  <a:srgbClr val="222B36"/>
+                </a:solidFill>
+                <a:latin typeface="Carlito"/>
+                <a:ea typeface="Carlito"/>
+                <a:cs typeface="Carlito"/>
+              </a:rPr>
+              <a:t>171 ns</a:t>
+            </a:r>
+          </a:p>
+        </p:txBody>
+      </p:sp>
+      <p:sp>
+        <p:nvSpPr>
+          <p:cNvPr id="1176981325" name="Text 31"/>
+          <p:cNvSpPr/>
+          <p:nvPr/>
+        </p:nvSpPr>
+        <p:spPr bwMode="auto">
+          <a:xfrm>
+            <a:off x="7226300" y="3368018"/>
+            <a:ext cx="1193800" cy="274307"/>
+          </a:xfrm>
+          <a:prstGeom prst="rect">
+            <a:avLst/>
+          </a:prstGeom>
+          <a:noFill/>
+          <a:ln/>
+        </p:spPr>
+        <p:txBody>
+          <a:bodyPr wrap="square" lIns="0" tIns="0" rIns="0" bIns="0" rtlCol="0" anchor="t">
+            <a:normAutofit/>
+          </a:bodyPr>
+          <a:lstStyle/>
+          <a:p>
+            <a:pPr marL="0" indent="0" algn="r">
+              <a:lnSpc>
+                <a:spcPts val="1960"/>
+              </a:lnSpc>
+              <a:buNone/>
+              <a:defRPr/>
+            </a:pPr>
+            <a:r>
+              <a:rPr lang="en-US" sz="1400" b="1">
+                <a:solidFill>
+                  <a:srgbClr val="1F3A5F"/>
+                </a:solidFill>
+                <a:latin typeface="Carlito"/>
+                <a:ea typeface="Carlito"/>
+                <a:cs typeface="Carlito"/>
+              </a:rPr>
+              <a:t>0,73</a:t>
+            </a:r>
+          </a:p>
+        </p:txBody>
+      </p:sp>
+      <p:sp>
+        <p:nvSpPr>
+          <p:cNvPr id="411254010" name="Shape 32"/>
+          <p:cNvSpPr/>
+          <p:nvPr/>
+        </p:nvSpPr>
+        <p:spPr bwMode="auto">
+          <a:xfrm>
+            <a:off x="546100" y="3867088"/>
+            <a:ext cx="165100" cy="165100"/>
+          </a:xfrm>
+          <a:prstGeom prst="roundRect">
+            <a:avLst>
+              <a:gd name="adj" fmla="val 26923"/>
+            </a:avLst>
+          </a:prstGeom>
+          <a:solidFill>
+            <a:srgbClr val="2E9C8F"/>
+          </a:solidFill>
+          <a:ln/>
+        </p:spPr>
+        <p:txBody>
+          <a:bodyPr/>
+          <a:lstStyle/>
+          <a:p>
+            <a:pPr>
+              <a:defRPr/>
+            </a:pPr>
+            <a:endParaRPr lang="it-IT"/>
+          </a:p>
+        </p:txBody>
+      </p:sp>
+      <p:sp>
+        <p:nvSpPr>
+          <p:cNvPr id="1426256395" name="Text 33"/>
+          <p:cNvSpPr/>
+          <p:nvPr/>
+        </p:nvSpPr>
+        <p:spPr bwMode="auto">
+          <a:xfrm>
+            <a:off x="787400" y="3825218"/>
+            <a:ext cx="943569" cy="274307"/>
+          </a:xfrm>
+          <a:prstGeom prst="rect">
+            <a:avLst/>
+          </a:prstGeom>
+          <a:noFill/>
+          <a:ln/>
+        </p:spPr>
+        <p:txBody>
+          <a:bodyPr wrap="square" lIns="0" tIns="0" rIns="0" bIns="0" rtlCol="0" anchor="t">
+            <a:normAutofit/>
+          </a:bodyPr>
+          <a:lstStyle/>
+          <a:p>
+            <a:pPr marL="0" indent="0" algn="l">
+              <a:lnSpc>
+                <a:spcPts val="1960"/>
+              </a:lnSpc>
+              <a:buNone/>
+              <a:defRPr/>
+            </a:pPr>
+            <a:r>
+              <a:rPr lang="en-US" sz="1400" b="1">
+                <a:solidFill>
+                  <a:srgbClr val="222B36"/>
+                </a:solidFill>
+                <a:latin typeface="Carlito"/>
+                <a:ea typeface="Carlito"/>
+                <a:cs typeface="Carlito"/>
+              </a:rPr>
+              <a:t>P2 template</a:t>
+            </a:r>
+            <a:endParaRPr lang="en-US" sz="1400"/>
+          </a:p>
+        </p:txBody>
+      </p:sp>
+      <p:sp>
+        <p:nvSpPr>
+          <p:cNvPr id="868211761" name="Shape 34"/>
+          <p:cNvSpPr/>
+          <p:nvPr/>
+        </p:nvSpPr>
+        <p:spPr bwMode="auto">
+          <a:xfrm>
+            <a:off x="2514600" y="3746500"/>
+            <a:ext cx="454952" cy="279400"/>
+          </a:xfrm>
+          <a:prstGeom prst="roundRect">
+            <a:avLst>
+              <a:gd name="adj" fmla="val 13636"/>
+            </a:avLst>
+          </a:prstGeom>
+          <a:solidFill>
+            <a:srgbClr val="2E9C8F"/>
+          </a:solidFill>
+          <a:ln/>
+        </p:spPr>
+        <p:txBody>
+          <a:bodyPr/>
+          <a:lstStyle/>
+          <a:p>
+            <a:pPr>
+              <a:defRPr/>
+            </a:pPr>
+            <a:endParaRPr lang="it-IT"/>
+          </a:p>
+        </p:txBody>
+      </p:sp>
+      <p:sp>
+        <p:nvSpPr>
+          <p:cNvPr id="1706941863" name="Text 35"/>
+          <p:cNvSpPr/>
+          <p:nvPr/>
+        </p:nvSpPr>
+        <p:spPr bwMode="auto">
+          <a:xfrm>
+            <a:off x="3033052" y="3765550"/>
+            <a:ext cx="585216" cy="292100"/>
+          </a:xfrm>
+          <a:prstGeom prst="rect">
+            <a:avLst/>
+          </a:prstGeom>
+          <a:noFill/>
+          <a:ln/>
+        </p:spPr>
+        <p:txBody>
+          <a:bodyPr wrap="square" lIns="0" tIns="0" rIns="0" bIns="0" rtlCol="0" anchor="t">
+            <a:normAutofit/>
+          </a:bodyPr>
+          <a:lstStyle/>
+          <a:p>
+            <a:pPr marL="0" indent="0" algn="l">
+              <a:lnSpc>
+                <a:spcPts val="2100"/>
+              </a:lnSpc>
+              <a:buNone/>
+              <a:defRPr/>
+            </a:pPr>
+            <a:r>
+              <a:rPr lang="en-US" sz="1500" b="1">
+                <a:solidFill>
+                  <a:srgbClr val="222B36"/>
+                </a:solidFill>
+                <a:latin typeface="Carlito"/>
+                <a:ea typeface="Carlito"/>
+                <a:cs typeface="Carlito"/>
+              </a:rPr>
+              <a:t>2,83</a:t>
+            </a:r>
+          </a:p>
+        </p:txBody>
+      </p:sp>
+      <p:sp>
+        <p:nvSpPr>
+          <p:cNvPr id="1001429822" name="Text 36"/>
+          <p:cNvSpPr/>
+          <p:nvPr/>
+        </p:nvSpPr>
+        <p:spPr bwMode="auto">
+          <a:xfrm>
+            <a:off x="6146800" y="3825218"/>
+            <a:ext cx="1003300" cy="274307"/>
+          </a:xfrm>
+          <a:prstGeom prst="rect">
+            <a:avLst/>
+          </a:prstGeom>
+          <a:noFill/>
+          <a:ln/>
+        </p:spPr>
+        <p:txBody>
+          <a:bodyPr wrap="square" lIns="0" tIns="0" rIns="0" bIns="0" rtlCol="0" anchor="t">
+            <a:normAutofit/>
+          </a:bodyPr>
+          <a:lstStyle/>
+          <a:p>
+            <a:pPr marL="0" indent="0" algn="r">
+              <a:lnSpc>
+                <a:spcPts val="1960"/>
+              </a:lnSpc>
+              <a:buNone/>
+              <a:defRPr/>
+            </a:pPr>
+            <a:r>
+              <a:rPr lang="en-US" sz="1400">
+                <a:solidFill>
+                  <a:srgbClr val="222B36"/>
+                </a:solidFill>
+                <a:latin typeface="Carlito"/>
+                <a:ea typeface="Carlito"/>
+                <a:cs typeface="Carlito"/>
+              </a:rPr>
+              <a:t>354 ns</a:t>
+            </a:r>
+          </a:p>
+        </p:txBody>
+      </p:sp>
+      <p:sp>
+        <p:nvSpPr>
+          <p:cNvPr id="520676296" name="Text 37"/>
+          <p:cNvSpPr/>
+          <p:nvPr/>
+        </p:nvSpPr>
+        <p:spPr bwMode="auto">
+          <a:xfrm>
+            <a:off x="7226300" y="3825218"/>
+            <a:ext cx="1193800" cy="274307"/>
+          </a:xfrm>
+          <a:prstGeom prst="rect">
+            <a:avLst/>
+          </a:prstGeom>
+          <a:noFill/>
+          <a:ln/>
+        </p:spPr>
+        <p:txBody>
+          <a:bodyPr wrap="square" lIns="0" tIns="0" rIns="0" bIns="0" rtlCol="0" anchor="t">
+            <a:normAutofit/>
+          </a:bodyPr>
+          <a:lstStyle/>
+          <a:p>
+            <a:pPr marL="0" indent="0" algn="r">
+              <a:lnSpc>
+                <a:spcPts val="1960"/>
+              </a:lnSpc>
+              <a:buNone/>
+              <a:defRPr/>
+            </a:pPr>
+            <a:r>
+              <a:rPr lang="en-US" sz="1400" b="1">
+                <a:solidFill>
+                  <a:srgbClr val="1F3A5F"/>
+                </a:solidFill>
+                <a:latin typeface="Carlito"/>
+                <a:ea typeface="Carlito"/>
+                <a:cs typeface="Carlito"/>
+              </a:rPr>
+              <a:t>0,82</a:t>
+            </a:r>
+          </a:p>
+        </p:txBody>
+      </p:sp>
+      <p:sp>
+        <p:nvSpPr>
+          <p:cNvPr id="909484785" name="Shape 38"/>
+          <p:cNvSpPr/>
+          <p:nvPr/>
+        </p:nvSpPr>
+        <p:spPr bwMode="auto">
+          <a:xfrm>
+            <a:off x="546100" y="4324288"/>
+            <a:ext cx="165100" cy="165100"/>
+          </a:xfrm>
+          <a:prstGeom prst="roundRect">
+            <a:avLst>
+              <a:gd name="adj" fmla="val 26923"/>
+            </a:avLst>
+          </a:prstGeom>
+          <a:solidFill>
+            <a:srgbClr val="1F5F8B"/>
+          </a:solidFill>
+          <a:ln/>
+        </p:spPr>
+        <p:txBody>
+          <a:bodyPr/>
+          <a:lstStyle/>
+          <a:p>
+            <a:pPr>
+              <a:defRPr/>
+            </a:pPr>
+            <a:endParaRPr lang="it-IT"/>
+          </a:p>
+        </p:txBody>
+      </p:sp>
+      <p:sp>
+        <p:nvSpPr>
+          <p:cNvPr id="841509049" name="Text 39"/>
+          <p:cNvSpPr/>
+          <p:nvPr/>
+        </p:nvSpPr>
+        <p:spPr bwMode="auto">
+          <a:xfrm>
+            <a:off x="787400" y="4282418"/>
+            <a:ext cx="901435" cy="274307"/>
+          </a:xfrm>
+          <a:prstGeom prst="rect">
+            <a:avLst/>
+          </a:prstGeom>
+          <a:noFill/>
+          <a:ln/>
+        </p:spPr>
+        <p:txBody>
+          <a:bodyPr wrap="square" lIns="0" tIns="0" rIns="0" bIns="0" rtlCol="0" anchor="t">
+            <a:normAutofit/>
+          </a:bodyPr>
+          <a:lstStyle/>
+          <a:p>
+            <a:pPr marL="0" indent="0" algn="l">
+              <a:lnSpc>
+                <a:spcPts val="1960"/>
+              </a:lnSpc>
+              <a:buNone/>
+              <a:defRPr/>
+            </a:pPr>
+            <a:r>
+              <a:rPr lang="en-US" sz="1400" b="1">
+                <a:solidFill>
+                  <a:srgbClr val="222B36"/>
+                </a:solidFill>
+                <a:latin typeface="Carlito"/>
+                <a:ea typeface="Carlito"/>
+                <a:cs typeface="Carlito"/>
+              </a:rPr>
+              <a:t>P3 modular</a:t>
+            </a:r>
+            <a:endParaRPr lang="en-US" sz="1400"/>
+          </a:p>
+        </p:txBody>
+      </p:sp>
+      <p:sp>
+        <p:nvSpPr>
+          <p:cNvPr id="2142854648" name="Shape 40"/>
+          <p:cNvSpPr/>
+          <p:nvPr/>
+        </p:nvSpPr>
+        <p:spPr bwMode="auto">
+          <a:xfrm>
+            <a:off x="2514600" y="4203700"/>
+            <a:ext cx="311875" cy="279400"/>
+          </a:xfrm>
+          <a:prstGeom prst="roundRect">
+            <a:avLst>
+              <a:gd name="adj" fmla="val 13636"/>
+            </a:avLst>
+          </a:prstGeom>
+          <a:solidFill>
+            <a:srgbClr val="1F5F8B"/>
+          </a:solidFill>
+          <a:ln/>
+        </p:spPr>
+        <p:txBody>
+          <a:bodyPr/>
+          <a:lstStyle/>
+          <a:p>
+            <a:pPr>
+              <a:defRPr/>
+            </a:pPr>
+            <a:endParaRPr lang="it-IT"/>
+          </a:p>
+        </p:txBody>
+      </p:sp>
+      <p:sp>
+        <p:nvSpPr>
+          <p:cNvPr id="1770568141" name="Text 41"/>
+          <p:cNvSpPr/>
+          <p:nvPr/>
+        </p:nvSpPr>
+        <p:spPr bwMode="auto">
+          <a:xfrm>
+            <a:off x="2889975" y="4222750"/>
+            <a:ext cx="585216" cy="292100"/>
+          </a:xfrm>
+          <a:prstGeom prst="rect">
+            <a:avLst/>
+          </a:prstGeom>
+          <a:noFill/>
+          <a:ln/>
+        </p:spPr>
+        <p:txBody>
+          <a:bodyPr wrap="square" lIns="0" tIns="0" rIns="0" bIns="0" rtlCol="0" anchor="t">
+            <a:normAutofit/>
+          </a:bodyPr>
+          <a:lstStyle/>
+          <a:p>
+            <a:pPr marL="0" indent="0" algn="l">
+              <a:lnSpc>
+                <a:spcPts val="2100"/>
+              </a:lnSpc>
+              <a:buNone/>
+              <a:defRPr/>
+            </a:pPr>
+            <a:r>
+              <a:rPr lang="en-US" sz="1500" b="1">
+                <a:solidFill>
+                  <a:srgbClr val="222B36"/>
+                </a:solidFill>
+                <a:latin typeface="Carlito"/>
+                <a:ea typeface="Carlito"/>
+                <a:cs typeface="Carlito"/>
+              </a:rPr>
+              <a:t>1,94</a:t>
+            </a:r>
+          </a:p>
+        </p:txBody>
+      </p:sp>
+      <p:sp>
+        <p:nvSpPr>
+          <p:cNvPr id="1067422778" name="Text 42"/>
+          <p:cNvSpPr/>
+          <p:nvPr/>
+        </p:nvSpPr>
+        <p:spPr bwMode="auto">
+          <a:xfrm>
+            <a:off x="6146800" y="4282418"/>
+            <a:ext cx="1003300" cy="274307"/>
+          </a:xfrm>
+          <a:prstGeom prst="rect">
+            <a:avLst/>
+          </a:prstGeom>
+          <a:noFill/>
+          <a:ln/>
+        </p:spPr>
+        <p:txBody>
+          <a:bodyPr wrap="square" lIns="0" tIns="0" rIns="0" bIns="0" rtlCol="0" anchor="t">
+            <a:normAutofit/>
+          </a:bodyPr>
+          <a:lstStyle/>
+          <a:p>
+            <a:pPr marL="0" indent="0" algn="r">
+              <a:lnSpc>
+                <a:spcPts val="1960"/>
+              </a:lnSpc>
+              <a:buNone/>
+              <a:defRPr/>
+            </a:pPr>
+            <a:r>
+              <a:rPr lang="en-US" sz="1400">
+                <a:solidFill>
+                  <a:srgbClr val="222B36"/>
+                </a:solidFill>
+                <a:latin typeface="Carlito"/>
+                <a:ea typeface="Carlito"/>
+                <a:cs typeface="Carlito"/>
+              </a:rPr>
+              <a:t>515 ns</a:t>
+            </a:r>
+          </a:p>
+        </p:txBody>
+      </p:sp>
+      <p:sp>
+        <p:nvSpPr>
+          <p:cNvPr id="523887834" name="Text 43"/>
+          <p:cNvSpPr/>
+          <p:nvPr/>
+        </p:nvSpPr>
+        <p:spPr bwMode="auto">
+          <a:xfrm>
+            <a:off x="7226300" y="4282418"/>
+            <a:ext cx="1193800" cy="274307"/>
+          </a:xfrm>
+          <a:prstGeom prst="rect">
+            <a:avLst/>
+          </a:prstGeom>
+          <a:noFill/>
+          <a:ln/>
+        </p:spPr>
+        <p:txBody>
+          <a:bodyPr wrap="square" lIns="0" tIns="0" rIns="0" bIns="0" rtlCol="0" anchor="t">
+            <a:normAutofit/>
+          </a:bodyPr>
+          <a:lstStyle/>
+          <a:p>
+            <a:pPr marL="0" indent="0" algn="r">
+              <a:lnSpc>
+                <a:spcPts val="1960"/>
+              </a:lnSpc>
+              <a:buNone/>
+              <a:defRPr/>
+            </a:pPr>
+            <a:r>
+              <a:rPr lang="en-US" sz="1400" b="1">
+                <a:solidFill>
+                  <a:srgbClr val="1F3A5F"/>
+                </a:solidFill>
+                <a:latin typeface="Carlito"/>
+                <a:ea typeface="Carlito"/>
+                <a:cs typeface="Carlito"/>
+              </a:rPr>
+              <a:t>0,82</a:t>
+            </a:r>
+          </a:p>
+        </p:txBody>
+      </p:sp>
+      <p:sp>
+        <p:nvSpPr>
+          <p:cNvPr id="774944657" name="Shape 44"/>
+          <p:cNvSpPr/>
+          <p:nvPr/>
+        </p:nvSpPr>
+        <p:spPr bwMode="auto">
+          <a:xfrm>
+            <a:off x="8597900" y="1562100"/>
+            <a:ext cx="3048000" cy="1479550"/>
+          </a:xfrm>
+          <a:prstGeom prst="roundRect">
+            <a:avLst>
+              <a:gd name="adj" fmla="val 8584"/>
+            </a:avLst>
+          </a:prstGeom>
+          <a:solidFill>
+            <a:srgbClr val="F3F5F8"/>
+          </a:solidFill>
+          <a:ln/>
+        </p:spPr>
+        <p:txBody>
+          <a:bodyPr/>
+          <a:lstStyle/>
+          <a:p>
+            <a:pPr>
+              <a:defRPr/>
+            </a:pPr>
+            <a:endParaRPr lang="it-IT"/>
+          </a:p>
+        </p:txBody>
+      </p:sp>
+      <p:sp>
+        <p:nvSpPr>
+          <p:cNvPr id="1044408267" name="Shape 45"/>
+          <p:cNvSpPr/>
+          <p:nvPr/>
+        </p:nvSpPr>
+        <p:spPr bwMode="auto">
+          <a:xfrm>
+            <a:off x="8597900" y="1562100"/>
+            <a:ext cx="3048000" cy="88900"/>
+          </a:xfrm>
+          <a:custGeom>
+            <a:avLst/>
+            <a:gdLst/>
+            <a:ahLst/>
+            <a:cxnLst/>
+            <a:rect l="l" t="t" r="r" b="b"/>
+            <a:pathLst>
+              <a:path w="3048000" h="88900" fill="norm" stroke="1" extrusionOk="0">
+                <a:moveTo>
+                  <a:pt x="5850" y="88900"/>
+                </a:moveTo>
+                <a:arcTo wR="127000" hR="127000" stAng="11847456" swAng="4352544"/>
+                <a:lnTo>
+                  <a:pt x="2921000" y="0"/>
+                </a:lnTo>
+                <a:arcTo wR="127000" hR="127000" stAng="16200000" swAng="4352544"/>
+                <a:close/>
+              </a:path>
+            </a:pathLst>
+          </a:custGeom>
+          <a:solidFill>
+            <a:srgbClr val="2E9C6E"/>
+          </a:solidFill>
+          <a:ln/>
+        </p:spPr>
+        <p:txBody>
+          <a:bodyPr/>
+          <a:lstStyle/>
+          <a:p>
+            <a:pPr>
+              <a:defRPr/>
+            </a:pPr>
+            <a:endParaRPr lang="it-IT"/>
+          </a:p>
+        </p:txBody>
+      </p:sp>
+      <p:sp>
+        <p:nvSpPr>
+          <p:cNvPr id="545921690" name="Text 46"/>
+          <p:cNvSpPr/>
+          <p:nvPr/>
+        </p:nvSpPr>
+        <p:spPr bwMode="auto">
+          <a:xfrm>
+            <a:off x="8775700" y="1765300"/>
+            <a:ext cx="2773172" cy="282840"/>
+          </a:xfrm>
+          <a:prstGeom prst="rect">
+            <a:avLst/>
+          </a:prstGeom>
+          <a:noFill/>
+          <a:ln/>
+        </p:spPr>
+        <p:txBody>
+          <a:bodyPr wrap="square" lIns="0" tIns="0" rIns="0" bIns="0" rtlCol="0" anchor="t">
+            <a:normAutofit/>
+          </a:bodyPr>
+          <a:lstStyle/>
+          <a:p>
+            <a:pPr marL="0" indent="0" algn="l">
+              <a:lnSpc>
+                <a:spcPts val="2074"/>
+              </a:lnSpc>
+              <a:buNone/>
+              <a:defRPr/>
+            </a:pPr>
+            <a:r>
+              <a:rPr lang="en-US" sz="1500" b="1">
+                <a:solidFill>
+                  <a:srgbClr val="2E9C6E"/>
+                </a:solidFill>
+                <a:latin typeface="Carlito"/>
+                <a:ea typeface="Carlito"/>
+                <a:cs typeface="Carlito"/>
+              </a:rPr>
+              <a:t>Stesso codice, meno IPC</a:t>
+            </a:r>
+          </a:p>
+        </p:txBody>
+      </p:sp>
+      <p:sp>
+        <p:nvSpPr>
+          <p:cNvPr id="1990490635" name="Text 47"/>
+          <p:cNvSpPr/>
+          <p:nvPr/>
+        </p:nvSpPr>
+        <p:spPr bwMode="auto">
+          <a:xfrm>
+            <a:off x="8775700" y="2073542"/>
+            <a:ext cx="2773172" cy="853810"/>
+          </a:xfrm>
+          <a:prstGeom prst="rect">
+            <a:avLst/>
+          </a:prstGeom>
+          <a:noFill/>
+          <a:ln/>
+        </p:spPr>
+        <p:txBody>
+          <a:bodyPr wrap="square" lIns="0" tIns="0" rIns="0" bIns="0" rtlCol="0" anchor="t">
+            <a:normAutofit/>
+          </a:bodyPr>
+          <a:lstStyle/>
+          <a:p>
+            <a:pPr marL="0" indent="0" algn="l">
+              <a:lnSpc>
+                <a:spcPts val="1627"/>
+              </a:lnSpc>
+              <a:buNone/>
+              <a:defRPr/>
+            </a:pPr>
+            <a:r>
+              <a:rPr lang="en-US" sz="1250">
+                <a:solidFill>
+                  <a:srgbClr val="222B36"/>
+                </a:solidFill>
+                <a:latin typeface="Carlito"/>
+                <a:ea typeface="Carlito"/>
+                <a:cs typeface="Carlito"/>
+              </a:rPr>
+              <a:t>Le istruzioni per pacchetto sono le stesse sul P-core e sull'E-core. Cambia quante il core ne esegue per ciclo.</a:t>
+            </a:r>
+          </a:p>
+        </p:txBody>
+      </p:sp>
+      <p:sp>
+        <p:nvSpPr>
+          <p:cNvPr id="748434634" name="Shape 48"/>
+          <p:cNvSpPr/>
+          <p:nvPr/>
+        </p:nvSpPr>
+        <p:spPr bwMode="auto">
+          <a:xfrm>
+            <a:off x="8597900" y="3130550"/>
+            <a:ext cx="3048000" cy="1479550"/>
+          </a:xfrm>
+          <a:prstGeom prst="roundRect">
+            <a:avLst>
+              <a:gd name="adj" fmla="val 8584"/>
+            </a:avLst>
+          </a:prstGeom>
+          <a:solidFill>
+            <a:srgbClr val="F3F5F8"/>
+          </a:solidFill>
+          <a:ln/>
+        </p:spPr>
+        <p:txBody>
+          <a:bodyPr/>
+          <a:lstStyle/>
+          <a:p>
+            <a:pPr>
+              <a:defRPr/>
+            </a:pPr>
+            <a:endParaRPr lang="it-IT"/>
+          </a:p>
+        </p:txBody>
+      </p:sp>
+      <p:sp>
+        <p:nvSpPr>
+          <p:cNvPr id="1426727113" name="Shape 49"/>
+          <p:cNvSpPr/>
+          <p:nvPr/>
+        </p:nvSpPr>
+        <p:spPr bwMode="auto">
+          <a:xfrm>
+            <a:off x="8597900" y="3130550"/>
+            <a:ext cx="3048000" cy="88900"/>
+          </a:xfrm>
+          <a:custGeom>
+            <a:avLst/>
+            <a:gdLst/>
+            <a:ahLst/>
+            <a:cxnLst/>
+            <a:rect l="l" t="t" r="r" b="b"/>
+            <a:pathLst>
+              <a:path w="3048000" h="88900" fill="norm" stroke="1" extrusionOk="0">
+                <a:moveTo>
+                  <a:pt x="5850" y="88900"/>
+                </a:moveTo>
+                <a:arcTo wR="127000" hR="127000" stAng="11847456" swAng="4352544"/>
+                <a:lnTo>
+                  <a:pt x="2921000" y="0"/>
+                </a:lnTo>
+                <a:arcTo wR="127000" hR="127000" stAng="16200000" swAng="4352544"/>
+                <a:close/>
+              </a:path>
+            </a:pathLst>
+          </a:custGeom>
+          <a:solidFill>
+            <a:srgbClr val="E07A2D"/>
+          </a:solidFill>
+          <a:ln/>
+        </p:spPr>
+        <p:txBody>
+          <a:bodyPr/>
+          <a:lstStyle/>
+          <a:p>
+            <a:pPr>
+              <a:defRPr/>
+            </a:pPr>
+            <a:endParaRPr lang="it-IT"/>
+          </a:p>
+        </p:txBody>
+      </p:sp>
+      <p:sp>
+        <p:nvSpPr>
+          <p:cNvPr id="1801311119" name="Text 50"/>
+          <p:cNvSpPr/>
+          <p:nvPr/>
+        </p:nvSpPr>
+        <p:spPr bwMode="auto">
+          <a:xfrm>
+            <a:off x="8775700" y="3333750"/>
+            <a:ext cx="2773172" cy="292100"/>
+          </a:xfrm>
+          <a:prstGeom prst="rect">
+            <a:avLst/>
+          </a:prstGeom>
+          <a:noFill/>
+          <a:ln/>
+        </p:spPr>
+        <p:txBody>
+          <a:bodyPr wrap="square" lIns="0" tIns="0" rIns="0" bIns="0" rtlCol="0" anchor="t">
+            <a:normAutofit/>
+          </a:bodyPr>
+          <a:lstStyle/>
+          <a:p>
+            <a:pPr marL="0" indent="0" algn="l">
+              <a:lnSpc>
+                <a:spcPts val="2100"/>
+              </a:lnSpc>
+              <a:buNone/>
+              <a:defRPr/>
+            </a:pPr>
+            <a:r>
+              <a:rPr lang="en-US" sz="1500" b="1">
+                <a:solidFill>
+                  <a:srgbClr val="E07A2D"/>
+                </a:solidFill>
+                <a:latin typeface="Carlito"/>
+                <a:ea typeface="Carlito"/>
+                <a:cs typeface="Carlito"/>
+              </a:rPr>
+              <a:t>Paga la parte fissa</a:t>
+            </a:r>
+          </a:p>
+        </p:txBody>
+      </p:sp>
+      <p:sp>
+        <p:nvSpPr>
+          <p:cNvPr id="967400100" name="Text 51"/>
+          <p:cNvSpPr/>
+          <p:nvPr/>
+        </p:nvSpPr>
+        <p:spPr bwMode="auto">
+          <a:xfrm>
+            <a:off x="8775700" y="3651250"/>
+            <a:ext cx="2773172" cy="669131"/>
+          </a:xfrm>
+          <a:prstGeom prst="rect">
+            <a:avLst/>
+          </a:prstGeom>
+          <a:noFill/>
+          <a:ln/>
+        </p:spPr>
+        <p:txBody>
+          <a:bodyPr wrap="square" lIns="0" tIns="0" rIns="0" bIns="0" rtlCol="0" anchor="t">
+            <a:normAutofit/>
+          </a:bodyPr>
+          <a:lstStyle/>
+          <a:p>
+            <a:pPr marL="0" indent="0" algn="l">
+              <a:lnSpc>
+                <a:spcPts val="1690"/>
+              </a:lnSpc>
+              <a:buNone/>
+              <a:defRPr/>
+            </a:pPr>
+            <a:r>
+              <a:rPr lang="en-US" sz="1300">
+                <a:solidFill>
+                  <a:srgbClr val="222B36"/>
+                </a:solidFill>
+                <a:latin typeface="Carlito"/>
+                <a:ea typeface="Carlito"/>
+                <a:cs typeface="Carlito"/>
+              </a:rPr>
+              <a:t>IPC 2,7 → 1,7 per la baseline (ricezione, redirect), 4,4 → 3,7 per P3 (aritmetica in fila).</a:t>
+            </a:r>
+          </a:p>
+        </p:txBody>
+      </p:sp>
+      <p:sp>
+        <p:nvSpPr>
+          <p:cNvPr id="1123068523" name="Shape 52"/>
+          <p:cNvSpPr/>
+          <p:nvPr/>
+        </p:nvSpPr>
+        <p:spPr bwMode="auto">
+          <a:xfrm>
+            <a:off x="546100" y="5486400"/>
+            <a:ext cx="11099800" cy="774700"/>
+          </a:xfrm>
+          <a:prstGeom prst="roundRect">
+            <a:avLst>
+              <a:gd name="adj" fmla="val 13115"/>
+            </a:avLst>
+          </a:prstGeom>
+          <a:solidFill>
+            <a:srgbClr val="FFF4DE"/>
+          </a:solidFill>
+          <a:ln/>
+        </p:spPr>
+        <p:txBody>
+          <a:bodyPr/>
+          <a:lstStyle/>
+          <a:p>
+            <a:pPr>
+              <a:defRPr/>
+            </a:pPr>
+            <a:endParaRPr lang="it-IT"/>
+          </a:p>
+        </p:txBody>
+      </p:sp>
+      <p:sp>
+        <p:nvSpPr>
+          <p:cNvPr id="411332435" name="Shape 53"/>
+          <p:cNvSpPr/>
+          <p:nvPr/>
+        </p:nvSpPr>
+        <p:spPr bwMode="auto">
+          <a:xfrm>
+            <a:off x="546100" y="5486400"/>
+            <a:ext cx="82550" cy="774700"/>
+          </a:xfrm>
+          <a:custGeom>
+            <a:avLst/>
+            <a:gdLst/>
+            <a:ahLst/>
+            <a:cxnLst/>
+            <a:rect l="l" t="t" r="r" b="b"/>
+            <a:pathLst>
+              <a:path w="82550" h="774700" fill="norm" stroke="1" extrusionOk="0">
+                <a:moveTo>
+                  <a:pt x="0" y="101600"/>
+                </a:moveTo>
+                <a:arcTo wR="101600" hR="101600" stAng="10800000" swAng="4751585"/>
+                <a:lnTo>
+                  <a:pt x="82550" y="772898"/>
+                </a:lnTo>
+                <a:arcTo wR="101600" hR="101600" stAng="6048415" swAng="4751585"/>
+                <a:close/>
+              </a:path>
+            </a:pathLst>
+          </a:custGeom>
+          <a:solidFill>
+            <a:srgbClr val="F2B134"/>
+          </a:solidFill>
+          <a:ln/>
+        </p:spPr>
+        <p:txBody>
+          <a:bodyPr/>
+          <a:lstStyle/>
+          <a:p>
+            <a:pPr>
+              <a:defRPr/>
+            </a:pPr>
+            <a:endParaRPr lang="it-IT"/>
+          </a:p>
+        </p:txBody>
+      </p:sp>
+      <p:sp>
+        <p:nvSpPr>
+          <p:cNvPr id="1327862420" name="Text 54"/>
+          <p:cNvSpPr/>
+          <p:nvPr/>
+        </p:nvSpPr>
+        <p:spPr bwMode="auto">
+          <a:xfrm>
+            <a:off x="819150" y="5767058"/>
+            <a:ext cx="876299" cy="238720"/>
+          </a:xfrm>
+          <a:prstGeom prst="rect">
+            <a:avLst/>
+          </a:prstGeom>
+          <a:noFill/>
+          <a:ln/>
+        </p:spPr>
+        <p:txBody>
+          <a:bodyPr wrap="square" lIns="0" tIns="0" rIns="0" bIns="0" rtlCol="0" anchor="t">
+            <a:normAutofit/>
+          </a:bodyPr>
+          <a:lstStyle/>
+          <a:p>
+            <a:pPr marL="0" indent="0" algn="l">
+              <a:lnSpc>
+                <a:spcPts val="1680"/>
+              </a:lnSpc>
+              <a:buNone/>
+              <a:defRPr/>
+            </a:pPr>
+            <a:r>
+              <a:rPr lang="en-US" sz="1200" b="1" spc="100">
+                <a:solidFill>
+                  <a:srgbClr val="B57A00"/>
+                </a:solidFill>
+                <a:latin typeface="Carlito"/>
+                <a:ea typeface="Carlito"/>
+                <a:cs typeface="Carlito"/>
+              </a:rPr>
+              <a:t>QUINDI</a:t>
+            </a:r>
+            <a:endParaRPr lang="en-US" sz="1200"/>
+          </a:p>
+        </p:txBody>
+      </p:sp>
+      <p:sp>
+        <p:nvSpPr>
+          <p:cNvPr id="1695097562" name="Text 55"/>
+          <p:cNvSpPr/>
+          <p:nvPr/>
+        </p:nvSpPr>
+        <p:spPr bwMode="auto">
+          <a:xfrm>
+            <a:off x="1822450" y="5626100"/>
+            <a:ext cx="9882696" cy="520700"/>
+          </a:xfrm>
+          <a:prstGeom prst="rect">
+            <a:avLst/>
+          </a:prstGeom>
+          <a:noFill/>
+          <a:ln/>
+        </p:spPr>
+        <p:txBody>
+          <a:bodyPr wrap="square" lIns="0" tIns="0" rIns="0" bIns="0" rtlCol="0" anchor="t">
+            <a:normAutofit/>
+          </a:bodyPr>
+          <a:lstStyle/>
+          <a:p>
+            <a:pPr marL="0" indent="0" algn="l">
+              <a:lnSpc>
+                <a:spcPts val="1950"/>
+              </a:lnSpc>
+              <a:buNone/>
+              <a:defRPr/>
+            </a:pPr>
+            <a:r>
+              <a:rPr lang="en-US" sz="1500" b="0">
+                <a:solidFill>
+                  <a:srgbClr val="222B36"/>
+                </a:solidFill>
+                <a:latin typeface="Carlito"/>
+                <a:ea typeface="Carlito"/>
+                <a:cs typeface="Carlito"/>
+              </a:rPr>
+              <a:t>L'E-core rallenta soprattutto il </a:t>
+            </a:r>
+            <a:r>
+              <a:rPr lang="en-US" sz="1500" b="1">
+                <a:solidFill>
+                  <a:srgbClr val="222B36"/>
+                </a:solidFill>
+                <a:latin typeface="Carlito"/>
+                <a:ea typeface="Carlito"/>
+                <a:cs typeface="Carlito"/>
+              </a:rPr>
+              <a:t>lavoro di rete del kernel</a:t>
+            </a:r>
+            <a:r>
+              <a:rPr lang="en-US" sz="1500" b="0">
+                <a:solidFill>
+                  <a:srgbClr val="222B36"/>
+                </a:solidFill>
+                <a:latin typeface="Carlito"/>
+                <a:ea typeface="Carlito"/>
+                <a:cs typeface="Carlito"/>
+              </a:rPr>
+              <a:t> (baseline +60%) e poco la rete neurale (P3 +14% sopra la baseline). Il LP E-core, fuori dalla L3 e a 2,5 GHz, regge il 36–47%.</a:t>
+            </a:r>
+          </a:p>
+        </p:txBody>
+      </p:sp>
+    </p:spTree>
+  </p:cSld>
+  <p:clrMapOvr>
+    <a:masterClrMapping/>
+  </p:clrMapOvr>
 </p:sld>
 </file>
 
@@ -11513,9 +11459,8 @@
                 <a:ea typeface="Carlito"/>
                 <a:cs typeface="Carlito"/>
               </a:rPr>
-              <a:t>Dice quanto regge la sola ricezione allo stesso ritmo. Il programma 1 costa fino a +5 ns: dentro il rumore.</a:t>
-            </a:r>
-            <a:endParaRPr lang="en-US" sz="1300"/>
+              <a:t>Dice quanto regge la sola ricezione allo stesso ritmo. Il programma 1 costa da −3 a +2 ns: dentro il rumore.</a:t>
+            </a:r>
           </a:p>
         </p:txBody>
       </p:sp>
@@ -11605,7 +11550,6 @@
               </a:rPr>
               <a:t>13</a:t>
             </a:r>
-            <a:endParaRPr lang="en-US" sz="1200"/>
           </a:p>
         </p:txBody>
       </p:sp>
@@ -12938,7 +12882,6 @@
               </a:rPr>
               <a:t>14</a:t>
             </a:r>
-            <a:endParaRPr lang="en-US" sz="1200"/>
           </a:p>
         </p:txBody>
       </p:sp>
@@ -13097,14 +13040,14 @@
       </p:sp>
       <p:pic>
         <p:nvPicPr>
-          <p:cNvPr id="1516013105" name="Image 0" descr="Pacchetti inoltrati al secondo contro traffico inviato. Ogni pipeline segue la diagonale e poi si ferma alla propria capacità: baseline 3,3, P1 2,9, P1.5 2,8, P2 1,9, P3 1,5 milioni al secondo"/>
+          <p:cNvPr id="1516013105" name="Image 0" descr="Pacchetti inoltrati al secondo contro traffico inviato: ogni pipeline segue la diagonale e si ferma alla propria capacità (P1 8,7, P1.5 8,2, P2 3,5, P3 2,4 milioni al secondo)"/>
           <p:cNvPicPr>
             <a:picLocks noChangeAspect="1"/>
           </p:cNvPicPr>
           <p:nvPr/>
         </p:nvPicPr>
         <p:blipFill rotWithShape="1">
-          <a:blip r:embed="rId4"/>
+          <a:blip r:embed="rId5"/>
           <a:stretch/>
         </p:blipFill>
         <p:spPr bwMode="auto">
@@ -14318,9 +14261,8 @@
                 <a:ea typeface="Carlito"/>
                 <a:cs typeface="Carlito"/>
               </a:rPr>
-              <a:t>8,89*</a:t>
-            </a:r>
-            <a:endParaRPr lang="en-US" sz="1400"/>
+              <a:t>9,02*</a:t>
+            </a:r>
           </a:p>
         </p:txBody>
       </p:sp>
@@ -14562,9 +14504,8 @@
                 <a:ea typeface="Carlito"/>
                 <a:cs typeface="Carlito"/>
               </a:rPr>
-              <a:t>8,64</a:t>
-            </a:r>
-            <a:endParaRPr lang="en-US" sz="1400"/>
+              <a:t>8,66</a:t>
+            </a:r>
           </a:p>
         </p:txBody>
       </p:sp>
@@ -14716,9 +14657,8 @@
                 <a:ea typeface="Carlito"/>
                 <a:cs typeface="Carlito"/>
               </a:rPr>
-              <a:t>3,55</a:t>
-            </a:r>
-            <a:endParaRPr lang="en-US" sz="1400"/>
+              <a:t>4,08</a:t>
+            </a:r>
           </a:p>
         </p:txBody>
       </p:sp>
@@ -14761,9 +14701,8 @@
                 <a:ea typeface="Carlito"/>
                 <a:cs typeface="Carlito"/>
               </a:rPr>
-              <a:t>4,08</a:t>
-            </a:r>
-            <a:endParaRPr lang="en-US" sz="1400"/>
+              <a:t>4,56</a:t>
+            </a:r>
           </a:p>
         </p:txBody>
       </p:sp>
@@ -14806,9 +14745,8 @@
                 <a:ea typeface="Carlito"/>
                 <a:cs typeface="Carlito"/>
               </a:rPr>
-              <a:t>8,06</a:t>
-            </a:r>
-            <a:endParaRPr lang="en-US" sz="1400"/>
+              <a:t>8,17</a:t>
+            </a:r>
           </a:p>
         </p:txBody>
       </p:sp>
@@ -15050,9 +14988,8 @@
                 <a:ea typeface="Carlito"/>
                 <a:cs typeface="Carlito"/>
               </a:rPr>
-              <a:t>3,48</a:t>
-            </a:r>
-            <a:endParaRPr lang="en-US" sz="1400"/>
+              <a:t>3,45</a:t>
+            </a:r>
           </a:p>
         </p:txBody>
       </p:sp>
@@ -15294,9 +15231,8 @@
                 <a:ea typeface="Carlito"/>
                 <a:cs typeface="Carlito"/>
               </a:rPr>
-              <a:t>2,33</a:t>
-            </a:r>
-            <a:endParaRPr lang="en-US" sz="1400"/>
+              <a:t>2,37</a:t>
+            </a:r>
           </a:p>
         </p:txBody>
       </p:sp>
@@ -15339,9 +15275,8 @@
                 <a:ea typeface="Carlito"/>
                 <a:cs typeface="Carlito"/>
               </a:rPr>
-              <a:t>* Baseline: oltre 8,6 M/s il nodo è al 60%: il limite è del banco, non del programma.</a:t>
-            </a:r>
-            <a:endParaRPr lang="en-US" sz="1200"/>
+              <a:t>* Baseline: oltre 8 M/s il nodo è al 60%: il limite è del banco, non del programma.</a:t>
+            </a:r>
           </a:p>
         </p:txBody>
       </p:sp>
@@ -15500,7 +15435,7 @@
               <a:defRPr/>
             </a:pPr>
             <a:r>
-              <a:rPr lang="en-US" sz="1500">
+              <a:rPr lang="en-US" sz="1500" b="0">
                 <a:solidFill>
                   <a:srgbClr val="222B36"/>
                 </a:solidFill>
@@ -15522,7 +15457,7 @@
               <a:t>capacità della sua pipeline</a:t>
             </a:r>
             <a:r>
-              <a:rPr lang="en-US" sz="1500">
+              <a:rPr lang="en-US" sz="1500" b="0">
                 <a:solidFill>
                   <a:srgbClr val="222B36"/>
                 </a:solidFill>
@@ -15530,9 +15465,8 @@
                 <a:ea typeface="Carlito"/>
                 <a:cs typeface="Carlito"/>
               </a:rPr>
-              <a:t>: P1 a 8,6, P1.5 a 8,1, P2 a 3,5 e P3 a 2,3 milioni di pacchetti al secondo, le stesse cifre del test di saturazione (slide 11).</a:t>
-            </a:r>
-            <a:endParaRPr lang="en-US" sz="1500"/>
+              <a:t>: P1 a 8,7, P1.5 a 8,2, P2 a 3,5 e P3 a 2,4 milioni di pacchetti al secondo, le stesse cifre del test di saturazione (slide 10).</a:t>
+            </a:r>
           </a:p>
         </p:txBody>
       </p:sp>
@@ -15575,9 +15509,8 @@
                 <a:ea typeface="Carlito"/>
                 <a:cs typeface="Carlito"/>
               </a:rPr>
-              <a:t>16 valori di traffico, 5 giri ciascuno, 64 byte, 480 finestre · xdp_gen, ritmo tenuto dal generatore · DUT a 3,5 GHz</a:t>
-            </a:r>
-            <a:endParaRPr lang="en-US" sz="1200"/>
+              <a:t>16 valori di traffico, 5 giri ciascuno, 64 byte · xdp_gen, ritmo tenuto dal generatore · nodo su un P-core a 3,5 GHz</a:t>
+            </a:r>
           </a:p>
         </p:txBody>
       </p:sp>
@@ -15622,7 +15555,6 @@
               </a:rPr>
               <a:t>15</a:t>
             </a:r>
-            <a:endParaRPr lang="en-US" sz="1200"/>
           </a:p>
         </p:txBody>
       </p:sp>
@@ -15780,14 +15712,14 @@
       </p:sp>
       <p:pic>
         <p:nvPicPr>
-          <p:cNvPr id="505416" name="Image 0" descr="Pipeline P2: pacchetti inviati, ricevuti da XDP e inoltrati al secondo contro traffico inviato. Gli inviati continuano a salire, ricevuti e inoltrati si fermano insieme a 1,9 milioni al secondo"/>
+          <p:cNvPr id="505416" name="Image 0" descr="P2: ricevuti e inoltrati coincidono e si fermano a 3,45 milioni al secondo"/>
           <p:cNvPicPr>
             <a:picLocks noChangeAspect="1"/>
           </p:cNvPicPr>
           <p:nvPr/>
         </p:nvPicPr>
         <p:blipFill rotWithShape="1">
-          <a:blip r:embed="rId5"/>
+          <a:blip r:embed="rId6"/>
           <a:stretch/>
         </p:blipFill>
         <p:spPr bwMode="auto">
@@ -16968,9 +16900,8 @@
                 <a:ea typeface="Carlito"/>
                 <a:cs typeface="Carlito"/>
               </a:rPr>
-              <a:t>Ricevuti e inoltrati si fermano insieme, a 3,5 milioni al secondo.</a:t>
-            </a:r>
-            <a:endParaRPr lang="en-US" sz="1300"/>
+              <a:t>Ricevuti e inoltrati si fermano insieme, a 3,45 milioni al secondo.</a:t>
+            </a:r>
           </a:p>
         </p:txBody>
       </p:sp>
@@ -17328,7 +17259,7 @@
               <a:defRPr/>
             </a:pPr>
             <a:r>
-              <a:rPr lang="en-US" sz="1500">
+              <a:rPr lang="en-US" sz="1500" b="0">
                 <a:solidFill>
                   <a:srgbClr val="222B36"/>
                 </a:solidFill>
@@ -17350,7 +17281,7 @@
               <a:t>dopo XDP si perde al massimo lo 0,04%</a:t>
             </a:r>
             <a:r>
-              <a:rPr lang="en-US" sz="1500">
+              <a:rPr lang="en-US" sz="1500" b="0">
                 <a:solidFill>
                   <a:srgbClr val="222B36"/>
                 </a:solidFill>
@@ -17358,9 +17289,8 @@
                 <a:ea typeface="Carlito"/>
                 <a:cs typeface="Carlito"/>
               </a:rPr>
-              <a:t> degli inviati (baseline 0,2%, sopra 8,6 M/s).</a:t>
-            </a:r>
-            <a:endParaRPr lang="en-US" sz="1500"/>
+              <a:t> degli inviati (baseline 0,15%, sopra 8 M/s).</a:t>
+            </a:r>
           </a:p>
         </p:txBody>
       </p:sp>
@@ -17450,7 +17380,6 @@
               </a:rPr>
               <a:t>16</a:t>
             </a:r>
-            <a:endParaRPr lang="en-US" sz="1200"/>
           </a:p>
         </p:txBody>
       </p:sp>
@@ -17616,14 +17545,14 @@
       </p:sp>
       <p:pic>
         <p:nvPicPr>
-          <p:cNvPr id="1819112788" name="Image 0" descr="Perdita in percentuale dei pacchetti inviati contro traffico inviato, per pipeline. Le curve salgono dopo il ginocchio di ogni pipeline fino al 43, 50, 51, 68 e 74 per cento; dopo il programma la perdita resta sotto lo 0,02 per cento"/>
+          <p:cNvPr id="1819112788" name="Image 0" descr="Perdita prima del programma al crescere del traffico; dopo il programma resta a zero"/>
           <p:cNvPicPr>
             <a:picLocks noChangeAspect="1"/>
           </p:cNvPicPr>
           <p:nvPr/>
         </p:nvPicPr>
         <p:blipFill rotWithShape="1">
-          <a:blip r:embed="rId5"/>
+          <a:blip r:embed="rId6"/>
           <a:stretch/>
         </p:blipFill>
         <p:spPr bwMode="auto">
@@ -18658,9 +18587,8 @@
                 <a:ea typeface="Carlito"/>
                 <a:cs typeface="Carlito"/>
               </a:rPr>
-              <a:t>61%</a:t>
-            </a:r>
-            <a:endParaRPr lang="en-US" sz="1700"/>
+              <a:t>63%</a:t>
+            </a:r>
           </a:p>
         </p:txBody>
       </p:sp>
@@ -19120,9 +19048,8 @@
                 <a:ea typeface="Carlito"/>
                 <a:cs typeface="Carlito"/>
               </a:rPr>
-              <a:t>1%*</a:t>
-            </a:r>
-            <a:endParaRPr lang="en-US" sz="1700"/>
+              <a:t>1,3%*</a:t>
+            </a:r>
           </a:p>
         </p:txBody>
       </p:sp>
@@ -19274,9 +19201,8 @@
                 <a:ea typeface="Carlito"/>
                 <a:cs typeface="Carlito"/>
               </a:rPr>
-              <a:t>0,3%</a:t>
-            </a:r>
-            <a:endParaRPr lang="en-US" sz="1700"/>
+              <a:t>0,1%</a:t>
+            </a:r>
           </a:p>
         </p:txBody>
       </p:sp>
@@ -19443,9 +19369,8 @@
                 <a:ea typeface="Carlito"/>
                 <a:cs typeface="Carlito"/>
               </a:rPr>
-              <a:t>a ogni traffico (* baseline: banco, nodo al 60%; 0,2% dopo)</a:t>
-            </a:r>
-            <a:endParaRPr lang="en-US" sz="1200"/>
+              <a:t>a ogni traffico (* baseline: banco, nodo al 60%; 0,15% dopo)</a:t>
+            </a:r>
           </a:p>
         </p:txBody>
       </p:sp>
@@ -19679,9 +19604,8 @@
                 <a:ea typeface="Carlito"/>
                 <a:cs typeface="Carlito"/>
               </a:rPr>
-              <a:t>Perdita = (inviati − inoltrati) / inviati · mediana di 5 giri · si chiedono fino a 12 M pacchetti/s; a coda piena il generatore ne invia 8,7–9,4</a:t>
-            </a:r>
-            <a:endParaRPr lang="en-US" sz="1200"/>
+              <a:t>Perdita = (inviati − inoltrati) / inviati · mediana di 5 giri · si chiedono fino a 12 M pacchetti/s; a coda piena il generatore ne invia 9,0–9,5</a:t>
+            </a:r>
           </a:p>
         </p:txBody>
       </p:sp>
@@ -19726,7 +19650,6 @@
               </a:rPr>
               <a:t>17</a:t>
             </a:r>
-            <a:endParaRPr lang="en-US" sz="1200"/>
           </a:p>
         </p:txBody>
       </p:sp>
@@ -19929,9 +19852,8 @@
                 <a:ea typeface="Carlito"/>
                 <a:cs typeface="Carlito"/>
               </a:rPr>
-              <a:t>Fino a 11 milioni di pacchetti al secondo il solo contatore (rxonly) non perde niente; a 12 milioni perde lo 0,3%.</a:t>
-            </a:r>
-            <a:endParaRPr lang="en-US" sz="1600"/>
+              <a:t>Fino a 11 milioni di pacchetti al secondo il solo contatore (rxonly) non perde niente; a 12 milioni perde lo 0,1%.</a:t>
+            </a:r>
           </a:p>
         </p:txBody>
       </p:sp>
@@ -20385,9 +20307,8 @@
                 <a:ea typeface="Carlito"/>
                 <a:cs typeface="Carlito"/>
               </a:rPr>
-              <a:t>0,3%</a:t>
-            </a:r>
-            <a:endParaRPr lang="en-US" sz="1500"/>
+              <a:t>0,1%</a:t>
+            </a:r>
           </a:p>
         </p:txBody>
       </p:sp>
@@ -20567,7 +20488,7 @@
         <p:spPr bwMode="auto">
           <a:xfrm>
             <a:off x="2066543" y="3304517"/>
-            <a:ext cx="64970" cy="279400"/>
+            <a:ext cx="60234" cy="279400"/>
           </a:xfrm>
           <a:custGeom>
             <a:avLst/>
@@ -20653,9 +20574,8 @@
                 <a:ea typeface="Carlito"/>
                 <a:cs typeface="Carlito"/>
               </a:rPr>
-              <a:t>1,2%</a:t>
-            </a:r>
-            <a:endParaRPr lang="en-US" sz="1500"/>
+              <a:t>1,1%</a:t>
+            </a:r>
           </a:p>
         </p:txBody>
       </p:sp>
@@ -20743,9 +20663,8 @@
                 <a:ea typeface="Carlito"/>
                 <a:cs typeface="Carlito"/>
               </a:rPr>
-              <a:t>0,1%</a:t>
-            </a:r>
-            <a:endParaRPr lang="en-US" sz="1400"/>
+              <a:t>0,15%</a:t>
+            </a:r>
           </a:p>
         </p:txBody>
       </p:sp>
@@ -20835,7 +20754,7 @@
         <p:spPr bwMode="auto">
           <a:xfrm>
             <a:off x="2066543" y="3698218"/>
-            <a:ext cx="357337" cy="279400"/>
+            <a:ext cx="370194" cy="279400"/>
           </a:xfrm>
           <a:custGeom>
             <a:avLst/>
@@ -20921,9 +20840,8 @@
                 <a:ea typeface="Carlito"/>
                 <a:cs typeface="Carlito"/>
               </a:rPr>
-              <a:t>6,6%</a:t>
-            </a:r>
-            <a:endParaRPr lang="en-US" sz="1500"/>
+              <a:t>6,9%</a:t>
+            </a:r>
           </a:p>
         </p:txBody>
       </p:sp>
@@ -20966,9 +20884,8 @@
                 <a:ea typeface="Carlito"/>
                 <a:cs typeface="Carlito"/>
               </a:rPr>
-              <a:t>+6,3 punti</a:t>
-            </a:r>
-            <a:endParaRPr lang="en-US" sz="1400"/>
+              <a:t>+6,7 punti</a:t>
+            </a:r>
           </a:p>
         </p:txBody>
       </p:sp>
@@ -21103,7 +21020,7 @@
         <p:spPr bwMode="auto">
           <a:xfrm>
             <a:off x="2066543" y="4091918"/>
-            <a:ext cx="508935" cy="279400"/>
+            <a:ext cx="480039" cy="279400"/>
           </a:xfrm>
           <a:custGeom>
             <a:avLst/>
@@ -21189,9 +21106,8 @@
                 <a:ea typeface="Carlito"/>
                 <a:cs typeface="Carlito"/>
               </a:rPr>
-              <a:t>9,4%</a:t>
-            </a:r>
-            <a:endParaRPr lang="en-US" sz="1500"/>
+              <a:t>8,9%</a:t>
+            </a:r>
           </a:p>
         </p:txBody>
       </p:sp>
@@ -21234,9 +21150,8 @@
                 <a:ea typeface="Carlito"/>
                 <a:cs typeface="Carlito"/>
               </a:rPr>
-              <a:t>+9,1 punti</a:t>
-            </a:r>
-            <a:endParaRPr lang="en-US" sz="1400"/>
+              <a:t>+8,8 punti</a:t>
+            </a:r>
           </a:p>
         </p:txBody>
       </p:sp>
@@ -21371,7 +21286,7 @@
         <p:spPr bwMode="auto">
           <a:xfrm>
             <a:off x="2066543" y="4485618"/>
-            <a:ext cx="3329739" cy="279400"/>
+            <a:ext cx="3371167" cy="279400"/>
           </a:xfrm>
           <a:custGeom>
             <a:avLst/>
@@ -21457,9 +21372,8 @@
                 <a:ea typeface="Carlito"/>
                 <a:cs typeface="Carlito"/>
               </a:rPr>
-              <a:t>61%</a:t>
-            </a:r>
-            <a:endParaRPr lang="en-US" sz="1500"/>
+              <a:t>63%</a:t>
+            </a:r>
           </a:p>
         </p:txBody>
       </p:sp>
@@ -21502,9 +21416,8 @@
                 <a:ea typeface="Carlito"/>
                 <a:cs typeface="Carlito"/>
               </a:rPr>
-              <a:t>+61 punti</a:t>
-            </a:r>
-            <a:endParaRPr lang="en-US" sz="1400"/>
+              <a:t>+62 punti</a:t>
+            </a:r>
           </a:p>
         </p:txBody>
       </p:sp>
@@ -21639,7 +21552,7 @@
         <p:spPr bwMode="auto">
           <a:xfrm>
             <a:off x="2066543" y="4879318"/>
-            <a:ext cx="4098557" cy="279400"/>
+            <a:ext cx="4079848" cy="279400"/>
           </a:xfrm>
           <a:custGeom>
             <a:avLst/>
@@ -21727,7 +21640,6 @@
               </a:rPr>
               <a:t>76%</a:t>
             </a:r>
-            <a:endParaRPr lang="en-US" sz="1500"/>
           </a:p>
         </p:txBody>
       </p:sp>
@@ -21770,9 +21682,8 @@
                 <a:ea typeface="Carlito"/>
                 <a:cs typeface="Carlito"/>
               </a:rPr>
-              <a:t>+75 punti</a:t>
-            </a:r>
-            <a:endParaRPr lang="en-US" sz="1400"/>
+              <a:t>+76 punti</a:t>
+            </a:r>
           </a:p>
         </p:txBody>
       </p:sp>
@@ -21984,9 +21895,8 @@
                 <a:ea typeface="Carlito"/>
                 <a:cs typeface="Carlito"/>
               </a:rPr>
-              <a:t>La perdita cresce con il costo del programma: 7% per P1, 9% per P1.5, 61% per P2, 76% per P3. *La baseline perde l'1% con il nodo al 60%: è il banco, non il programma.</a:t>
-            </a:r>
-            <a:endParaRPr lang="en-US" sz="1500"/>
+              <a:t>La perdita cresce con il costo del programma: 7% per P1, 9% per P1.5, 63% per P2, 76% per P3. *La baseline perde l'1% con il nodo al 60%: è il banco, non il programma.</a:t>
+            </a:r>
           </a:p>
         </p:txBody>
       </p:sp>
@@ -22076,7 +21986,6 @@
               </a:rPr>
               <a:t>18</a:t>
             </a:r>
-            <a:endParaRPr lang="en-US" sz="1200"/>
           </a:p>
         </p:txBody>
       </p:sp>
@@ -22242,14 +22151,14 @@
       </p:sp>
       <p:pic>
         <p:nvPicPr>
-          <p:cNvPr id="1585532326" name="Image 0" descr="Ritardo mediano in microsecondi contro traffico inviato. Resta di pochi microsecondi finché il nodo regge, poi salta a 85, 95, 99, 154 e 186 microsecondi per baseline, P1, P1.5, P2 e P3 dove comincia la perdita"/>
+          <p:cNvPr id="1585532326" name="Image 0" descr="Ritardo mediano al crescere del traffico: salta dove comincia la perdita"/>
           <p:cNvPicPr>
             <a:picLocks noChangeAspect="1"/>
           </p:cNvPicPr>
           <p:nvPr/>
         </p:nvPicPr>
         <p:blipFill rotWithShape="1">
-          <a:blip r:embed="rId5"/>
+          <a:blip r:embed="rId6"/>
           <a:stretch/>
         </p:blipFill>
         <p:spPr bwMode="auto">
@@ -23511,7 +23420,6 @@
               </a:rPr>
               <a:t>34 µs</a:t>
             </a:r>
-            <a:endParaRPr lang="en-US" sz="1400"/>
           </a:p>
         </p:txBody>
       </p:sp>
@@ -23708,9 +23616,8 @@
                 <a:ea typeface="Carlito"/>
                 <a:cs typeface="Carlito"/>
               </a:rPr>
-              <a:t>36 µs</a:t>
-            </a:r>
-            <a:endParaRPr lang="en-US" sz="1400"/>
+              <a:t>35 µs</a:t>
+            </a:r>
           </a:p>
         </p:txBody>
       </p:sp>
@@ -23907,9 +23814,8 @@
                 <a:ea typeface="Carlito"/>
                 <a:cs typeface="Carlito"/>
               </a:rPr>
-              <a:t>83 µs</a:t>
-            </a:r>
-            <a:endParaRPr lang="en-US" sz="1400"/>
+              <a:t>84 µs</a:t>
+            </a:r>
           </a:p>
         </p:txBody>
       </p:sp>
@@ -24061,9 +23967,8 @@
                 <a:ea typeface="Carlito"/>
                 <a:cs typeface="Carlito"/>
               </a:rPr>
-              <a:t>110 µs</a:t>
-            </a:r>
-            <a:endParaRPr lang="en-US" sz="1400"/>
+              <a:t>109 µs</a:t>
+            </a:r>
           </a:p>
         </p:txBody>
       </p:sp>
@@ -24108,7 +24013,6 @@
               </a:rPr>
               <a:t>125 µs</a:t>
             </a:r>
-            <a:endParaRPr lang="en-US" sz="1400"/>
           </a:p>
         </p:txBody>
       </p:sp>
@@ -24434,7 +24338,6 @@
               </a:rPr>
               <a:t>19</a:t>
             </a:r>
-            <a:endParaRPr lang="en-US" sz="1200"/>
           </a:p>
         </p:txBody>
       </p:sp>
@@ -26116,7 +26019,6 @@
               </a:rPr>
               <a:t>2</a:t>
             </a:r>
-            <a:endParaRPr lang="en-US" sz="1200"/>
           </a:p>
         </p:txBody>
       </p:sp>
@@ -26428,9 +26330,8 @@
                 <a:ea typeface="Carlito"/>
                 <a:cs typeface="Carlito"/>
               </a:rPr>
-              <a:t>Il dual boot rende le misure ripetibili</a:t>
-            </a:r>
-            <a:endParaRPr lang="en-US" sz="1900"/>
+              <a:t>Le misure si ripetono</a:t>
+            </a:r>
           </a:p>
         </p:txBody>
       </p:sp>
@@ -26473,9 +26374,8 @@
                 <a:ea typeface="Carlito"/>
                 <a:cs typeface="Carlito"/>
               </a:rPr>
-              <a:t>La variazione del costo scende da 15–160% a 2–4%. Il core del nodo non dorme, non cambia frequenza e nessuno lo interrompe.</a:t>
-            </a:r>
-            <a:endParaRPr lang="en-US" sz="1450"/>
+              <a:t>Quattro misure diverse dello stesso nodo danno lo stesso costo entro il 2%. Il core del nodo non dorme, non cambia frequenza e nessuno lo interrompe.</a:t>
+            </a:r>
           </a:p>
         </p:txBody>
       </p:sp>
@@ -26672,9 +26572,8 @@
                 <a:ea typeface="Carlito"/>
                 <a:cs typeface="Carlito"/>
               </a:rPr>
-              <a:t>xdp_gen consegna frame senza copia: P1–P3 da 115 a 416 ns, e due core reggono il doppio. pktgen resta un'alternativa.</a:t>
-            </a:r>
-            <a:endParaRPr lang="en-US" sz="1450"/>
+              <a:t>xdp_gen consegna frame senza copia: P1–P3 da 117 a 425 ns, due core reggono il doppio, e su un E-core il nodo regge il 61–82%.</a:t>
+            </a:r>
           </a:p>
         </p:txBody>
       </p:sp>
@@ -26871,9 +26770,8 @@
                 <a:ea typeface="Carlito"/>
                 <a:cs typeface="Carlito"/>
               </a:rPr>
-              <a:t>Il nodo satura alla sua capacità, il ritardo sale alla coda piena e la perdita è tutta all'ingresso: il collo di bottiglia è il programma, e due core reggono il doppio.</a:t>
-            </a:r>
-            <a:endParaRPr lang="en-US" sz="1450"/>
+              <a:t>Il nodo satura alla sua capacità, il ritardo sale alla coda piena e la perdita è tutta all'ingresso: il collo di bottiglia è il programma.</a:t>
+            </a:r>
           </a:p>
         </p:txBody>
       </p:sp>
@@ -26963,7 +26861,6 @@
               </a:rPr>
               <a:t>20</a:t>
             </a:r>
-            <a:endParaRPr lang="en-US" sz="1200"/>
           </a:p>
         </p:txBody>
       </p:sp>
@@ -27604,9 +27501,8 @@
                 <a:ea typeface="Carlito"/>
                 <a:cs typeface="Carlito"/>
               </a:rPr>
-              <a:t>Dalla macchina virtuale al dual boot.</a:t>
-            </a:r>
-            <a:endParaRPr lang="en-US" sz="1400"/>
+              <a:t>Perché il nodo vuole un core vero, tutto suo.</a:t>
+            </a:r>
           </a:p>
         </p:txBody>
       </p:sp>
@@ -28146,9 +28042,8 @@
                 <a:ea typeface="Carlito"/>
                 <a:cs typeface="Carlito"/>
               </a:rPr>
-              <a:t>Quanto regge il nodo, su uno e due core.</a:t>
-            </a:r>
-            <a:endParaRPr lang="en-US" sz="1400"/>
+              <a:t>Quanto regge il nodo, su uno e due core, e sui core lenti.</a:t>
+            </a:r>
           </a:p>
         </p:txBody>
       </p:sp>
@@ -28671,7 +28566,7 @@
               <a:defRPr/>
             </a:pPr>
             <a:r>
-              <a:rPr lang="en-US" sz="1500">
+              <a:rPr lang="en-US" sz="1500" b="0">
                 <a:solidFill>
                   <a:srgbClr val="222B36"/>
                 </a:solidFill>
@@ -28693,7 +28588,7 @@
               <a:t>prima</a:t>
             </a:r>
             <a:r>
-              <a:rPr lang="en-US" sz="1500">
+              <a:rPr lang="en-US" sz="1500" b="0">
                 <a:solidFill>
                   <a:srgbClr val="222B36"/>
                 </a:solidFill>
@@ -28715,7 +28610,7 @@
               <a:t>il programma</a:t>
             </a:r>
             <a:r>
-              <a:rPr lang="en-US" sz="1500">
+              <a:rPr lang="en-US" sz="1500" b="0">
                 <a:solidFill>
                   <a:srgbClr val="222B36"/>
                 </a:solidFill>
@@ -28723,9 +28618,8 @@
                 <a:ea typeface="Carlito"/>
                 <a:cs typeface="Carlito"/>
               </a:rPr>
-              <a:t>. E le misure ora si ripetono.</a:t>
-            </a:r>
-            <a:endParaRPr lang="en-US" sz="1500"/>
+              <a:t>. E le misure si ripetono entro pochi punti.</a:t>
+            </a:r>
           </a:p>
         </p:txBody>
       </p:sp>
@@ -28768,9 +28662,8 @@
                 <a:ea typeface="Carlito"/>
                 <a:cs typeface="Carlito"/>
               </a:rPr>
-              <a:t>Le parti 2–5 raccontano ciò che è cambiato dal test in macchina virtuale</a:t>
-            </a:r>
-            <a:endParaRPr lang="en-US" sz="1200"/>
+              <a:t>Tutte le cifre: campagna del 6 ottobre 2026, nodo su un P-core a 3,5 GHz salvo dove detto</a:t>
+            </a:r>
           </a:p>
         </p:txBody>
       </p:sp>
@@ -28815,7 +28708,6 @@
               </a:rPr>
               <a:t>3</a:t>
             </a:r>
-            <a:endParaRPr lang="en-US" sz="1200"/>
           </a:p>
         </p:txBody>
       </p:sp>
@@ -30447,7 +30339,6 @@
               </a:rPr>
               <a:t>4</a:t>
             </a:r>
-            <a:endParaRPr lang="en-US" sz="1200"/>
           </a:p>
         </p:txBody>
       </p:sp>
@@ -32434,7 +32325,6 @@
               </a:rPr>
               <a:t>5</a:t>
             </a:r>
-            <a:endParaRPr lang="en-US" sz="1200"/>
           </a:p>
         </p:txBody>
       </p:sp>
@@ -32547,9 +32437,8 @@
                 <a:ea typeface="Carlito"/>
                 <a:cs typeface="Carlito"/>
               </a:rPr>
-              <a:t>2 · MACCHINA VIRTUALE E DUAL BOOT · IL PROBLEMA</a:t>
-            </a:r>
-            <a:endParaRPr lang="en-US" sz="1200"/>
+              <a:t>2 · LA MACCHINA · IL VINCOLO</a:t>
+            </a:r>
           </a:p>
         </p:txBody>
       </p:sp>
@@ -32592,9 +32481,8 @@
                 <a:ea typeface="Carlito"/>
                 <a:cs typeface="Carlito"/>
               </a:rPr>
-              <a:t>Nella macchina virtuale il nodo ogni tanto si fermava</a:t>
-            </a:r>
-            <a:endParaRPr lang="en-US" sz="3000"/>
+              <a:t>Il nodo non può fermarsi più di 170 µs</a:t>
+            </a:r>
           </a:p>
         </p:txBody>
       </p:sp>
@@ -33213,9 +33101,8 @@
                 <a:ea typeface="Carlito"/>
                 <a:cs typeface="Carlito"/>
               </a:rPr>
-              <a:t>Due strade, entrambe cattive</a:t>
-            </a:r>
-            <a:endParaRPr lang="en-US" sz="1600"/>
+              <a:t>Che cosa succede se si ferma</a:t>
+            </a:r>
           </a:p>
         </p:txBody>
       </p:sp>
@@ -33337,9 +33224,8 @@
                 <a:ea typeface="Carlito"/>
                 <a:cs typeface="Carlito"/>
               </a:rPr>
-              <a:t>Generatore e nodo su core separati</a:t>
-            </a:r>
-            <a:endParaRPr lang="en-US" sz="1600"/>
+              <a:t>Se il core del nodo si ferma</a:t>
+            </a:r>
           </a:p>
         </p:txBody>
       </p:sp>
@@ -33374,7 +33260,7 @@
               <a:defRPr/>
             </a:pPr>
             <a:r>
-              <a:rPr lang="en-US" sz="1400">
+              <a:rPr lang="en-US" sz="1400" b="0">
                 <a:solidFill>
                   <a:srgbClr val="222B36"/>
                 </a:solidFill>
@@ -33382,7 +33268,7 @@
                 <a:ea typeface="Carlito"/>
                 <a:cs typeface="Carlito"/>
               </a:rPr>
-              <a:t>Il nodo perdeva </a:t>
+              <a:t>La coda trabocca e si perde </a:t>
             </a:r>
             <a:r>
               <a:rPr lang="en-US" sz="1400" b="1">
@@ -33393,10 +33279,10 @@
                 <a:ea typeface="Carlito"/>
                 <a:cs typeface="Carlito"/>
               </a:rPr>
-              <a:t>fra l'8 e il 70%</a:t>
-            </a:r>
-            <a:r>
-              <a:rPr lang="en-US" sz="1400">
+              <a:t>a qualunque ritmo</a:t>
+            </a:r>
+            <a:r>
+              <a:rPr lang="en-US" sz="1400" b="0">
                 <a:solidFill>
                   <a:srgbClr val="222B36"/>
                 </a:solidFill>
@@ -33404,9 +33290,8 @@
                 <a:ea typeface="Carlito"/>
                 <a:cs typeface="Carlito"/>
               </a:rPr>
-              <a:t> dei pacchetti a qualunque ritmo, anche lentissimo.</a:t>
-            </a:r>
-            <a:endParaRPr lang="en-US" sz="1400"/>
+              <a:t>, anche lentissimo: la perdita misura le assenze del core.</a:t>
+            </a:r>
           </a:p>
         </p:txBody>
       </p:sp>
@@ -33528,9 +33413,8 @@
                 <a:ea typeface="Carlito"/>
                 <a:cs typeface="Carlito"/>
               </a:rPr>
-              <a:t>Generatore e nodo sullo stesso core</a:t>
-            </a:r>
-            <a:endParaRPr lang="en-US" sz="1600"/>
+              <a:t>Se generatore e nodo dividono il core</a:t>
+            </a:r>
           </a:p>
         </p:txBody>
       </p:sp>
@@ -33565,7 +33449,7 @@
               <a:defRPr/>
             </a:pPr>
             <a:r>
-              <a:rPr lang="en-US" sz="1400">
+              <a:rPr lang="en-US" sz="1400" b="0">
                 <a:solidFill>
                   <a:srgbClr val="222B36"/>
                 </a:solidFill>
@@ -33573,7 +33457,7 @@
                 <a:ea typeface="Carlito"/>
                 <a:cs typeface="Carlito"/>
               </a:rPr>
-              <a:t>Non si perdeva niente, ma il core faceva il lavoro di tutti e due: il collo di bottiglia era sempre </a:t>
+              <a:t>Non si perde niente, ma il core fa il lavoro di tutti e due: il collo di bottiglia diventa </a:t>
             </a:r>
             <a:r>
               <a:rPr lang="en-US" sz="1400" b="1">
@@ -33587,7 +33471,7 @@
               <a:t>il generatore</a:t>
             </a:r>
             <a:r>
-              <a:rPr lang="en-US" sz="1400">
+              <a:rPr lang="en-US" sz="1400" b="0">
                 <a:solidFill>
                   <a:srgbClr val="222B36"/>
                 </a:solidFill>
@@ -33597,7 +33481,6 @@
               </a:rPr>
               <a:t>.</a:t>
             </a:r>
-            <a:endParaRPr lang="en-US" sz="1400"/>
           </a:p>
         </p:txBody>
       </p:sp>
@@ -33764,31 +33647,8 @@
                 <a:ea typeface="Carlito"/>
                 <a:cs typeface="Carlito"/>
               </a:rPr>
-              <a:t>La perdita misurava </a:t>
-            </a:r>
-            <a:r>
-              <a:rPr lang="en-US" sz="1500" b="1">
-                <a:solidFill>
-                  <a:srgbClr val="222B36"/>
-                </a:solidFill>
-                <a:latin typeface="Carlito"/>
-                <a:ea typeface="Carlito"/>
-                <a:cs typeface="Carlito"/>
-              </a:rPr>
-              <a:t>le assenze del core</a:t>
-            </a:r>
-            <a:r>
-              <a:rPr lang="en-US" sz="1500">
-                <a:solidFill>
-                  <a:srgbClr val="222B36"/>
-                </a:solidFill>
-                <a:latin typeface="Carlito"/>
-                <a:ea typeface="Carlito"/>
-                <a:cs typeface="Carlito"/>
-              </a:rPr>
-              <a:t>, non il programma: dentro la macchina virtuale un core può fermarsi per millisecondi, e non si vede né si può impedire.</a:t>
-            </a:r>
-            <a:endParaRPr lang="en-US" sz="1500"/>
+              <a:t>Il nodo vuole un core fisico suo, sveglio e senza interruzioni: per questo il banco gira sul portatile vero, non in una macchina virtuale, dove un core può sparire per millisecondi.</a:t>
+            </a:r>
           </a:p>
         </p:txBody>
       </p:sp>
@@ -33833,7 +33693,6 @@
               </a:rPr>
               <a:t>6</a:t>
             </a:r>
-            <a:endParaRPr lang="en-US" sz="1200"/>
           </a:p>
         </p:txBody>
       </p:sp>
@@ -33946,9 +33805,8 @@
                 <a:ea typeface="Carlito"/>
                 <a:cs typeface="Carlito"/>
               </a:rPr>
-              <a:t>2 · MACCHINA VIRTUALE E DUAL BOOT · LA SOLUZIONE</a:t>
-            </a:r>
-            <a:endParaRPr lang="en-US" sz="1200"/>
+              <a:t>2 · LA MACCHINA · LA SOLUZIONE</a:t>
+            </a:r>
           </a:p>
         </p:txBody>
       </p:sp>
@@ -33991,9 +33849,8 @@
                 <a:ea typeface="Carlito"/>
                 <a:cs typeface="Carlito"/>
               </a:rPr>
-              <a:t>Sul dual boot ogni core ha un ruolo fisso</a:t>
-            </a:r>
-            <a:endParaRPr lang="en-US" sz="3000"/>
+              <a:t>Ogni core ha un ruolo fisso</a:t>
+            </a:r>
           </a:p>
         </p:txBody>
       </p:sp>
@@ -35393,9 +35250,8 @@
                 <a:ea typeface="Carlito"/>
                 <a:cs typeface="Carlito"/>
               </a:rPr>
-              <a:t>E-core 12–19 e LP E-core 20–21: sistema</a:t>
-            </a:r>
-            <a:endParaRPr lang="en-US" sz="1200"/>
+              <a:t>E-core 12–19 e LP E-core 20–21: sistema (o il nodo, slide 12)</a:t>
+            </a:r>
           </a:p>
         </p:txBody>
       </p:sp>
@@ -35605,9 +35461,8 @@
                 <a:ea typeface="Carlito"/>
                 <a:cs typeface="Carlito"/>
               </a:rPr>
-              <a:t>3,5 GHz richiesti, 3 494 MHz misurati dai contatori del processore durante ogni misura.</a:t>
-            </a:r>
-            <a:endParaRPr lang="en-US" sz="1300"/>
+              <a:t>3,5 GHz richiesti, 3 472–3 507 MHz misurati dai contatori del processore durante ogni misura.</a:t>
+            </a:r>
           </a:p>
         </p:txBody>
       </p:sp>
@@ -36344,7 +36199,6 @@
               </a:rPr>
               <a:t>7</a:t>
             </a:r>
-            <a:endParaRPr lang="en-US" sz="1200"/>
           </a:p>
         </p:txBody>
       </p:sp>
@@ -36457,9 +36311,8 @@
                 <a:ea typeface="Carlito"/>
                 <a:cs typeface="Carlito"/>
               </a:rPr>
-              <a:t>2 · MACCHINA VIRTUALE E DUAL BOOT · PRIMA E DOPO</a:t>
-            </a:r>
-            <a:endParaRPr lang="en-US" sz="1200"/>
+              <a:t>2 · LA MACCHINA · RIPETIBILITÀ</a:t>
+            </a:r>
           </a:p>
         </p:txBody>
       </p:sp>
@@ -36502,9 +36355,8 @@
                 <a:ea typeface="Carlito"/>
                 <a:cs typeface="Carlito"/>
               </a:rPr>
-              <a:t>Con il dual boot le misure si ripetono</a:t>
-            </a:r>
-            <a:endParaRPr lang="en-US" sz="3000"/>
+              <a:t>Le misure si ripetono entro pochi punti</a:t>
+            </a:r>
           </a:p>
         </p:txBody>
       </p:sp>
@@ -36579,9 +36431,8 @@
                 <a:ea typeface="Carlito"/>
                 <a:cs typeface="Carlito"/>
               </a:rPr>
-              <a:t>Macchina virtuale</a:t>
-            </a:r>
-            <a:endParaRPr lang="en-US" sz="1300"/>
+              <a:t>ns di CPU per pacchetto</a:t>
+            </a:r>
           </a:p>
         </p:txBody>
       </p:sp>
@@ -36656,9 +36507,8 @@
                 <a:ea typeface="Carlito"/>
                 <a:cs typeface="Carlito"/>
               </a:rPr>
-              <a:t>Dual boot</a:t>
-            </a:r>
-            <a:endParaRPr lang="en-US" sz="1300"/>
+              <a:t>stessa sessione</a:t>
+            </a:r>
           </a:p>
         </p:txBody>
       </p:sp>
@@ -36708,11 +36558,6 @@
                         </a:rPr>
                         <a:t>Pipeline</a:t>
                       </a:r>
-                      <a:endParaRPr lang="en-US" sz="1300">
-                        <a:latin typeface="Carlito"/>
-                        <a:ea typeface="Carlito"/>
-                        <a:cs typeface="Carlito"/>
-                      </a:endParaRPr>
                     </a:p>
                   </a:txBody>
                   <a:tcPr marL="57785" marR="57785" marT="57785" marB="57785">
@@ -36761,13 +36606,8 @@
                           <a:ea typeface="Carlito"/>
                           <a:cs typeface="Carlito"/>
                         </a:rPr>
-                        <a:t>costo</a:t>
+                        <a:t>64 B</a:t>
                       </a:r>
-                      <a:endParaRPr lang="en-US" sz="1300">
-                        <a:latin typeface="Carlito"/>
-                        <a:ea typeface="Carlito"/>
-                        <a:cs typeface="Carlito"/>
-                      </a:endParaRPr>
                     </a:p>
                   </a:txBody>
                   <a:tcPr marL="57785" marR="57785" marT="57785" marB="57785">
@@ -36816,13 +36656,8 @@
                           <a:ea typeface="Carlito"/>
                           <a:cs typeface="Carlito"/>
                         </a:rPr>
-                        <a:t>variazione</a:t>
+                        <a:t>classe 0</a:t>
                       </a:r>
-                      <a:endParaRPr lang="en-US" sz="1300">
-                        <a:latin typeface="Carlito"/>
-                        <a:ea typeface="Carlito"/>
-                        <a:cs typeface="Carlito"/>
-                      </a:endParaRPr>
                     </a:p>
                   </a:txBody>
                   <a:tcPr marL="57785" marR="57785" marT="57785" marB="57785">
@@ -36871,13 +36706,8 @@
                           <a:ea typeface="Carlito"/>
                           <a:cs typeface="Carlito"/>
                         </a:rPr>
-                        <a:t>costo</a:t>
+                        <a:t>512 B</a:t>
                       </a:r>
-                      <a:endParaRPr lang="en-US" sz="1300">
-                        <a:latin typeface="Carlito"/>
-                        <a:ea typeface="Carlito"/>
-                        <a:cs typeface="Carlito"/>
-                      </a:endParaRPr>
                     </a:p>
                   </a:txBody>
                   <a:tcPr marL="57785" marR="57785" marT="57785" marB="57785">
@@ -36926,13 +36756,8 @@
                           <a:ea typeface="Carlito"/>
                           <a:cs typeface="Carlito"/>
                         </a:rPr>
-                        <a:t>variazione</a:t>
+                        <a:t>1514 B</a:t>
                       </a:r>
-                      <a:endParaRPr lang="en-US" sz="1300">
-                        <a:latin typeface="Carlito"/>
-                        <a:ea typeface="Carlito"/>
-                        <a:cs typeface="Carlito"/>
-                      </a:endParaRPr>
                     </a:p>
                   </a:txBody>
                   <a:tcPr marL="57785" marR="57785" marT="57785" marB="57785">
@@ -36985,11 +36810,6 @@
                         </a:rPr>
                         <a:t>P1 statica</a:t>
                       </a:r>
-                      <a:endParaRPr lang="en-US" sz="1300">
-                        <a:latin typeface="Carlito"/>
-                        <a:ea typeface="Carlito"/>
-                        <a:cs typeface="Carlito"/>
-                      </a:endParaRPr>
                     </a:p>
                   </a:txBody>
                   <a:tcPr marL="57785" marR="57785" marT="57785" marB="57785">
@@ -37031,20 +36851,12 @@
                       </a:pPr>
                       <a:r>
                         <a:rPr lang="en-US" sz="1300">
-                          <a:solidFill>
-                            <a:srgbClr val="222B36"/>
-                          </a:solidFill>
                           <a:latin typeface="Carlito"/>
                           <a:ea typeface="Carlito"/>
                           <a:cs typeface="Carlito"/>
                         </a:rPr>
-                        <a:t>~82 ns</a:t>
+                        <a:t>117</a:t>
                       </a:r>
-                      <a:endParaRPr lang="en-US" sz="1300">
-                        <a:latin typeface="Carlito"/>
-                        <a:ea typeface="Carlito"/>
-                        <a:cs typeface="Carlito"/>
-                      </a:endParaRPr>
                     </a:p>
                   </a:txBody>
                   <a:tcPr marL="57785" marR="57785" marT="57785" marB="57785">
@@ -37086,20 +36898,12 @@
                       </a:pPr>
                       <a:r>
                         <a:rPr lang="en-US" sz="1300">
-                          <a:solidFill>
-                            <a:srgbClr val="C0443C"/>
-                          </a:solidFill>
                           <a:latin typeface="Carlito"/>
                           <a:ea typeface="Carlito"/>
                           <a:cs typeface="Carlito"/>
                         </a:rPr>
-                        <a:t>160%</a:t>
+                        <a:t>118</a:t>
                       </a:r>
-                      <a:endParaRPr lang="en-US" sz="1300">
-                        <a:latin typeface="Carlito"/>
-                        <a:ea typeface="Carlito"/>
-                        <a:cs typeface="Carlito"/>
-                      </a:endParaRPr>
                     </a:p>
                   </a:txBody>
                   <a:tcPr marL="57785" marR="57785" marT="57785" marB="57785">
@@ -37141,20 +36945,12 @@
                       </a:pPr>
                       <a:r>
                         <a:rPr lang="en-US" sz="1300">
-                          <a:solidFill>
-                            <a:srgbClr val="222B36"/>
-                          </a:solidFill>
                           <a:latin typeface="Carlito"/>
                           <a:ea typeface="Carlito"/>
                           <a:cs typeface="Carlito"/>
                         </a:rPr>
-                        <a:t>49 ns</a:t>
+                        <a:t>120</a:t>
                       </a:r>
-                      <a:endParaRPr lang="en-US" sz="1300">
-                        <a:latin typeface="Carlito"/>
-                        <a:ea typeface="Carlito"/>
-                        <a:cs typeface="Carlito"/>
-                      </a:endParaRPr>
                     </a:p>
                   </a:txBody>
                   <a:tcPr marL="57785" marR="57785" marT="57785" marB="57785">
@@ -37196,20 +36992,12 @@
                       </a:pPr>
                       <a:r>
                         <a:rPr lang="en-US" sz="1300">
-                          <a:solidFill>
-                            <a:srgbClr val="2E9C6E"/>
-                          </a:solidFill>
                           <a:latin typeface="Carlito"/>
                           <a:ea typeface="Carlito"/>
                           <a:cs typeface="Carlito"/>
                         </a:rPr>
-                        <a:t>2,2%</a:t>
+                        <a:t>119</a:t>
                       </a:r>
-                      <a:endParaRPr lang="en-US" sz="1300">
-                        <a:latin typeface="Carlito"/>
-                        <a:ea typeface="Carlito"/>
-                        <a:cs typeface="Carlito"/>
-                      </a:endParaRPr>
                     </a:p>
                   </a:txBody>
                   <a:tcPr marL="57785" marR="57785" marT="57785" marB="57785">
@@ -37262,11 +37050,6 @@
                         </a:rPr>
                         <a:t>P1.5</a:t>
                       </a:r>
-                      <a:endParaRPr lang="en-US" sz="1300">
-                        <a:latin typeface="Carlito"/>
-                        <a:ea typeface="Carlito"/>
-                        <a:cs typeface="Carlito"/>
-                      </a:endParaRPr>
                     </a:p>
                   </a:txBody>
                   <a:tcPr marL="57785" marR="57785" marT="57785" marB="57785">
@@ -37308,20 +37091,12 @@
                       </a:pPr>
                       <a:r>
                         <a:rPr lang="en-US" sz="1300">
-                          <a:solidFill>
-                            <a:srgbClr val="222B36"/>
-                          </a:solidFill>
                           <a:latin typeface="Carlito"/>
                           <a:ea typeface="Carlito"/>
                           <a:cs typeface="Carlito"/>
                         </a:rPr>
-                        <a:t>~116 ns</a:t>
+                        <a:t>124</a:t>
                       </a:r>
-                      <a:endParaRPr lang="en-US" sz="1300">
-                        <a:latin typeface="Carlito"/>
-                        <a:ea typeface="Carlito"/>
-                        <a:cs typeface="Carlito"/>
-                      </a:endParaRPr>
                     </a:p>
                   </a:txBody>
                   <a:tcPr marL="57785" marR="57785" marT="57785" marB="57785">
@@ -37363,20 +37138,12 @@
                       </a:pPr>
                       <a:r>
                         <a:rPr lang="en-US" sz="1300">
-                          <a:solidFill>
-                            <a:srgbClr val="C0443C"/>
-                          </a:solidFill>
                           <a:latin typeface="Carlito"/>
                           <a:ea typeface="Carlito"/>
                           <a:cs typeface="Carlito"/>
                         </a:rPr>
-                        <a:t>104%</a:t>
+                        <a:t>124</a:t>
                       </a:r>
-                      <a:endParaRPr lang="en-US" sz="1300">
-                        <a:latin typeface="Carlito"/>
-                        <a:ea typeface="Carlito"/>
-                        <a:cs typeface="Carlito"/>
-                      </a:endParaRPr>
                     </a:p>
                   </a:txBody>
                   <a:tcPr marL="57785" marR="57785" marT="57785" marB="57785">
@@ -37418,20 +37185,12 @@
                       </a:pPr>
                       <a:r>
                         <a:rPr lang="en-US" sz="1300">
-                          <a:solidFill>
-                            <a:srgbClr val="222B36"/>
-                          </a:solidFill>
                           <a:latin typeface="Carlito"/>
                           <a:ea typeface="Carlito"/>
                           <a:cs typeface="Carlito"/>
                         </a:rPr>
-                        <a:t>58 ns</a:t>
+                        <a:t>126</a:t>
                       </a:r>
-                      <a:endParaRPr lang="en-US" sz="1300">
-                        <a:latin typeface="Carlito"/>
-                        <a:ea typeface="Carlito"/>
-                        <a:cs typeface="Carlito"/>
-                      </a:endParaRPr>
                     </a:p>
                   </a:txBody>
                   <a:tcPr marL="57785" marR="57785" marT="57785" marB="57785">
@@ -37473,20 +37232,12 @@
                       </a:pPr>
                       <a:r>
                         <a:rPr lang="en-US" sz="1300">
-                          <a:solidFill>
-                            <a:srgbClr val="2E9C6E"/>
-                          </a:solidFill>
                           <a:latin typeface="Carlito"/>
                           <a:ea typeface="Carlito"/>
                           <a:cs typeface="Carlito"/>
                         </a:rPr>
-                        <a:t>4,3%</a:t>
+                        <a:t>127</a:t>
                       </a:r>
-                      <a:endParaRPr lang="en-US" sz="1300">
-                        <a:latin typeface="Carlito"/>
-                        <a:ea typeface="Carlito"/>
-                        <a:cs typeface="Carlito"/>
-                      </a:endParaRPr>
                     </a:p>
                   </a:txBody>
                   <a:tcPr marL="57785" marR="57785" marT="57785" marB="57785">
@@ -37539,11 +37290,6 @@
                         </a:rPr>
                         <a:t>P2</a:t>
                       </a:r>
-                      <a:endParaRPr lang="en-US" sz="1300">
-                        <a:latin typeface="Carlito"/>
-                        <a:ea typeface="Carlito"/>
-                        <a:cs typeface="Carlito"/>
-                      </a:endParaRPr>
                     </a:p>
                   </a:txBody>
                   <a:tcPr marL="57785" marR="57785" marT="57785" marB="57785">
@@ -37585,20 +37331,12 @@
                       </a:pPr>
                       <a:r>
                         <a:rPr lang="en-US" sz="1300">
-                          <a:solidFill>
-                            <a:srgbClr val="222B36"/>
-                          </a:solidFill>
                           <a:latin typeface="Carlito"/>
                           <a:ea typeface="Carlito"/>
                           <a:cs typeface="Carlito"/>
                         </a:rPr>
-                        <a:t>~430 ns</a:t>
+                        <a:t>290</a:t>
                       </a:r>
-                      <a:endParaRPr lang="en-US" sz="1300">
-                        <a:latin typeface="Carlito"/>
-                        <a:ea typeface="Carlito"/>
-                        <a:cs typeface="Carlito"/>
-                      </a:endParaRPr>
                     </a:p>
                   </a:txBody>
                   <a:tcPr marL="57785" marR="57785" marT="57785" marB="57785">
@@ -37640,20 +37378,12 @@
                       </a:pPr>
                       <a:r>
                         <a:rPr lang="en-US" sz="1300">
-                          <a:solidFill>
-                            <a:srgbClr val="C0443C"/>
-                          </a:solidFill>
                           <a:latin typeface="Carlito"/>
                           <a:ea typeface="Carlito"/>
                           <a:cs typeface="Carlito"/>
                         </a:rPr>
-                        <a:t>19%</a:t>
+                        <a:t>274</a:t>
                       </a:r>
-                      <a:endParaRPr lang="en-US" sz="1300">
-                        <a:latin typeface="Carlito"/>
-                        <a:ea typeface="Carlito"/>
-                        <a:cs typeface="Carlito"/>
-                      </a:endParaRPr>
                     </a:p>
                   </a:txBody>
                   <a:tcPr marL="57785" marR="57785" marT="57785" marB="57785">
@@ -37695,20 +37425,12 @@
                       </a:pPr>
                       <a:r>
                         <a:rPr lang="en-US" sz="1300">
-                          <a:solidFill>
-                            <a:srgbClr val="222B36"/>
-                          </a:solidFill>
                           <a:latin typeface="Carlito"/>
                           <a:ea typeface="Carlito"/>
                           <a:cs typeface="Carlito"/>
                         </a:rPr>
-                        <a:t>227 ns</a:t>
+                        <a:t>284</a:t>
                       </a:r>
-                      <a:endParaRPr lang="en-US" sz="1300">
-                        <a:latin typeface="Carlito"/>
-                        <a:ea typeface="Carlito"/>
-                        <a:cs typeface="Carlito"/>
-                      </a:endParaRPr>
                     </a:p>
                   </a:txBody>
                   <a:tcPr marL="57785" marR="57785" marT="57785" marB="57785">
@@ -37750,20 +37472,12 @@
                       </a:pPr>
                       <a:r>
                         <a:rPr lang="en-US" sz="1300">
-                          <a:solidFill>
-                            <a:srgbClr val="2E9C6E"/>
-                          </a:solidFill>
                           <a:latin typeface="Carlito"/>
                           <a:ea typeface="Carlito"/>
                           <a:cs typeface="Carlito"/>
                         </a:rPr>
-                        <a:t>2,9%</a:t>
+                        <a:t>287</a:t>
                       </a:r>
-                      <a:endParaRPr lang="en-US" sz="1300">
-                        <a:latin typeface="Carlito"/>
-                        <a:ea typeface="Carlito"/>
-                        <a:cs typeface="Carlito"/>
-                      </a:endParaRPr>
                     </a:p>
                   </a:txBody>
                   <a:tcPr marL="57785" marR="57785" marT="57785" marB="57785">
@@ -37816,11 +37530,6 @@
                         </a:rPr>
                         <a:t>P3</a:t>
                       </a:r>
-                      <a:endParaRPr lang="en-US" sz="1300">
-                        <a:latin typeface="Carlito"/>
-                        <a:ea typeface="Carlito"/>
-                        <a:cs typeface="Carlito"/>
-                      </a:endParaRPr>
                     </a:p>
                   </a:txBody>
                   <a:tcPr marL="57785" marR="57785" marT="57785" marB="57785">
@@ -37862,20 +37571,12 @@
                       </a:pPr>
                       <a:r>
                         <a:rPr lang="en-US" sz="1300">
-                          <a:solidFill>
-                            <a:srgbClr val="222B36"/>
-                          </a:solidFill>
                           <a:latin typeface="Carlito"/>
                           <a:ea typeface="Carlito"/>
                           <a:cs typeface="Carlito"/>
                         </a:rPr>
-                        <a:t>~670 ns</a:t>
+                        <a:t>425</a:t>
                       </a:r>
-                      <a:endParaRPr lang="en-US" sz="1300">
-                        <a:latin typeface="Carlito"/>
-                        <a:ea typeface="Carlito"/>
-                        <a:cs typeface="Carlito"/>
-                      </a:endParaRPr>
                     </a:p>
                   </a:txBody>
                   <a:tcPr marL="57785" marR="57785" marT="57785" marB="57785">
@@ -37917,20 +37618,12 @@
                       </a:pPr>
                       <a:r>
                         <a:rPr lang="en-US" sz="1300">
-                          <a:solidFill>
-                            <a:srgbClr val="C0443C"/>
-                          </a:solidFill>
                           <a:latin typeface="Carlito"/>
                           <a:ea typeface="Carlito"/>
                           <a:cs typeface="Carlito"/>
                         </a:rPr>
-                        <a:t>15%</a:t>
+                        <a:t>416</a:t>
                       </a:r>
-                      <a:endParaRPr lang="en-US" sz="1300">
-                        <a:latin typeface="Carlito"/>
-                        <a:ea typeface="Carlito"/>
-                        <a:cs typeface="Carlito"/>
-                      </a:endParaRPr>
                     </a:p>
                   </a:txBody>
                   <a:tcPr marL="57785" marR="57785" marT="57785" marB="57785">
@@ -37972,20 +37665,12 @@
                       </a:pPr>
                       <a:r>
                         <a:rPr lang="en-US" sz="1300">
-                          <a:solidFill>
-                            <a:srgbClr val="222B36"/>
-                          </a:solidFill>
                           <a:latin typeface="Carlito"/>
                           <a:ea typeface="Carlito"/>
                           <a:cs typeface="Carlito"/>
                         </a:rPr>
-                        <a:t>350 ns</a:t>
+                        <a:t>419</a:t>
                       </a:r>
-                      <a:endParaRPr lang="en-US" sz="1300">
-                        <a:latin typeface="Carlito"/>
-                        <a:ea typeface="Carlito"/>
-                        <a:cs typeface="Carlito"/>
-                      </a:endParaRPr>
                     </a:p>
                   </a:txBody>
                   <a:tcPr marL="57785" marR="57785" marT="57785" marB="57785">
@@ -38027,20 +37712,12 @@
                       </a:pPr>
                       <a:r>
                         <a:rPr lang="en-US" sz="1300">
-                          <a:solidFill>
-                            <a:srgbClr val="2E9C6E"/>
-                          </a:solidFill>
                           <a:latin typeface="Carlito"/>
                           <a:ea typeface="Carlito"/>
                           <a:cs typeface="Carlito"/>
                         </a:rPr>
-                        <a:t>3,6%</a:t>
+                        <a:t>418</a:t>
                       </a:r>
-                      <a:endParaRPr lang="en-US" sz="1300">
-                        <a:latin typeface="Carlito"/>
-                        <a:ea typeface="Carlito"/>
-                        <a:cs typeface="Carlito"/>
-                      </a:endParaRPr>
                     </a:p>
                   </a:txBody>
                   <a:tcPr marL="57785" marR="57785" marT="57785" marB="57785">
@@ -38113,9 +37790,8 @@
                 <a:ea typeface="Carlito"/>
                 <a:cs typeface="Carlito"/>
               </a:rPr>
-              <a:t>Costo sopra la baseline, per pacchetto. Le cifre assolute non si confrontano (frequenza e metodo erano diversi): si confronta la variazione.</a:t>
-            </a:r>
-            <a:endParaRPr lang="en-US" sz="1200"/>
+              <a:t>Quattro misure diverse dello stesso nodo: pacchetti da 64 byte, una classe scelta apposta, due taglie. La porta d'uscita e la taglia non contano.</a:t>
+            </a:r>
           </a:p>
         </p:txBody>
       </p:sp>
@@ -38190,9 +37866,8 @@
                 <a:ea typeface="Carlito"/>
                 <a:cs typeface="Carlito"/>
               </a:rPr>
-              <a:t>160% → 2%</a:t>
-            </a:r>
-            <a:endParaRPr lang="en-US" sz="2800"/>
+              <a:t>≤ 2%</a:t>
+            </a:r>
           </a:p>
         </p:txBody>
       </p:sp>
@@ -38235,9 +37910,8 @@
                 <a:ea typeface="Carlito"/>
                 <a:cs typeface="Carlito"/>
               </a:rPr>
-              <a:t>variazione del costo di P1 fra le esecuzioni</a:t>
-            </a:r>
-            <a:endParaRPr lang="en-US" sz="1300"/>
+              <a:t>scarto del costo di P1 e P1.5 fra le quattro misure</a:t>
+            </a:r>
           </a:p>
         </p:txBody>
       </p:sp>
@@ -38312,31 +37986,8 @@
                 <a:ea typeface="Carlito"/>
                 <a:cs typeface="Carlito"/>
               </a:rPr>
-              <a:t>1–2%</a:t>
-            </a:r>
-            <a:r>
-              <a:rPr lang="en-US" sz="2800" b="1">
-                <a:solidFill>
-                  <a:srgbClr val="1F3A5F"/>
-                </a:solidFill>
-                <a:latin typeface="Carlito"/>
-                <a:ea typeface="Carlito"/>
-                <a:cs typeface="Carlito"/>
-              </a:rPr>
-              <a:t> → </a:t>
-            </a:r>
-            <a:r>
-              <a:rPr lang="en-US" sz="2800" b="1">
-                <a:solidFill>
-                  <a:srgbClr val="2E9C6E"/>
-                </a:solidFill>
-                <a:latin typeface="Carlito"/>
-                <a:ea typeface="Carlito"/>
-                <a:cs typeface="Carlito"/>
-              </a:rPr>
               <a:t>0</a:t>
             </a:r>
-            <a:endParaRPr lang="en-US" sz="2800"/>
           </a:p>
         </p:txBody>
       </p:sp>
@@ -38379,9 +38030,8 @@
                 <a:ea typeface="Carlito"/>
                 <a:cs typeface="Carlito"/>
               </a:rPr>
-              <a:t>pacchetti respinti sotto capacità, anche per il solo contatore</a:t>
-            </a:r>
-            <a:endParaRPr lang="en-US" sz="1300"/>
+              <a:t>pacchetti respinti con il nodo sotto la sua capacità</a:t>
+            </a:r>
           </a:p>
         </p:txBody>
       </p:sp>
@@ -38456,9 +38106,8 @@
                 <a:ea typeface="Carlito"/>
                 <a:cs typeface="Carlito"/>
               </a:rPr>
-              <a:t>58% · 0,2% · 7,7%</a:t>
-            </a:r>
-            <a:endParaRPr lang="en-US" sz="2800"/>
+              <a:t>≈ 0,1%</a:t>
+            </a:r>
           </a:p>
         </p:txBody>
       </p:sp>
@@ -38501,9 +38150,8 @@
                 <a:ea typeface="Carlito"/>
                 <a:cs typeface="Carlito"/>
               </a:rPr>
-              <a:t>perdita dello stesso punto in tre giri (macchina virtuale). Sul dual boot: in genere entro lo 0,1%, al massimo 6%</a:t>
-            </a:r>
-            <a:endParaRPr lang="en-US" sz="1300"/>
+              <a:t>scarto dell'inoltro allo stesso punto in cinque giri; al massimo 6% vicino al ginocchio</a:t>
+            </a:r>
           </a:p>
         </p:txBody>
       </p:sp>
@@ -38670,31 +38318,8 @@
                 <a:ea typeface="Carlito"/>
                 <a:cs typeface="Carlito"/>
               </a:rPr>
-              <a:t>Il guadagno vero non è la velocità, è la </a:t>
-            </a:r>
-            <a:r>
-              <a:rPr lang="en-US" sz="1500" b="1">
-                <a:solidFill>
-                  <a:srgbClr val="222B36"/>
-                </a:solidFill>
-                <a:latin typeface="Carlito"/>
-                <a:ea typeface="Carlito"/>
-                <a:cs typeface="Carlito"/>
-              </a:rPr>
-              <a:t>ripetibilità</a:t>
-            </a:r>
-            <a:r>
-              <a:rPr lang="en-US" sz="1500">
-                <a:solidFill>
-                  <a:srgbClr val="222B36"/>
-                </a:solidFill>
-                <a:latin typeface="Carlito"/>
-                <a:ea typeface="Carlito"/>
-                <a:cs typeface="Carlito"/>
-              </a:rPr>
-              <a:t>: differenze che prima sparivano nel rumore, come P1 contro P1.5 o scartare contro inoltrare, ora si misurano.</a:t>
-            </a:r>
-            <a:endParaRPr lang="en-US" sz="1500"/>
+              <a:t>Il core del nodo non dorme, non cambia frequenza e nessuno lo interrompe: differenze piccole, come P1 contro P1.5 o scartare contro inoltrare, si misurano.</a:t>
+            </a:r>
           </a:p>
         </p:txBody>
       </p:sp>
@@ -38737,9 +38362,8 @@
                 <a:ea typeface="Carlito"/>
                 <a:cs typeface="Carlito"/>
               </a:rPr>
-              <a:t>Macchina virtuale: 18 settembre, pktgen, 512 byte · dual boot: 2 ottobre, xdp_gen, 64 byte · variazione fra le esecuzioni</a:t>
-            </a:r>
-            <a:endParaRPr lang="en-US" sz="1200"/>
+              <a:t>Campagna del 6 ottobre · xdp_gen · nodo su CPU 6 a 3,5 GHz · tempo di CPU per pacchetto, mediana di 3 giri</a:t>
+            </a:r>
           </a:p>
         </p:txBody>
       </p:sp>
@@ -38784,7 +38408,6 @@
               </a:rPr>
               <a:t>8</a:t>
             </a:r>
-            <a:endParaRPr lang="en-US" sz="1200"/>
           </a:p>
         </p:txBody>
       </p:sp>
@@ -40535,9 +40158,8 @@
                 <a:ea typeface="Carlito"/>
                 <a:cs typeface="Carlito"/>
               </a:rPr>
-              <a:t>293 ns</a:t>
-            </a:r>
-            <a:endParaRPr lang="en-US" sz="3600"/>
+              <a:t>1 chiamata</a:t>
+            </a:r>
           </a:p>
         </p:txBody>
       </p:sp>
@@ -40580,9 +40202,8 @@
                 <a:ea typeface="Carlito"/>
                 <a:cs typeface="Carlito"/>
               </a:rPr>
-              <a:t>P2 con xdp_gen, contro 529 ns con pktgen</a:t>
-            </a:r>
-            <a:endParaRPr lang="en-US" sz="1400"/>
+              <a:t>per finestra di misura: il generatore non si ferma mai mentre si conta</a:t>
+            </a:r>
           </a:p>
         </p:txBody>
       </p:sp>
@@ -40749,9 +40370,8 @@
                 <a:ea typeface="Carlito"/>
                 <a:cs typeface="Carlito"/>
               </a:rPr>
-              <a:t>Il costo del generatore non passa più dal nodo. Si usa un thread per coda: più thread nella stessa coda si intralciano e rallentano anche il nodo.</a:t>
-            </a:r>
-            <a:endParaRPr lang="en-US" sz="1500"/>
+              <a:t>Il costo del generatore non passa dal nodo. Si usa un thread per coda: più thread nella stessa coda si intralciano e rallentano anche il nodo. pktgen, che copia ogni pacchetto, resta un'alternativa.</a:t>
+            </a:r>
           </a:p>
         </p:txBody>
       </p:sp>
@@ -40841,7 +40461,6 @@
               </a:rPr>
               <a:t>9</a:t>
             </a:r>
-            <a:endParaRPr lang="en-US" sz="1200"/>
           </a:p>
         </p:txBody>
       </p:sp>
